--- a/policy/proposal_004.pptx
+++ b/policy/proposal_004.pptx
@@ -2815,7 +2815,7 @@
     <p:bg>
       <p:bgPr>
         <a:solidFill>
-          <a:srgbClr val="0A0A0A"/>
+          <a:srgbClr val="F5F6F8"/>
         </a:solidFill>
       </p:bgPr>
     </p:bg>
@@ -2860,11 +2860,11 @@
             <a:r>
               <a:rPr lang="en-US" sz="1300" b="1" spc="300" kern="0" dirty="0">
                 <a:solidFill>
-                  <a:srgbClr val="D62828"/>
-                </a:solidFill>
-                <a:latin typeface="Arial" pitchFamily="34" charset="0"/>
-                <a:ea typeface="Arial" pitchFamily="34" charset="-122"/>
-                <a:cs typeface="Arial" pitchFamily="34" charset="-120"/>
+                  <a:srgbClr val="C8161D"/>
+                </a:solidFill>
+                <a:latin typeface="Arial" pitchFamily="34" charset="0"/>
+                <a:ea typeface="BIZ UDPGothic" pitchFamily="34" charset="-122"/>
+                <a:cs typeface="BIZ UDPGothic" pitchFamily="34" charset="-120"/>
               </a:rPr>
               <a:t>政策提言プラットフォーム　REBOOT JAPAN</a:t>
             </a:r>
@@ -2899,11 +2899,11 @@
             <a:r>
               <a:rPr lang="en-US" sz="2200" dirty="0">
                 <a:solidFill>
-                  <a:srgbClr val="CCCCCC"/>
-                </a:solidFill>
-                <a:latin typeface="Arial" pitchFamily="34" charset="0"/>
-                <a:ea typeface="Arial" pitchFamily="34" charset="-122"/>
-                <a:cs typeface="Arial" pitchFamily="34" charset="-120"/>
+                  <a:srgbClr val="2B2F36"/>
+                </a:solidFill>
+                <a:latin typeface="Arial" pitchFamily="34" charset="0"/>
+                <a:ea typeface="BIZ UDPGothic" pitchFamily="34" charset="-122"/>
+                <a:cs typeface="BIZ UDPGothic" pitchFamily="34" charset="-120"/>
               </a:rPr>
               <a:t>提言004</a:t>
             </a:r>
@@ -2941,11 +2941,11 @@
             <a:r>
               <a:rPr lang="en-US" sz="5400" b="1" dirty="0">
                 <a:solidFill>
-                  <a:srgbClr val="F5F5F0"/>
-                </a:solidFill>
-                <a:latin typeface="Arial" pitchFamily="34" charset="0"/>
-                <a:ea typeface="Arial" pitchFamily="34" charset="-122"/>
-                <a:cs typeface="Arial" pitchFamily="34" charset="-120"/>
+                  <a:srgbClr val="16181D"/>
+                </a:solidFill>
+                <a:latin typeface="Arial" pitchFamily="34" charset="0"/>
+                <a:ea typeface="BIZ UDPGothic" pitchFamily="34" charset="-122"/>
+                <a:cs typeface="BIZ UDPGothic" pitchFamily="34" charset="-120"/>
               </a:rPr>
               <a:t>相続税の</a:t>
             </a:r>
@@ -2961,11 +2961,11 @@
             <a:r>
               <a:rPr lang="en-US" sz="5400" b="1" dirty="0">
                 <a:solidFill>
-                  <a:srgbClr val="D62828"/>
-                </a:solidFill>
-                <a:latin typeface="Arial" pitchFamily="34" charset="0"/>
-                <a:ea typeface="Arial" pitchFamily="34" charset="-122"/>
-                <a:cs typeface="Arial" pitchFamily="34" charset="-120"/>
+                  <a:srgbClr val="C8161D"/>
+                </a:solidFill>
+                <a:latin typeface="Arial" pitchFamily="34" charset="0"/>
+                <a:ea typeface="BIZ UDPGothic" pitchFamily="34" charset="-122"/>
+                <a:cs typeface="BIZ UDPGothic" pitchFamily="34" charset="-120"/>
               </a:rPr>
               <a:t>不条理を正す</a:t>
             </a:r>
@@ -3000,11 +3000,11 @@
             <a:r>
               <a:rPr lang="en-US" sz="1600" dirty="0">
                 <a:solidFill>
-                  <a:srgbClr val="CCCCCC"/>
-                </a:solidFill>
-                <a:latin typeface="Arial" pitchFamily="34" charset="0"/>
-                <a:ea typeface="Arial" pitchFamily="34" charset="-122"/>
-                <a:cs typeface="Arial" pitchFamily="34" charset="-120"/>
+                  <a:srgbClr val="2B2F36"/>
+                </a:solidFill>
+                <a:latin typeface="Arial" pitchFamily="34" charset="0"/>
+                <a:ea typeface="BIZ UDPGothic" pitchFamily="34" charset="-122"/>
+                <a:cs typeface="BIZ UDPGothic" pitchFamily="34" charset="-120"/>
               </a:rPr>
               <a:t>中産階級を解放し、超富裕層には敬意ある税率を</a:t>
             </a:r>
@@ -3029,7 +3029,7 @@
           <a:noFill/>
           <a:ln w="12700">
             <a:solidFill>
-              <a:srgbClr val="2E2E2E"/>
+              <a:srgbClr val="DDE0E6"/>
             </a:solidFill>
             <a:prstDash val="solid"/>
           </a:ln>
@@ -3062,11 +3062,11 @@
             <a:r>
               <a:rPr lang="en-US" sz="1200" dirty="0">
                 <a:solidFill>
-                  <a:srgbClr val="888888"/>
-                </a:solidFill>
-                <a:latin typeface="Arial" pitchFamily="34" charset="0"/>
-                <a:ea typeface="Arial" pitchFamily="34" charset="-122"/>
-                <a:cs typeface="Arial" pitchFamily="34" charset="-120"/>
+                  <a:srgbClr val="626875"/>
+                </a:solidFill>
+                <a:latin typeface="Arial" pitchFamily="34" charset="0"/>
+                <a:ea typeface="BIZ UDPGothic" pitchFamily="34" charset="-122"/>
+                <a:cs typeface="BIZ UDPGothic" pitchFamily="34" charset="-120"/>
               </a:rPr>
               <a:t>わかりやすい解説版　── 中学生でも理解できるスライド</a:t>
             </a:r>
@@ -3114,7 +3114,7 @@
     <p:bg>
       <p:bgPr>
         <a:solidFill>
-          <a:srgbClr val="0A0A0A"/>
+          <a:srgbClr val="F5F6F8"/>
         </a:solidFill>
       </p:bgPr>
     </p:bg>
@@ -3159,11 +3159,11 @@
             <a:r>
               <a:rPr lang="en-US" sz="1200" b="1" spc="300" kern="0" dirty="0">
                 <a:solidFill>
-                  <a:srgbClr val="D62828"/>
-                </a:solidFill>
-                <a:latin typeface="Arial" pitchFamily="34" charset="0"/>
-                <a:ea typeface="Arial" pitchFamily="34" charset="-122"/>
-                <a:cs typeface="Arial" pitchFamily="34" charset="-120"/>
+                  <a:srgbClr val="C8161D"/>
+                </a:solidFill>
+                <a:latin typeface="Arial" pitchFamily="34" charset="0"/>
+                <a:ea typeface="BIZ UDPGothic" pitchFamily="34" charset="-122"/>
+                <a:cs typeface="BIZ UDPGothic" pitchFamily="34" charset="-120"/>
               </a:rPr>
               <a:t>2. 本当のデータはどうか</a:t>
             </a:r>
@@ -3198,11 +3198,11 @@
             <a:r>
               <a:rPr lang="en-US" sz="3000" b="1" dirty="0">
                 <a:solidFill>
-                  <a:srgbClr val="F5F5F0"/>
-                </a:solidFill>
-                <a:latin typeface="Arial" pitchFamily="34" charset="0"/>
-                <a:ea typeface="Arial" pitchFamily="34" charset="-122"/>
-                <a:cs typeface="Arial" pitchFamily="34" charset="-120"/>
+                  <a:srgbClr val="16181D"/>
+                </a:solidFill>
+                <a:latin typeface="Arial" pitchFamily="34" charset="0"/>
+                <a:ea typeface="BIZ UDPGothic" pitchFamily="34" charset="-122"/>
+                <a:cs typeface="BIZ UDPGothic" pitchFamily="34" charset="-120"/>
               </a:rPr>
               <a:t>実は、相続税がかかるのは「10人に1人」</a:t>
             </a:r>
@@ -3237,11 +3237,11 @@
             <a:r>
               <a:rPr lang="en-US" sz="1000" dirty="0">
                 <a:solidFill>
-                  <a:srgbClr val="CCCCCC"/>
-                </a:solidFill>
-                <a:latin typeface="Arial" pitchFamily="34" charset="0"/>
-                <a:ea typeface="Arial" pitchFamily="34" charset="-122"/>
-                <a:cs typeface="Arial" pitchFamily="34" charset="-120"/>
+                  <a:srgbClr val="2B2F36"/>
+                </a:solidFill>
+                <a:latin typeface="Arial" pitchFamily="34" charset="0"/>
+                <a:ea typeface="BIZ UDPGothic" pitchFamily="34" charset="-122"/>
+                <a:cs typeface="BIZ UDPGothic" pitchFamily="34" charset="-120"/>
               </a:rPr>
               <a:t>10</a:t>
             </a:r>
@@ -3276,11 +3276,11 @@
             <a:r>
               <a:rPr lang="en-US" sz="900" dirty="0">
                 <a:solidFill>
-                  <a:srgbClr val="555555"/>
-                </a:solidFill>
-                <a:latin typeface="Arial" pitchFamily="34" charset="0"/>
-                <a:ea typeface="Arial" pitchFamily="34" charset="-122"/>
-                <a:cs typeface="Arial" pitchFamily="34" charset="-120"/>
+                  <a:srgbClr val="9AA0AA"/>
+                </a:solidFill>
+                <a:latin typeface="Arial" pitchFamily="34" charset="0"/>
+                <a:ea typeface="BIZ UDPGothic" pitchFamily="34" charset="-122"/>
+                <a:cs typeface="BIZ UDPGothic" pitchFamily="34" charset="-120"/>
               </a:rPr>
               <a:t>REBOOT JAPAN ── 提言004</a:t>
             </a:r>
@@ -3315,11 +3315,11 @@
             <a:r>
               <a:rPr lang="en-US" sz="1200" dirty="0">
                 <a:solidFill>
-                  <a:srgbClr val="888888"/>
-                </a:solidFill>
-                <a:latin typeface="Arial" pitchFamily="34" charset="0"/>
-                <a:ea typeface="Arial" pitchFamily="34" charset="-122"/>
-                <a:cs typeface="Arial" pitchFamily="34" charset="-120"/>
+                  <a:srgbClr val="626875"/>
+                </a:solidFill>
+                <a:latin typeface="Arial" pitchFamily="34" charset="0"/>
+                <a:ea typeface="BIZ UDPGothic" pitchFamily="34" charset="-122"/>
+                <a:cs typeface="BIZ UDPGothic" pitchFamily="34" charset="-120"/>
               </a:rPr>
               <a:t>令和5年・国税庁のデータより</a:t>
             </a:r>
@@ -3342,7 +3342,7 @@
             <a:avLst/>
           </a:prstGeom>
           <a:solidFill>
-            <a:srgbClr val="1A1A1A"/>
+            <a:srgbClr val="FFFFFF"/>
           </a:solidFill>
           <a:ln/>
         </p:spPr>
@@ -3365,7 +3365,7 @@
             </a:avLst>
           </a:prstGeom>
           <a:solidFill>
-            <a:srgbClr val="D62828"/>
+            <a:srgbClr val="C8161D"/>
           </a:solidFill>
           <a:ln/>
         </p:spPr>
@@ -3385,7 +3385,7 @@
             <a:avLst/>
           </a:prstGeom>
           <a:solidFill>
-            <a:srgbClr val="0A0A0A"/>
+            <a:srgbClr val="F5F6F8"/>
           </a:solidFill>
           <a:ln/>
         </p:spPr>
@@ -3417,11 +3417,11 @@
             <a:r>
               <a:rPr lang="en-US" sz="2600" b="1" dirty="0">
                 <a:solidFill>
-                  <a:srgbClr val="D62828"/>
-                </a:solidFill>
-                <a:latin typeface="Arial" pitchFamily="34" charset="0"/>
-                <a:ea typeface="Arial" pitchFamily="34" charset="-122"/>
-                <a:cs typeface="Arial" pitchFamily="34" charset="-120"/>
+                  <a:srgbClr val="C8161D"/>
+                </a:solidFill>
+                <a:latin typeface="Arial" pitchFamily="34" charset="0"/>
+                <a:ea typeface="BIZ UDPGothic" pitchFamily="34" charset="-122"/>
+                <a:cs typeface="BIZ UDPGothic" pitchFamily="34" charset="-120"/>
               </a:rPr>
               <a:t>9.9%</a:t>
             </a:r>
@@ -3456,11 +3456,11 @@
             <a:r>
               <a:rPr lang="en-US" sz="1050" dirty="0">
                 <a:solidFill>
-                  <a:srgbClr val="CCCCCC"/>
-                </a:solidFill>
-                <a:latin typeface="Arial" pitchFamily="34" charset="0"/>
-                <a:ea typeface="Arial" pitchFamily="34" charset="-122"/>
-                <a:cs typeface="Arial" pitchFamily="34" charset="-120"/>
+                  <a:srgbClr val="FFFFFF"/>
+                </a:solidFill>
+                <a:latin typeface="Arial" pitchFamily="34" charset="0"/>
+                <a:ea typeface="BIZ UDPGothic" pitchFamily="34" charset="-122"/>
+                <a:cs typeface="BIZ UDPGothic" pitchFamily="34" charset="-120"/>
               </a:rPr>
               <a:t>が課税対象</a:t>
             </a:r>
@@ -3498,11 +3498,11 @@
             <a:r>
               <a:rPr lang="en-US" sz="1500" b="1" dirty="0">
                 <a:solidFill>
-                  <a:srgbClr val="F5F5F0"/>
-                </a:solidFill>
-                <a:latin typeface="Arial" pitchFamily="34" charset="0"/>
-                <a:ea typeface="Arial" pitchFamily="34" charset="-122"/>
-                <a:cs typeface="Arial" pitchFamily="34" charset="-120"/>
+                  <a:srgbClr val="16181D"/>
+                </a:solidFill>
+                <a:latin typeface="Arial" pitchFamily="34" charset="0"/>
+                <a:ea typeface="BIZ UDPGothic" pitchFamily="34" charset="-122"/>
+                <a:cs typeface="BIZ UDPGothic" pitchFamily="34" charset="-120"/>
               </a:rPr>
               <a:t>亡くなった人のうち、相続税がかかるのは約9.9%。</a:t>
             </a:r>
@@ -3518,11 +3518,11 @@
             <a:r>
               <a:rPr lang="en-US" sz="1500" dirty="0">
                 <a:solidFill>
-                  <a:srgbClr val="CCCCCC"/>
-                </a:solidFill>
-                <a:latin typeface="Arial" pitchFamily="34" charset="0"/>
-                <a:ea typeface="Arial" pitchFamily="34" charset="-122"/>
-                <a:cs typeface="Arial" pitchFamily="34" charset="-120"/>
+                  <a:srgbClr val="2B2F36"/>
+                </a:solidFill>
+                <a:latin typeface="Arial" pitchFamily="34" charset="0"/>
+                <a:ea typeface="BIZ UDPGothic" pitchFamily="34" charset="-122"/>
+                <a:cs typeface="BIZ UDPGothic" pitchFamily="34" charset="-120"/>
               </a:rPr>
               <a:t>つまり、約10人に1人だけです。</a:t>
             </a:r>
@@ -3547,11 +3547,11 @@
             </a:avLst>
           </a:prstGeom>
           <a:solidFill>
-            <a:srgbClr val="1A1A1A"/>
+            <a:srgbClr val="FFFFFF"/>
           </a:solidFill>
           <a:ln w="12700">
             <a:solidFill>
-              <a:srgbClr val="2E2E2E"/>
+              <a:srgbClr val="DDE0E6"/>
             </a:solidFill>
             <a:prstDash val="solid"/>
           </a:ln>
@@ -3587,11 +3587,11 @@
             <a:r>
               <a:rPr lang="en-US" sz="1300" dirty="0">
                 <a:solidFill>
-                  <a:srgbClr val="F5F5F0"/>
-                </a:solidFill>
-                <a:latin typeface="Arial" pitchFamily="34" charset="0"/>
-                <a:ea typeface="Arial" pitchFamily="34" charset="-122"/>
-                <a:cs typeface="Arial" pitchFamily="34" charset="-120"/>
+                  <a:srgbClr val="16181D"/>
+                </a:solidFill>
+                <a:latin typeface="Arial" pitchFamily="34" charset="0"/>
+                <a:ea typeface="BIZ UDPGothic" pitchFamily="34" charset="-122"/>
+                <a:cs typeface="BIZ UDPGothic" pitchFamily="34" charset="-120"/>
               </a:rPr>
               <a:t>課税価格2億円以下の人：約89.3%</a:t>
             </a:r>
@@ -3607,11 +3607,11 @@
             <a:r>
               <a:rPr lang="en-US" sz="1300" dirty="0">
                 <a:solidFill>
-                  <a:srgbClr val="F5F5F0"/>
-                </a:solidFill>
-                <a:latin typeface="Arial" pitchFamily="34" charset="0"/>
-                <a:ea typeface="Arial" pitchFamily="34" charset="-122"/>
-                <a:cs typeface="Arial" pitchFamily="34" charset="-120"/>
+                  <a:srgbClr val="16181D"/>
+                </a:solidFill>
+                <a:latin typeface="Arial" pitchFamily="34" charset="0"/>
+                <a:ea typeface="BIZ UDPGothic" pitchFamily="34" charset="-122"/>
+                <a:cs typeface="BIZ UDPGothic" pitchFamily="34" charset="-120"/>
               </a:rPr>
               <a:t>課税価格3億円以下の人：約94.6%</a:t>
             </a:r>
@@ -3633,7 +3633,7 @@
     <p:bg>
       <p:bgPr>
         <a:solidFill>
-          <a:srgbClr val="0A0A0A"/>
+          <a:srgbClr val="F5F6F8"/>
         </a:solidFill>
       </p:bgPr>
     </p:bg>
@@ -3678,11 +3678,11 @@
             <a:r>
               <a:rPr lang="en-US" sz="1200" b="1" spc="300" kern="0" dirty="0">
                 <a:solidFill>
-                  <a:srgbClr val="D62828"/>
-                </a:solidFill>
-                <a:latin typeface="Arial" pitchFamily="34" charset="0"/>
-                <a:ea typeface="Arial" pitchFamily="34" charset="-122"/>
-                <a:cs typeface="Arial" pitchFamily="34" charset="-120"/>
+                  <a:srgbClr val="C8161D"/>
+                </a:solidFill>
+                <a:latin typeface="Arial" pitchFamily="34" charset="0"/>
+                <a:ea typeface="BIZ UDPGothic" pitchFamily="34" charset="-122"/>
+                <a:cs typeface="BIZ UDPGothic" pitchFamily="34" charset="-120"/>
               </a:rPr>
               <a:t>2. データで見る実態</a:t>
             </a:r>
@@ -3717,11 +3717,11 @@
             <a:r>
               <a:rPr lang="en-US" sz="3000" b="1" dirty="0">
                 <a:solidFill>
-                  <a:srgbClr val="F5F5F0"/>
-                </a:solidFill>
-                <a:latin typeface="Arial" pitchFamily="34" charset="0"/>
-                <a:ea typeface="Arial" pitchFamily="34" charset="-122"/>
-                <a:cs typeface="Arial" pitchFamily="34" charset="-120"/>
+                  <a:srgbClr val="16181D"/>
+                </a:solidFill>
+                <a:latin typeface="Arial" pitchFamily="34" charset="0"/>
+                <a:ea typeface="BIZ UDPGothic" pitchFamily="34" charset="-122"/>
+                <a:cs typeface="BIZ UDPGothic" pitchFamily="34" charset="-120"/>
               </a:rPr>
               <a:t>5億円を超える人は、たった2.2%しかいない</a:t>
             </a:r>
@@ -3756,11 +3756,11 @@
             <a:r>
               <a:rPr lang="en-US" sz="1000" dirty="0">
                 <a:solidFill>
-                  <a:srgbClr val="CCCCCC"/>
-                </a:solidFill>
-                <a:latin typeface="Arial" pitchFamily="34" charset="0"/>
-                <a:ea typeface="Arial" pitchFamily="34" charset="-122"/>
-                <a:cs typeface="Arial" pitchFamily="34" charset="-120"/>
+                  <a:srgbClr val="2B2F36"/>
+                </a:solidFill>
+                <a:latin typeface="Arial" pitchFamily="34" charset="0"/>
+                <a:ea typeface="BIZ UDPGothic" pitchFamily="34" charset="-122"/>
+                <a:cs typeface="BIZ UDPGothic" pitchFamily="34" charset="-120"/>
               </a:rPr>
               <a:t>11</a:t>
             </a:r>
@@ -3795,11 +3795,11 @@
             <a:r>
               <a:rPr lang="en-US" sz="900" dirty="0">
                 <a:solidFill>
-                  <a:srgbClr val="555555"/>
-                </a:solidFill>
-                <a:latin typeface="Arial" pitchFamily="34" charset="0"/>
-                <a:ea typeface="Arial" pitchFamily="34" charset="-122"/>
-                <a:cs typeface="Arial" pitchFamily="34" charset="-120"/>
+                  <a:srgbClr val="9AA0AA"/>
+                </a:solidFill>
+                <a:latin typeface="Arial" pitchFamily="34" charset="0"/>
+                <a:ea typeface="BIZ UDPGothic" pitchFamily="34" charset="-122"/>
+                <a:cs typeface="BIZ UDPGothic" pitchFamily="34" charset="-120"/>
               </a:rPr>
               <a:t>REBOOT JAPAN ── 提言004</a:t>
             </a:r>
@@ -3824,11 +3824,11 @@
             </a:avLst>
           </a:prstGeom>
           <a:solidFill>
-            <a:srgbClr val="1A1A1A"/>
+            <a:srgbClr val="FFFFFF"/>
           </a:solidFill>
           <a:ln w="19050">
             <a:solidFill>
-              <a:srgbClr val="D62828"/>
+              <a:srgbClr val="C8161D"/>
             </a:solidFill>
             <a:prstDash val="solid"/>
           </a:ln>
@@ -3861,11 +3861,11 @@
             <a:r>
               <a:rPr lang="en-US" sz="1900" b="1" dirty="0">
                 <a:solidFill>
-                  <a:srgbClr val="F5F5F0"/>
-                </a:solidFill>
-                <a:latin typeface="Arial" pitchFamily="34" charset="0"/>
-                <a:ea typeface="Arial" pitchFamily="34" charset="-122"/>
-                <a:cs typeface="Arial" pitchFamily="34" charset="-120"/>
+                  <a:srgbClr val="16181D"/>
+                </a:solidFill>
+                <a:latin typeface="Arial" pitchFamily="34" charset="0"/>
+                <a:ea typeface="BIZ UDPGothic" pitchFamily="34" charset="-122"/>
+                <a:cs typeface="BIZ UDPGothic" pitchFamily="34" charset="-120"/>
               </a:rPr>
               <a:t>課税価格5億円を超える申告は、年間4,180件</a:t>
             </a:r>
@@ -3900,11 +3900,11 @@
             <a:r>
               <a:rPr lang="en-US" sz="1400" dirty="0">
                 <a:solidFill>
-                  <a:srgbClr val="CCCCCC"/>
-                </a:solidFill>
-                <a:latin typeface="Arial" pitchFamily="34" charset="0"/>
-                <a:ea typeface="Arial" pitchFamily="34" charset="-122"/>
-                <a:cs typeface="Arial" pitchFamily="34" charset="-120"/>
+                  <a:srgbClr val="2B2F36"/>
+                </a:solidFill>
+                <a:latin typeface="Arial" pitchFamily="34" charset="0"/>
+                <a:ea typeface="BIZ UDPGothic" pitchFamily="34" charset="-122"/>
+                <a:cs typeface="BIZ UDPGothic" pitchFamily="34" charset="-120"/>
               </a:rPr>
               <a:t>これは、年間に亡くなる人全体のわずか「約2.2%」にすぎません。</a:t>
             </a:r>
@@ -3942,11 +3942,11 @@
             <a:r>
               <a:rPr lang="en-US" sz="1400" dirty="0">
                 <a:solidFill>
-                  <a:srgbClr val="CCCCCC"/>
-                </a:solidFill>
-                <a:latin typeface="Arial" pitchFamily="34" charset="0"/>
-                <a:ea typeface="Arial" pitchFamily="34" charset="-122"/>
-                <a:cs typeface="Arial" pitchFamily="34" charset="-120"/>
+                  <a:srgbClr val="2B2F36"/>
+                </a:solidFill>
+                <a:latin typeface="Arial" pitchFamily="34" charset="0"/>
+                <a:ea typeface="BIZ UDPGothic" pitchFamily="34" charset="-122"/>
+                <a:cs typeface="BIZ UDPGothic" pitchFamily="34" charset="-120"/>
               </a:rPr>
               <a:t>つまり、もし非課税のラインを10億円まで引き上げても、影響を受けるのは「すでに5億円を超えている人」の中でも、さらに一部のごく限られた人たちだけです。</a:t>
             </a:r>
@@ -3981,11 +3981,11 @@
             <a:r>
               <a:rPr lang="en-US" sz="1300" i="1" dirty="0">
                 <a:solidFill>
-                  <a:srgbClr val="D62828"/>
-                </a:solidFill>
-                <a:latin typeface="Arial" pitchFamily="34" charset="0"/>
-                <a:ea typeface="Arial" pitchFamily="34" charset="-122"/>
-                <a:cs typeface="Arial" pitchFamily="34" charset="-120"/>
+                  <a:srgbClr val="C8161D"/>
+                </a:solidFill>
+                <a:latin typeface="Arial" pitchFamily="34" charset="0"/>
+                <a:ea typeface="BIZ UDPGothic" pitchFamily="34" charset="-122"/>
+                <a:cs typeface="BIZ UDPGothic" pitchFamily="34" charset="-120"/>
               </a:rPr>
               <a:t>中産階級・アッパーミドル層には、ほぼ影響がありません。</a:t>
             </a:r>
@@ -4007,7 +4007,7 @@
     <p:bg>
       <p:bgPr>
         <a:solidFill>
-          <a:srgbClr val="0A0A0A"/>
+          <a:srgbClr val="F5F6F8"/>
         </a:solidFill>
       </p:bgPr>
     </p:bg>
@@ -4052,11 +4052,11 @@
             <a:r>
               <a:rPr lang="en-US" sz="1200" b="1" spc="300" kern="0" dirty="0">
                 <a:solidFill>
-                  <a:srgbClr val="D62828"/>
-                </a:solidFill>
-                <a:latin typeface="Arial" pitchFamily="34" charset="0"/>
-                <a:ea typeface="Arial" pitchFamily="34" charset="-122"/>
-                <a:cs typeface="Arial" pitchFamily="34" charset="-120"/>
+                  <a:srgbClr val="C8161D"/>
+                </a:solidFill>
+                <a:latin typeface="Arial" pitchFamily="34" charset="0"/>
+                <a:ea typeface="BIZ UDPGothic" pitchFamily="34" charset="-122"/>
+                <a:cs typeface="BIZ UDPGothic" pitchFamily="34" charset="-120"/>
               </a:rPr>
               <a:t>2. 税収全体で見ると</a:t>
             </a:r>
@@ -4091,11 +4091,11 @@
             <a:r>
               <a:rPr lang="en-US" sz="3000" b="1" dirty="0">
                 <a:solidFill>
-                  <a:srgbClr val="F5F5F0"/>
-                </a:solidFill>
-                <a:latin typeface="Arial" pitchFamily="34" charset="0"/>
-                <a:ea typeface="Arial" pitchFamily="34" charset="-122"/>
-                <a:cs typeface="Arial" pitchFamily="34" charset="-120"/>
+                  <a:srgbClr val="16181D"/>
+                </a:solidFill>
+                <a:latin typeface="Arial" pitchFamily="34" charset="0"/>
+                <a:ea typeface="BIZ UDPGothic" pitchFamily="34" charset="-122"/>
+                <a:cs typeface="BIZ UDPGothic" pitchFamily="34" charset="-120"/>
               </a:rPr>
               <a:t>相続税は、国の収入のごく一部にすぎない</a:t>
             </a:r>
@@ -4130,11 +4130,11 @@
             <a:r>
               <a:rPr lang="en-US" sz="1000" dirty="0">
                 <a:solidFill>
-                  <a:srgbClr val="CCCCCC"/>
-                </a:solidFill>
-                <a:latin typeface="Arial" pitchFamily="34" charset="0"/>
-                <a:ea typeface="Arial" pitchFamily="34" charset="-122"/>
-                <a:cs typeface="Arial" pitchFamily="34" charset="-120"/>
+                  <a:srgbClr val="2B2F36"/>
+                </a:solidFill>
+                <a:latin typeface="Arial" pitchFamily="34" charset="0"/>
+                <a:ea typeface="BIZ UDPGothic" pitchFamily="34" charset="-122"/>
+                <a:cs typeface="BIZ UDPGothic" pitchFamily="34" charset="-120"/>
               </a:rPr>
               <a:t>12</a:t>
             </a:r>
@@ -4169,11 +4169,11 @@
             <a:r>
               <a:rPr lang="en-US" sz="900" dirty="0">
                 <a:solidFill>
-                  <a:srgbClr val="555555"/>
-                </a:solidFill>
-                <a:latin typeface="Arial" pitchFamily="34" charset="0"/>
-                <a:ea typeface="Arial" pitchFamily="34" charset="-122"/>
-                <a:cs typeface="Arial" pitchFamily="34" charset="-120"/>
+                  <a:srgbClr val="9AA0AA"/>
+                </a:solidFill>
+                <a:latin typeface="Arial" pitchFamily="34" charset="0"/>
+                <a:ea typeface="BIZ UDPGothic" pitchFamily="34" charset="-122"/>
+                <a:cs typeface="BIZ UDPGothic" pitchFamily="34" charset="-120"/>
               </a:rPr>
               <a:t>REBOOT JAPAN ── 提言004</a:t>
             </a:r>
@@ -4208,11 +4208,11 @@
             <a:r>
               <a:rPr lang="en-US" sz="5000" b="1" dirty="0">
                 <a:solidFill>
-                  <a:srgbClr val="D62828"/>
-                </a:solidFill>
-                <a:latin typeface="Arial" pitchFamily="34" charset="0"/>
-                <a:ea typeface="Arial" pitchFamily="34" charset="-122"/>
-                <a:cs typeface="Arial" pitchFamily="34" charset="-120"/>
+                  <a:srgbClr val="C8161D"/>
+                </a:solidFill>
+                <a:latin typeface="Arial" pitchFamily="34" charset="0"/>
+                <a:ea typeface="BIZ UDPGothic" pitchFamily="34" charset="-122"/>
+                <a:cs typeface="BIZ UDPGothic" pitchFamily="34" charset="-120"/>
               </a:rPr>
               <a:t>約1.76兆円</a:t>
             </a:r>
@@ -4247,11 +4247,11 @@
             <a:r>
               <a:rPr lang="en-US" sz="1300" dirty="0">
                 <a:solidFill>
-                  <a:srgbClr val="CCCCCC"/>
-                </a:solidFill>
-                <a:latin typeface="Arial" pitchFamily="34" charset="0"/>
-                <a:ea typeface="Arial" pitchFamily="34" charset="-122"/>
-                <a:cs typeface="Arial" pitchFamily="34" charset="-120"/>
+                  <a:srgbClr val="2B2F36"/>
+                </a:solidFill>
+                <a:latin typeface="Arial" pitchFamily="34" charset="0"/>
+                <a:ea typeface="BIZ UDPGothic" pitchFamily="34" charset="-122"/>
+                <a:cs typeface="BIZ UDPGothic" pitchFamily="34" charset="-120"/>
               </a:rPr>
               <a:t>令和7年度・相続税収（贈与税を含む）</a:t>
             </a:r>
@@ -4276,7 +4276,7 @@
           <a:noFill/>
           <a:ln w="12700">
             <a:solidFill>
-              <a:srgbClr val="2E2E2E"/>
+              <a:srgbClr val="DDE0E6"/>
             </a:solidFill>
             <a:prstDash val="solid"/>
           </a:ln>
@@ -4312,11 +4312,11 @@
             <a:r>
               <a:rPr lang="en-US" sz="1800" b="1" dirty="0">
                 <a:solidFill>
-                  <a:srgbClr val="F5F5F0"/>
-                </a:solidFill>
-                <a:latin typeface="Arial" pitchFamily="34" charset="0"/>
-                <a:ea typeface="Arial" pitchFamily="34" charset="-122"/>
-                <a:cs typeface="Arial" pitchFamily="34" charset="-120"/>
+                  <a:srgbClr val="16181D"/>
+                </a:solidFill>
+                <a:latin typeface="Arial" pitchFamily="34" charset="0"/>
+                <a:ea typeface="BIZ UDPGothic" pitchFamily="34" charset="-122"/>
+                <a:cs typeface="BIZ UDPGothic" pitchFamily="34" charset="-120"/>
               </a:rPr>
               <a:t>国の税収全体（約75兆円）の中では、わずか数%にすぎません。</a:t>
             </a:r>
@@ -4354,11 +4354,11 @@
             <a:r>
               <a:rPr lang="en-US" sz="1350" dirty="0">
                 <a:solidFill>
-                  <a:srgbClr val="CCCCCC"/>
-                </a:solidFill>
-                <a:latin typeface="Arial" pitchFamily="34" charset="0"/>
-                <a:ea typeface="Arial" pitchFamily="34" charset="-122"/>
-                <a:cs typeface="Arial" pitchFamily="34" charset="-120"/>
+                  <a:srgbClr val="2B2F36"/>
+                </a:solidFill>
+                <a:latin typeface="Arial" pitchFamily="34" charset="0"/>
+                <a:ea typeface="BIZ UDPGothic" pitchFamily="34" charset="-122"/>
+                <a:cs typeface="BIZ UDPGothic" pitchFamily="34" charset="-120"/>
               </a:rPr>
               <a:t>つまり相続税は、国にとって「絶対に手放せない巨大な財源」ではありません。</a:t>
             </a:r>
@@ -4420,11 +4420,11 @@
             <a:r>
               <a:rPr lang="en-US" sz="1300" dirty="0">
                 <a:solidFill>
-                  <a:srgbClr val="D62828"/>
-                </a:solidFill>
-                <a:latin typeface="Arial" pitchFamily="34" charset="0"/>
-                <a:ea typeface="Arial" pitchFamily="34" charset="-122"/>
-                <a:cs typeface="Arial" pitchFamily="34" charset="-120"/>
+                  <a:srgbClr val="C8161D"/>
+                </a:solidFill>
+                <a:latin typeface="Arial" pitchFamily="34" charset="0"/>
+                <a:ea typeface="BIZ UDPGothic" pitchFamily="34" charset="-122"/>
+                <a:cs typeface="BIZ UDPGothic" pitchFamily="34" charset="-120"/>
               </a:rPr>
               <a:t>それなのに、中産階級の生活基盤を壊すほどのコストを払っている ── これが今の制度の歪みです。</a:t>
             </a:r>
@@ -4446,7 +4446,7 @@
     <p:bg>
       <p:bgPr>
         <a:solidFill>
-          <a:srgbClr val="0A0A0A"/>
+          <a:srgbClr val="F5F6F8"/>
         </a:solidFill>
       </p:bgPr>
     </p:bg>
@@ -4491,11 +4491,11 @@
             <a:r>
               <a:rPr lang="en-US" sz="1200" b="1" spc="300" kern="0" dirty="0">
                 <a:solidFill>
-                  <a:srgbClr val="D62828"/>
-                </a:solidFill>
-                <a:latin typeface="Arial" pitchFamily="34" charset="0"/>
-                <a:ea typeface="Arial" pitchFamily="34" charset="-122"/>
-                <a:cs typeface="Arial" pitchFamily="34" charset="-120"/>
+                  <a:srgbClr val="C8161D"/>
+                </a:solidFill>
+                <a:latin typeface="Arial" pitchFamily="34" charset="0"/>
+                <a:ea typeface="BIZ UDPGothic" pitchFamily="34" charset="-122"/>
+                <a:cs typeface="BIZ UDPGothic" pitchFamily="34" charset="-120"/>
               </a:rPr>
               <a:t>2. フェアに考える</a:t>
             </a:r>
@@ -4530,11 +4530,11 @@
             <a:r>
               <a:rPr lang="en-US" sz="3000" b="1" dirty="0">
                 <a:solidFill>
-                  <a:srgbClr val="F5F5F0"/>
-                </a:solidFill>
-                <a:latin typeface="Arial" pitchFamily="34" charset="0"/>
-                <a:ea typeface="Arial" pitchFamily="34" charset="-122"/>
-                <a:cs typeface="Arial" pitchFamily="34" charset="-120"/>
+                  <a:srgbClr val="16181D"/>
+                </a:solidFill>
+                <a:latin typeface="Arial" pitchFamily="34" charset="0"/>
+                <a:ea typeface="BIZ UDPGothic" pitchFamily="34" charset="-122"/>
+                <a:cs typeface="BIZ UDPGothic" pitchFamily="34" charset="-120"/>
               </a:rPr>
               <a:t>「税率を下げれば海外に逃げない」は本当か？</a:t>
             </a:r>
@@ -4569,11 +4569,11 @@
             <a:r>
               <a:rPr lang="en-US" sz="1000" dirty="0">
                 <a:solidFill>
-                  <a:srgbClr val="CCCCCC"/>
-                </a:solidFill>
-                <a:latin typeface="Arial" pitchFamily="34" charset="0"/>
-                <a:ea typeface="Arial" pitchFamily="34" charset="-122"/>
-                <a:cs typeface="Arial" pitchFamily="34" charset="-120"/>
+                  <a:srgbClr val="2B2F36"/>
+                </a:solidFill>
+                <a:latin typeface="Arial" pitchFamily="34" charset="0"/>
+                <a:ea typeface="BIZ UDPGothic" pitchFamily="34" charset="-122"/>
+                <a:cs typeface="BIZ UDPGothic" pitchFamily="34" charset="-120"/>
               </a:rPr>
               <a:t>13</a:t>
             </a:r>
@@ -4608,11 +4608,11 @@
             <a:r>
               <a:rPr lang="en-US" sz="900" dirty="0">
                 <a:solidFill>
-                  <a:srgbClr val="555555"/>
-                </a:solidFill>
-                <a:latin typeface="Arial" pitchFamily="34" charset="0"/>
-                <a:ea typeface="Arial" pitchFamily="34" charset="-122"/>
-                <a:cs typeface="Arial" pitchFamily="34" charset="-120"/>
+                  <a:srgbClr val="9AA0AA"/>
+                </a:solidFill>
+                <a:latin typeface="Arial" pitchFamily="34" charset="0"/>
+                <a:ea typeface="BIZ UDPGothic" pitchFamily="34" charset="-122"/>
+                <a:cs typeface="BIZ UDPGothic" pitchFamily="34" charset="-120"/>
               </a:rPr>
               <a:t>REBOOT JAPAN ── 提言004</a:t>
             </a:r>
@@ -4650,11 +4650,11 @@
             <a:r>
               <a:rPr lang="en-US" sz="1350" dirty="0">
                 <a:solidFill>
-                  <a:srgbClr val="CCCCCC"/>
-                </a:solidFill>
-                <a:latin typeface="Arial" pitchFamily="34" charset="0"/>
-                <a:ea typeface="Arial" pitchFamily="34" charset="-122"/>
-                <a:cs typeface="Arial" pitchFamily="34" charset="-120"/>
+                  <a:srgbClr val="2B2F36"/>
+                </a:solidFill>
+                <a:latin typeface="Arial" pitchFamily="34" charset="0"/>
+                <a:ea typeface="BIZ UDPGothic" pitchFamily="34" charset="-122"/>
+                <a:cs typeface="BIZ UDPGothic" pitchFamily="34" charset="-120"/>
               </a:rPr>
               <a:t>実は、税金が高いからといって、海外に移住すれば相続税から逃げられるわけではありません。すでに強力な仕組みがあります。</a:t>
             </a:r>
@@ -4679,11 +4679,11 @@
             </a:avLst>
           </a:prstGeom>
           <a:solidFill>
-            <a:srgbClr val="1A1A1A"/>
+            <a:srgbClr val="FFFFFF"/>
           </a:solidFill>
           <a:ln w="12700">
             <a:solidFill>
-              <a:srgbClr val="2E2E2E"/>
+              <a:srgbClr val="DDE0E6"/>
             </a:solidFill>
             <a:prstDash val="solid"/>
           </a:ln>
@@ -4704,11 +4704,11 @@
             <a:avLst/>
           </a:prstGeom>
           <a:solidFill>
-            <a:srgbClr val="0A0A0A"/>
+            <a:srgbClr val="F5F6F8"/>
           </a:solidFill>
           <a:ln w="12700">
             <a:solidFill>
-              <a:srgbClr val="2E2E2E"/>
+              <a:srgbClr val="DDE0E6"/>
             </a:solidFill>
             <a:prstDash val="solid"/>
           </a:ln>
@@ -4768,11 +4768,11 @@
             <a:r>
               <a:rPr lang="en-US" sz="1500" b="1" dirty="0">
                 <a:solidFill>
-                  <a:srgbClr val="F5F5F0"/>
-                </a:solidFill>
-                <a:latin typeface="Arial" pitchFamily="34" charset="0"/>
-                <a:ea typeface="Arial" pitchFamily="34" charset="-122"/>
-                <a:cs typeface="Arial" pitchFamily="34" charset="-120"/>
+                  <a:srgbClr val="16181D"/>
+                </a:solidFill>
+                <a:latin typeface="Arial" pitchFamily="34" charset="0"/>
+                <a:ea typeface="BIZ UDPGothic" pitchFamily="34" charset="-122"/>
+                <a:cs typeface="BIZ UDPGothic" pitchFamily="34" charset="-120"/>
               </a:rPr>
               <a:t>10年ルール</a:t>
             </a:r>
@@ -4810,11 +4810,11 @@
             <a:r>
               <a:rPr lang="en-US" sz="1200" dirty="0">
                 <a:solidFill>
-                  <a:srgbClr val="CCCCCC"/>
-                </a:solidFill>
-                <a:latin typeface="Arial" pitchFamily="34" charset="0"/>
-                <a:ea typeface="Arial" pitchFamily="34" charset="-122"/>
-                <a:cs typeface="Arial" pitchFamily="34" charset="-120"/>
+                  <a:srgbClr val="2B2F36"/>
+                </a:solidFill>
+                <a:latin typeface="Arial" pitchFamily="34" charset="0"/>
+                <a:ea typeface="BIZ UDPGothic" pitchFamily="34" charset="-122"/>
+                <a:cs typeface="BIZ UDPGothic" pitchFamily="34" charset="-120"/>
               </a:rPr>
               <a:t>親も子も海外に引っ越しても、10年が経過するまでは海外の資産にも日本の相続税がかかります。日本にある不動産・預金は、住んでいる場所に関係なく課税対象のままです。</a:t>
             </a:r>
@@ -4839,11 +4839,11 @@
             </a:avLst>
           </a:prstGeom>
           <a:solidFill>
-            <a:srgbClr val="1A1A1A"/>
+            <a:srgbClr val="FFFFFF"/>
           </a:solidFill>
           <a:ln w="12700">
             <a:solidFill>
-              <a:srgbClr val="2E2E2E"/>
+              <a:srgbClr val="DDE0E6"/>
             </a:solidFill>
             <a:prstDash val="solid"/>
           </a:ln>
@@ -4864,11 +4864,11 @@
             <a:avLst/>
           </a:prstGeom>
           <a:solidFill>
-            <a:srgbClr val="0A0A0A"/>
+            <a:srgbClr val="F5F6F8"/>
           </a:solidFill>
           <a:ln w="12700">
             <a:solidFill>
-              <a:srgbClr val="2E2E2E"/>
+              <a:srgbClr val="DDE0E6"/>
             </a:solidFill>
             <a:prstDash val="solid"/>
           </a:ln>
@@ -4928,11 +4928,11 @@
             <a:r>
               <a:rPr lang="en-US" sz="1500" b="1" dirty="0">
                 <a:solidFill>
-                  <a:srgbClr val="F5F5F0"/>
-                </a:solidFill>
-                <a:latin typeface="Arial" pitchFamily="34" charset="0"/>
-                <a:ea typeface="Arial" pitchFamily="34" charset="-122"/>
-                <a:cs typeface="Arial" pitchFamily="34" charset="-120"/>
+                  <a:srgbClr val="16181D"/>
+                </a:solidFill>
+                <a:latin typeface="Arial" pitchFamily="34" charset="0"/>
+                <a:ea typeface="BIZ UDPGothic" pitchFamily="34" charset="-122"/>
+                <a:cs typeface="BIZ UDPGothic" pitchFamily="34" charset="-120"/>
               </a:rPr>
               <a:t>出国税（国外転出時課税）</a:t>
             </a:r>
@@ -4970,11 +4970,11 @@
             <a:r>
               <a:rPr lang="en-US" sz="1200" dirty="0">
                 <a:solidFill>
-                  <a:srgbClr val="CCCCCC"/>
-                </a:solidFill>
-                <a:latin typeface="Arial" pitchFamily="34" charset="0"/>
-                <a:ea typeface="Arial" pitchFamily="34" charset="-122"/>
-                <a:cs typeface="Arial" pitchFamily="34" charset="-120"/>
+                  <a:srgbClr val="2B2F36"/>
+                </a:solidFill>
+                <a:latin typeface="Arial" pitchFamily="34" charset="0"/>
+                <a:ea typeface="BIZ UDPGothic" pitchFamily="34" charset="-122"/>
+                <a:cs typeface="BIZ UDPGothic" pitchFamily="34" charset="-120"/>
               </a:rPr>
               <a:t>1億円以上の株式などを持って海外に引っ越す場合、含み益（値上がり分）にあらかじめ税金がかかる仕組みがすでにあります。</a:t>
             </a:r>
@@ -5012,11 +5012,11 @@
             <a:r>
               <a:rPr lang="en-US" sz="1200" i="1" dirty="0">
                 <a:solidFill>
-                  <a:srgbClr val="999999"/>
-                </a:solidFill>
-                <a:latin typeface="Arial" pitchFamily="34" charset="0"/>
-                <a:ea typeface="Arial" pitchFamily="34" charset="-122"/>
-                <a:cs typeface="Arial" pitchFamily="34" charset="-120"/>
+                  <a:srgbClr val="4B515C"/>
+                </a:solidFill>
+                <a:latin typeface="Arial" pitchFamily="34" charset="0"/>
+                <a:ea typeface="BIZ UDPGothic" pitchFamily="34" charset="-122"/>
+                <a:cs typeface="BIZ UDPGothic" pitchFamily="34" charset="-120"/>
               </a:rPr>
               <a:t>つまり「30%に下げれば海外逃避を防げる」は、決定的な理由にはなりません。本提言が30%にする理由は、「資産の大きさに関係なく、フラットな税率にする」という考え方そのものにあります。</a:t>
             </a:r>
@@ -5038,7 +5038,7 @@
     <p:bg>
       <p:bgPr>
         <a:solidFill>
-          <a:srgbClr val="0A0A0A"/>
+          <a:srgbClr val="F5F6F8"/>
         </a:solidFill>
       </p:bgPr>
     </p:bg>
@@ -5083,11 +5083,11 @@
             <a:r>
               <a:rPr lang="en-US" sz="1200" b="1" spc="300" kern="0" dirty="0">
                 <a:solidFill>
-                  <a:srgbClr val="D62828"/>
-                </a:solidFill>
-                <a:latin typeface="Arial" pitchFamily="34" charset="0"/>
-                <a:ea typeface="Arial" pitchFamily="34" charset="-122"/>
-                <a:cs typeface="Arial" pitchFamily="34" charset="-120"/>
+                  <a:srgbClr val="C8161D"/>
+                </a:solidFill>
+                <a:latin typeface="Arial" pitchFamily="34" charset="0"/>
+                <a:ea typeface="BIZ UDPGothic" pitchFamily="34" charset="-122"/>
+                <a:cs typeface="BIZ UDPGothic" pitchFamily="34" charset="-120"/>
               </a:rPr>
               <a:t>3. 新しい相続税の形</a:t>
             </a:r>
@@ -5122,11 +5122,11 @@
             <a:r>
               <a:rPr lang="en-US" sz="3000" b="1" dirty="0">
                 <a:solidFill>
-                  <a:srgbClr val="F5F5F0"/>
-                </a:solidFill>
-                <a:latin typeface="Arial" pitchFamily="34" charset="0"/>
-                <a:ea typeface="Arial" pitchFamily="34" charset="-122"/>
-                <a:cs typeface="Arial" pitchFamily="34" charset="-120"/>
+                  <a:srgbClr val="16181D"/>
+                </a:solidFill>
+                <a:latin typeface="Arial" pitchFamily="34" charset="0"/>
+                <a:ea typeface="BIZ UDPGothic" pitchFamily="34" charset="-122"/>
+                <a:cs typeface="BIZ UDPGothic" pitchFamily="34" charset="-120"/>
               </a:rPr>
               <a:t>変化を起こす「3つの柱」</a:t>
             </a:r>
@@ -5161,11 +5161,11 @@
             <a:r>
               <a:rPr lang="en-US" sz="1000" dirty="0">
                 <a:solidFill>
-                  <a:srgbClr val="CCCCCC"/>
-                </a:solidFill>
-                <a:latin typeface="Arial" pitchFamily="34" charset="0"/>
-                <a:ea typeface="Arial" pitchFamily="34" charset="-122"/>
-                <a:cs typeface="Arial" pitchFamily="34" charset="-120"/>
+                  <a:srgbClr val="2B2F36"/>
+                </a:solidFill>
+                <a:latin typeface="Arial" pitchFamily="34" charset="0"/>
+                <a:ea typeface="BIZ UDPGothic" pitchFamily="34" charset="-122"/>
+                <a:cs typeface="BIZ UDPGothic" pitchFamily="34" charset="-120"/>
               </a:rPr>
               <a:t>14</a:t>
             </a:r>
@@ -5200,11 +5200,11 @@
             <a:r>
               <a:rPr lang="en-US" sz="900" dirty="0">
                 <a:solidFill>
-                  <a:srgbClr val="555555"/>
-                </a:solidFill>
-                <a:latin typeface="Arial" pitchFamily="34" charset="0"/>
-                <a:ea typeface="Arial" pitchFamily="34" charset="-122"/>
-                <a:cs typeface="Arial" pitchFamily="34" charset="-120"/>
+                  <a:srgbClr val="9AA0AA"/>
+                </a:solidFill>
+                <a:latin typeface="Arial" pitchFamily="34" charset="0"/>
+                <a:ea typeface="BIZ UDPGothic" pitchFamily="34" charset="-122"/>
+                <a:cs typeface="BIZ UDPGothic" pitchFamily="34" charset="-120"/>
               </a:rPr>
               <a:t>REBOOT JAPAN ── 提言004</a:t>
             </a:r>
@@ -5229,11 +5229,11 @@
             </a:avLst>
           </a:prstGeom>
           <a:solidFill>
-            <a:srgbClr val="1A1A1A"/>
+            <a:srgbClr val="FFFFFF"/>
           </a:solidFill>
           <a:ln w="12700">
             <a:solidFill>
-              <a:srgbClr val="2E2E2E"/>
+              <a:srgbClr val="DDE0E6"/>
             </a:solidFill>
             <a:prstDash val="solid"/>
           </a:ln>
@@ -5266,11 +5266,11 @@
             <a:r>
               <a:rPr lang="en-US" sz="2200" b="1" dirty="0">
                 <a:solidFill>
-                  <a:srgbClr val="D62828"/>
-                </a:solidFill>
-                <a:latin typeface="Arial" pitchFamily="34" charset="0"/>
-                <a:ea typeface="Arial" pitchFamily="34" charset="-122"/>
-                <a:cs typeface="Arial" pitchFamily="34" charset="-120"/>
+                  <a:srgbClr val="C8161D"/>
+                </a:solidFill>
+                <a:latin typeface="Arial" pitchFamily="34" charset="0"/>
+                <a:ea typeface="BIZ UDPGothic" pitchFamily="34" charset="-122"/>
+                <a:cs typeface="BIZ UDPGothic" pitchFamily="34" charset="-120"/>
               </a:rPr>
               <a:t>柱①</a:t>
             </a:r>
@@ -5308,11 +5308,11 @@
             <a:r>
               <a:rPr lang="en-US" sz="1600" b="1" dirty="0">
                 <a:solidFill>
-                  <a:srgbClr val="F5F5F0"/>
-                </a:solidFill>
-                <a:latin typeface="Arial" pitchFamily="34" charset="0"/>
-                <a:ea typeface="Arial" pitchFamily="34" charset="-122"/>
-                <a:cs typeface="Arial" pitchFamily="34" charset="-120"/>
+                  <a:srgbClr val="16181D"/>
+                </a:solidFill>
+                <a:latin typeface="Arial" pitchFamily="34" charset="0"/>
+                <a:ea typeface="BIZ UDPGothic" pitchFamily="34" charset="-122"/>
+                <a:cs typeface="BIZ UDPGothic" pitchFamily="34" charset="-120"/>
               </a:rPr>
               <a:t>事業承継は、直系ならゼロ</a:t>
             </a:r>
@@ -5350,11 +5350,11 @@
             <a:r>
               <a:rPr lang="en-US" sz="1250" dirty="0">
                 <a:solidFill>
-                  <a:srgbClr val="CCCCCC"/>
-                </a:solidFill>
-                <a:latin typeface="Arial" pitchFamily="34" charset="0"/>
-                <a:ea typeface="Arial" pitchFamily="34" charset="-122"/>
-                <a:cs typeface="Arial" pitchFamily="34" charset="-120"/>
+                  <a:srgbClr val="2B2F36"/>
+                </a:solidFill>
+                <a:latin typeface="Arial" pitchFamily="34" charset="0"/>
+                <a:ea typeface="BIZ UDPGothic" pitchFamily="34" charset="-122"/>
+                <a:cs typeface="BIZ UDPGothic" pitchFamily="34" charset="-120"/>
               </a:rPr>
               <a:t>配偶者・子・孫が会社を継ぐ場合、相続税は無条件でかからない</a:t>
             </a:r>
@@ -5379,11 +5379,11 @@
             </a:avLst>
           </a:prstGeom>
           <a:solidFill>
-            <a:srgbClr val="1A1A1A"/>
+            <a:srgbClr val="FFFFFF"/>
           </a:solidFill>
           <a:ln w="12700">
             <a:solidFill>
-              <a:srgbClr val="2E2E2E"/>
+              <a:srgbClr val="DDE0E6"/>
             </a:solidFill>
             <a:prstDash val="solid"/>
           </a:ln>
@@ -5416,11 +5416,11 @@
             <a:r>
               <a:rPr lang="en-US" sz="2200" b="1" dirty="0">
                 <a:solidFill>
-                  <a:srgbClr val="D62828"/>
-                </a:solidFill>
-                <a:latin typeface="Arial" pitchFamily="34" charset="0"/>
-                <a:ea typeface="Arial" pitchFamily="34" charset="-122"/>
-                <a:cs typeface="Arial" pitchFamily="34" charset="-120"/>
+                  <a:srgbClr val="C8161D"/>
+                </a:solidFill>
+                <a:latin typeface="Arial" pitchFamily="34" charset="0"/>
+                <a:ea typeface="BIZ UDPGothic" pitchFamily="34" charset="-122"/>
+                <a:cs typeface="BIZ UDPGothic" pitchFamily="34" charset="-120"/>
               </a:rPr>
               <a:t>柱②</a:t>
             </a:r>
@@ -5458,11 +5458,11 @@
             <a:r>
               <a:rPr lang="en-US" sz="1600" b="1" dirty="0">
                 <a:solidFill>
-                  <a:srgbClr val="F5F5F0"/>
-                </a:solidFill>
-                <a:latin typeface="Arial" pitchFamily="34" charset="0"/>
-                <a:ea typeface="Arial" pitchFamily="34" charset="-122"/>
-                <a:cs typeface="Arial" pitchFamily="34" charset="-120"/>
+                  <a:srgbClr val="16181D"/>
+                </a:solidFill>
+                <a:latin typeface="Arial" pitchFamily="34" charset="0"/>
+                <a:ea typeface="BIZ UDPGothic" pitchFamily="34" charset="-122"/>
+                <a:cs typeface="BIZ UDPGothic" pitchFamily="34" charset="-120"/>
               </a:rPr>
               <a:t>10億円までは非課税</a:t>
             </a:r>
@@ -5500,11 +5500,11 @@
             <a:r>
               <a:rPr lang="en-US" sz="1250" dirty="0">
                 <a:solidFill>
-                  <a:srgbClr val="CCCCCC"/>
-                </a:solidFill>
-                <a:latin typeface="Arial" pitchFamily="34" charset="0"/>
-                <a:ea typeface="Arial" pitchFamily="34" charset="-122"/>
-                <a:cs typeface="Arial" pitchFamily="34" charset="-120"/>
+                  <a:srgbClr val="2B2F36"/>
+                </a:solidFill>
+                <a:latin typeface="Arial" pitchFamily="34" charset="0"/>
+                <a:ea typeface="BIZ UDPGothic" pitchFamily="34" charset="-122"/>
+                <a:cs typeface="BIZ UDPGothic" pitchFamily="34" charset="-120"/>
               </a:rPr>
               <a:t>超えた分にだけ、フラットに30%（崖なし）</a:t>
             </a:r>
@@ -5529,11 +5529,11 @@
             </a:avLst>
           </a:prstGeom>
           <a:solidFill>
-            <a:srgbClr val="1A1A1A"/>
+            <a:srgbClr val="FFFFFF"/>
           </a:solidFill>
           <a:ln w="12700">
             <a:solidFill>
-              <a:srgbClr val="2E2E2E"/>
+              <a:srgbClr val="DDE0E6"/>
             </a:solidFill>
             <a:prstDash val="solid"/>
           </a:ln>
@@ -5566,11 +5566,11 @@
             <a:r>
               <a:rPr lang="en-US" sz="2200" b="1" dirty="0">
                 <a:solidFill>
-                  <a:srgbClr val="D62828"/>
-                </a:solidFill>
-                <a:latin typeface="Arial" pitchFamily="34" charset="0"/>
-                <a:ea typeface="Arial" pitchFamily="34" charset="-122"/>
-                <a:cs typeface="Arial" pitchFamily="34" charset="-120"/>
+                  <a:srgbClr val="C8161D"/>
+                </a:solidFill>
+                <a:latin typeface="Arial" pitchFamily="34" charset="0"/>
+                <a:ea typeface="BIZ UDPGothic" pitchFamily="34" charset="-122"/>
+                <a:cs typeface="BIZ UDPGothic" pitchFamily="34" charset="-120"/>
               </a:rPr>
               <a:t>柱③</a:t>
             </a:r>
@@ -5608,11 +5608,11 @@
             <a:r>
               <a:rPr lang="en-US" sz="1600" b="1" dirty="0">
                 <a:solidFill>
-                  <a:srgbClr val="F5F5F0"/>
-                </a:solidFill>
-                <a:latin typeface="Arial" pitchFamily="34" charset="0"/>
-                <a:ea typeface="Arial" pitchFamily="34" charset="-122"/>
-                <a:cs typeface="Arial" pitchFamily="34" charset="-120"/>
+                  <a:srgbClr val="16181D"/>
+                </a:solidFill>
+                <a:latin typeface="Arial" pitchFamily="34" charset="0"/>
+                <a:ea typeface="BIZ UDPGothic" pitchFamily="34" charset="-122"/>
+                <a:cs typeface="BIZ UDPGothic" pitchFamily="34" charset="-120"/>
               </a:rPr>
               <a:t>住んでいる家は評価ゼロ</a:t>
             </a:r>
@@ -5650,11 +5650,11 @@
             <a:r>
               <a:rPr lang="en-US" sz="1250" dirty="0">
                 <a:solidFill>
-                  <a:srgbClr val="CCCCCC"/>
-                </a:solidFill>
-                <a:latin typeface="Arial" pitchFamily="34" charset="0"/>
-                <a:ea typeface="Arial" pitchFamily="34" charset="-122"/>
-                <a:cs typeface="Arial" pitchFamily="34" charset="-120"/>
+                  <a:srgbClr val="2B2F36"/>
+                </a:solidFill>
+                <a:latin typeface="Arial" pitchFamily="34" charset="0"/>
+                <a:ea typeface="BIZ UDPGothic" pitchFamily="34" charset="-122"/>
+                <a:cs typeface="BIZ UDPGothic" pitchFamily="34" charset="-120"/>
               </a:rPr>
               <a:t>10年間住み続ければ、実家は税金の対象から外れる</a:t>
             </a:r>
@@ -5676,7 +5676,7 @@
     <p:bg>
       <p:bgPr>
         <a:solidFill>
-          <a:srgbClr val="0A0A0A"/>
+          <a:srgbClr val="F5F6F8"/>
         </a:solidFill>
       </p:bgPr>
     </p:bg>
@@ -5721,11 +5721,11 @@
             <a:r>
               <a:rPr lang="en-US" sz="1200" b="1" spc="300" kern="0" dirty="0">
                 <a:solidFill>
-                  <a:srgbClr val="D62828"/>
-                </a:solidFill>
-                <a:latin typeface="Arial" pitchFamily="34" charset="0"/>
-                <a:ea typeface="Arial" pitchFamily="34" charset="-122"/>
-                <a:cs typeface="Arial" pitchFamily="34" charset="-120"/>
+                  <a:srgbClr val="C8161D"/>
+                </a:solidFill>
+                <a:latin typeface="Arial" pitchFamily="34" charset="0"/>
+                <a:ea typeface="BIZ UDPGothic" pitchFamily="34" charset="-122"/>
+                <a:cs typeface="BIZ UDPGothic" pitchFamily="34" charset="-120"/>
               </a:rPr>
               <a:t>3. 柱① 事業承継</a:t>
             </a:r>
@@ -5760,11 +5760,11 @@
             <a:r>
               <a:rPr lang="en-US" sz="3000" b="1" dirty="0">
                 <a:solidFill>
-                  <a:srgbClr val="F5F5F0"/>
-                </a:solidFill>
-                <a:latin typeface="Arial" pitchFamily="34" charset="0"/>
-                <a:ea typeface="Arial" pitchFamily="34" charset="-122"/>
-                <a:cs typeface="Arial" pitchFamily="34" charset="-120"/>
+                  <a:srgbClr val="16181D"/>
+                </a:solidFill>
+                <a:latin typeface="Arial" pitchFamily="34" charset="0"/>
+                <a:ea typeface="BIZ UDPGothic" pitchFamily="34" charset="-122"/>
+                <a:cs typeface="BIZ UDPGothic" pitchFamily="34" charset="-120"/>
               </a:rPr>
               <a:t>配偶者・子・孫が継ぐなら、相続税はゼロ</a:t>
             </a:r>
@@ -5799,11 +5799,11 @@
             <a:r>
               <a:rPr lang="en-US" sz="1000" dirty="0">
                 <a:solidFill>
-                  <a:srgbClr val="CCCCCC"/>
-                </a:solidFill>
-                <a:latin typeface="Arial" pitchFamily="34" charset="0"/>
-                <a:ea typeface="Arial" pitchFamily="34" charset="-122"/>
-                <a:cs typeface="Arial" pitchFamily="34" charset="-120"/>
+                  <a:srgbClr val="2B2F36"/>
+                </a:solidFill>
+                <a:latin typeface="Arial" pitchFamily="34" charset="0"/>
+                <a:ea typeface="BIZ UDPGothic" pitchFamily="34" charset="-122"/>
+                <a:cs typeface="BIZ UDPGothic" pitchFamily="34" charset="-120"/>
               </a:rPr>
               <a:t>15</a:t>
             </a:r>
@@ -5838,11 +5838,11 @@
             <a:r>
               <a:rPr lang="en-US" sz="900" dirty="0">
                 <a:solidFill>
-                  <a:srgbClr val="555555"/>
-                </a:solidFill>
-                <a:latin typeface="Arial" pitchFamily="34" charset="0"/>
-                <a:ea typeface="Arial" pitchFamily="34" charset="-122"/>
-                <a:cs typeface="Arial" pitchFamily="34" charset="-120"/>
+                  <a:srgbClr val="9AA0AA"/>
+                </a:solidFill>
+                <a:latin typeface="Arial" pitchFamily="34" charset="0"/>
+                <a:ea typeface="BIZ UDPGothic" pitchFamily="34" charset="-122"/>
+                <a:cs typeface="BIZ UDPGothic" pitchFamily="34" charset="-120"/>
               </a:rPr>
               <a:t>REBOOT JAPAN ── 提言004</a:t>
             </a:r>
@@ -5867,11 +5867,11 @@
             </a:avLst>
           </a:prstGeom>
           <a:solidFill>
-            <a:srgbClr val="1A1A1A"/>
+            <a:srgbClr val="FFFFFF"/>
           </a:solidFill>
           <a:ln w="19050">
             <a:solidFill>
-              <a:srgbClr val="D62828"/>
+              <a:srgbClr val="C8161D"/>
             </a:solidFill>
             <a:prstDash val="solid"/>
           </a:ln>
@@ -5928,11 +5928,11 @@
             <a:r>
               <a:rPr lang="en-US" sz="1800" b="1" dirty="0">
                 <a:solidFill>
-                  <a:srgbClr val="F5F5F0"/>
-                </a:solidFill>
-                <a:latin typeface="Arial" pitchFamily="34" charset="0"/>
-                <a:ea typeface="Arial" pitchFamily="34" charset="-122"/>
-                <a:cs typeface="Arial" pitchFamily="34" charset="-120"/>
+                  <a:srgbClr val="16181D"/>
+                </a:solidFill>
+                <a:latin typeface="Arial" pitchFamily="34" charset="0"/>
+                <a:ea typeface="BIZ UDPGothic" pitchFamily="34" charset="-122"/>
+                <a:cs typeface="BIZ UDPGothic" pitchFamily="34" charset="-120"/>
               </a:rPr>
               <a:t>対象は「配偶者・子・孫」への承継のみ</a:t>
             </a:r>
@@ -5967,11 +5967,11 @@
             <a:r>
               <a:rPr lang="en-US" sz="1300" dirty="0">
                 <a:solidFill>
-                  <a:srgbClr val="CCCCCC"/>
-                </a:solidFill>
-                <a:latin typeface="Arial" pitchFamily="34" charset="0"/>
-                <a:ea typeface="Arial" pitchFamily="34" charset="-122"/>
-                <a:cs typeface="Arial" pitchFamily="34" charset="-120"/>
+                  <a:srgbClr val="2B2F36"/>
+                </a:solidFill>
+                <a:latin typeface="Arial" pitchFamily="34" charset="0"/>
+                <a:ea typeface="BIZ UDPGothic" pitchFamily="34" charset="-122"/>
+                <a:cs typeface="BIZ UDPGothic" pitchFamily="34" charset="-120"/>
               </a:rPr>
               <a:t>兄弟姉妹や祖父母への承継は対象外。あくまで「直系（まっすぐ続く血筋）」だけを対象にします。</a:t>
             </a:r>
@@ -6006,11 +6006,11 @@
             <a:r>
               <a:rPr lang="en-US" sz="1500" b="1" dirty="0">
                 <a:solidFill>
-                  <a:srgbClr val="D62828"/>
-                </a:solidFill>
-                <a:latin typeface="Arial" pitchFamily="34" charset="0"/>
-                <a:ea typeface="Arial" pitchFamily="34" charset="-122"/>
-                <a:cs typeface="Arial" pitchFamily="34" charset="-120"/>
+                  <a:srgbClr val="C8161D"/>
+                </a:solidFill>
+                <a:latin typeface="Arial" pitchFamily="34" charset="0"/>
+                <a:ea typeface="BIZ UDPGothic" pitchFamily="34" charset="-122"/>
+                <a:cs typeface="BIZ UDPGothic" pitchFamily="34" charset="-120"/>
               </a:rPr>
               <a:t>今までの「猶予」とは違う、シンプルな制度に</a:t>
             </a:r>
@@ -6049,11 +6049,11 @@
             <a:r>
               <a:rPr lang="en-US" sz="1300" dirty="0">
                 <a:solidFill>
-                  <a:srgbClr val="CCCCCC"/>
-                </a:solidFill>
-                <a:latin typeface="Arial" pitchFamily="34" charset="0"/>
-                <a:ea typeface="Arial" pitchFamily="34" charset="-122"/>
-                <a:cs typeface="Arial" pitchFamily="34" charset="-120"/>
+                  <a:srgbClr val="2B2F36"/>
+                </a:solidFill>
+                <a:latin typeface="Arial" pitchFamily="34" charset="0"/>
+                <a:ea typeface="BIZ UDPGothic" pitchFamily="34" charset="-122"/>
+                <a:cs typeface="BIZ UDPGothic" pitchFamily="34" charset="-120"/>
               </a:rPr>
               <a:t>期限なし・条件を満たし続ける必要なし、の恒久的な制度</a:t>
             </a:r>
@@ -6070,11 +6070,11 @@
             <a:r>
               <a:rPr lang="en-US" sz="1300" dirty="0">
                 <a:solidFill>
-                  <a:srgbClr val="CCCCCC"/>
-                </a:solidFill>
-                <a:latin typeface="Arial" pitchFamily="34" charset="0"/>
-                <a:ea typeface="Arial" pitchFamily="34" charset="-122"/>
-                <a:cs typeface="Arial" pitchFamily="34" charset="-120"/>
+                  <a:srgbClr val="2B2F36"/>
+                </a:solidFill>
+                <a:latin typeface="Arial" pitchFamily="34" charset="0"/>
+                <a:ea typeface="BIZ UDPGothic" pitchFamily="34" charset="-122"/>
+                <a:cs typeface="BIZ UDPGothic" pitchFamily="34" charset="-120"/>
               </a:rPr>
               <a:t>「いつか取り消されて、利息付きで税金を請求される」という不安がない</a:t>
             </a:r>
@@ -6091,11 +6091,11 @@
             <a:r>
               <a:rPr lang="en-US" sz="1300" dirty="0">
                 <a:solidFill>
-                  <a:srgbClr val="CCCCCC"/>
-                </a:solidFill>
-                <a:latin typeface="Arial" pitchFamily="34" charset="0"/>
-                <a:ea typeface="Arial" pitchFamily="34" charset="-122"/>
-                <a:cs typeface="Arial" pitchFamily="34" charset="-120"/>
+                  <a:srgbClr val="2B2F36"/>
+                </a:solidFill>
+                <a:latin typeface="Arial" pitchFamily="34" charset="0"/>
+                <a:ea typeface="BIZ UDPGothic" pitchFamily="34" charset="-122"/>
+                <a:cs typeface="BIZ UDPGothic" pitchFamily="34" charset="-120"/>
               </a:rPr>
               <a:t>後継者は、納税の心配をせず、経営に専念できる</a:t>
             </a:r>
@@ -6117,7 +6117,7 @@
     <p:bg>
       <p:bgPr>
         <a:solidFill>
-          <a:srgbClr val="0A0A0A"/>
+          <a:srgbClr val="F5F6F8"/>
         </a:solidFill>
       </p:bgPr>
     </p:bg>
@@ -6162,11 +6162,11 @@
             <a:r>
               <a:rPr lang="en-US" sz="1200" b="1" spc="300" kern="0" dirty="0">
                 <a:solidFill>
-                  <a:srgbClr val="D62828"/>
-                </a:solidFill>
-                <a:latin typeface="Arial" pitchFamily="34" charset="0"/>
-                <a:ea typeface="Arial" pitchFamily="34" charset="-122"/>
-                <a:cs typeface="Arial" pitchFamily="34" charset="-120"/>
+                  <a:srgbClr val="C8161D"/>
+                </a:solidFill>
+                <a:latin typeface="Arial" pitchFamily="34" charset="0"/>
+                <a:ea typeface="BIZ UDPGothic" pitchFamily="34" charset="-122"/>
+                <a:cs typeface="BIZ UDPGothic" pitchFamily="34" charset="-120"/>
               </a:rPr>
               <a:t>3. 柱② ボーダーライン</a:t>
             </a:r>
@@ -6201,11 +6201,11 @@
             <a:r>
               <a:rPr lang="en-US" sz="3000" b="1" dirty="0">
                 <a:solidFill>
-                  <a:srgbClr val="F5F5F0"/>
-                </a:solidFill>
-                <a:latin typeface="Arial" pitchFamily="34" charset="0"/>
-                <a:ea typeface="Arial" pitchFamily="34" charset="-122"/>
-                <a:cs typeface="Arial" pitchFamily="34" charset="-120"/>
+                  <a:srgbClr val="16181D"/>
+                </a:solidFill>
+                <a:latin typeface="Arial" pitchFamily="34" charset="0"/>
+                <a:ea typeface="BIZ UDPGothic" pitchFamily="34" charset="-122"/>
+                <a:cs typeface="BIZ UDPGothic" pitchFamily="34" charset="-120"/>
               </a:rPr>
               <a:t>なぜ「10億円」なのか</a:t>
             </a:r>
@@ -6240,11 +6240,11 @@
             <a:r>
               <a:rPr lang="en-US" sz="1000" dirty="0">
                 <a:solidFill>
-                  <a:srgbClr val="CCCCCC"/>
-                </a:solidFill>
-                <a:latin typeface="Arial" pitchFamily="34" charset="0"/>
-                <a:ea typeface="Arial" pitchFamily="34" charset="-122"/>
-                <a:cs typeface="Arial" pitchFamily="34" charset="-120"/>
+                  <a:srgbClr val="2B2F36"/>
+                </a:solidFill>
+                <a:latin typeface="Arial" pitchFamily="34" charset="0"/>
+                <a:ea typeface="BIZ UDPGothic" pitchFamily="34" charset="-122"/>
+                <a:cs typeface="BIZ UDPGothic" pitchFamily="34" charset="-120"/>
               </a:rPr>
               <a:t>16</a:t>
             </a:r>
@@ -6279,11 +6279,11 @@
             <a:r>
               <a:rPr lang="en-US" sz="900" dirty="0">
                 <a:solidFill>
-                  <a:srgbClr val="555555"/>
-                </a:solidFill>
-                <a:latin typeface="Arial" pitchFamily="34" charset="0"/>
-                <a:ea typeface="Arial" pitchFamily="34" charset="-122"/>
-                <a:cs typeface="Arial" pitchFamily="34" charset="-120"/>
+                  <a:srgbClr val="9AA0AA"/>
+                </a:solidFill>
+                <a:latin typeface="Arial" pitchFamily="34" charset="0"/>
+                <a:ea typeface="BIZ UDPGothic" pitchFamily="34" charset="-122"/>
+                <a:cs typeface="BIZ UDPGothic" pitchFamily="34" charset="-120"/>
               </a:rPr>
               <a:t>REBOOT JAPAN ── 提言004</a:t>
             </a:r>
@@ -6308,11 +6308,11 @@
             </a:avLst>
           </a:prstGeom>
           <a:solidFill>
-            <a:srgbClr val="1A1A1A"/>
+            <a:srgbClr val="FFFFFF"/>
           </a:solidFill>
           <a:ln w="12700">
             <a:solidFill>
-              <a:srgbClr val="2E2E2E"/>
+              <a:srgbClr val="DDE0E6"/>
             </a:solidFill>
             <a:prstDash val="solid"/>
           </a:ln>
@@ -6369,11 +6369,11 @@
             <a:r>
               <a:rPr lang="en-US" sz="1700" b="1" dirty="0">
                 <a:solidFill>
-                  <a:srgbClr val="F5F5F0"/>
-                </a:solidFill>
-                <a:latin typeface="Arial" pitchFamily="34" charset="0"/>
-                <a:ea typeface="Arial" pitchFamily="34" charset="-122"/>
-                <a:cs typeface="Arial" pitchFamily="34" charset="-120"/>
+                  <a:srgbClr val="16181D"/>
+                </a:solidFill>
+                <a:latin typeface="Arial" pitchFamily="34" charset="0"/>
+                <a:ea typeface="BIZ UDPGothic" pitchFamily="34" charset="-122"/>
+                <a:cs typeface="BIZ UDPGothic" pitchFamily="34" charset="-120"/>
               </a:rPr>
               <a:t>イメージは「宝くじの一等＋前後賞」を合わせた金額</a:t>
             </a:r>
@@ -6408,11 +6408,11 @@
             <a:r>
               <a:rPr lang="en-US" sz="1300" dirty="0">
                 <a:solidFill>
-                  <a:srgbClr val="CCCCCC"/>
-                </a:solidFill>
-                <a:latin typeface="Arial" pitchFamily="34" charset="0"/>
-                <a:ea typeface="Arial" pitchFamily="34" charset="-122"/>
-                <a:cs typeface="Arial" pitchFamily="34" charset="-120"/>
+                  <a:srgbClr val="2B2F36"/>
+                </a:solidFill>
+                <a:latin typeface="Arial" pitchFamily="34" charset="0"/>
+                <a:ea typeface="BIZ UDPGothic" pitchFamily="34" charset="-122"/>
+                <a:cs typeface="BIZ UDPGothic" pitchFamily="34" charset="-120"/>
               </a:rPr>
               <a:t>誰もが「これはもう、桁違いの金額だ」と直感的に分かるラインを基準にしています。</a:t>
             </a:r>
@@ -6447,11 +6447,11 @@
             <a:r>
               <a:rPr lang="en-US" sz="1500" b="1" dirty="0">
                 <a:solidFill>
-                  <a:srgbClr val="D62828"/>
-                </a:solidFill>
-                <a:latin typeface="Arial" pitchFamily="34" charset="0"/>
-                <a:ea typeface="Arial" pitchFamily="34" charset="-122"/>
-                <a:cs typeface="Arial" pitchFamily="34" charset="-120"/>
+                  <a:srgbClr val="C8161D"/>
+                </a:solidFill>
+                <a:latin typeface="Arial" pitchFamily="34" charset="0"/>
+                <a:ea typeface="BIZ UDPGothic" pitchFamily="34" charset="-122"/>
+                <a:cs typeface="BIZ UDPGothic" pitchFamily="34" charset="-120"/>
               </a:rPr>
               <a:t>対象になるのは、本当にごく一部の人だけ</a:t>
             </a:r>
@@ -6489,11 +6489,11 @@
             <a:r>
               <a:rPr lang="en-US" sz="1350" dirty="0">
                 <a:solidFill>
-                  <a:srgbClr val="CCCCCC"/>
-                </a:solidFill>
-                <a:latin typeface="Arial" pitchFamily="34" charset="0"/>
-                <a:ea typeface="Arial" pitchFamily="34" charset="-122"/>
-                <a:cs typeface="Arial" pitchFamily="34" charset="-120"/>
+                  <a:srgbClr val="2B2F36"/>
+                </a:solidFill>
+                <a:latin typeface="Arial" pitchFamily="34" charset="0"/>
+                <a:ea typeface="BIZ UDPGothic" pitchFamily="34" charset="-122"/>
+                <a:cs typeface="BIZ UDPGothic" pitchFamily="34" charset="-120"/>
               </a:rPr>
               <a:t>前のスライドで見たとおり、5億円を超える人ですら年間2.2%しかいません。10億円を超える人は、さらにその一部です。中産階級・アッパーミドル層は完全に対象から外れます。</a:t>
             </a:r>
@@ -6515,7 +6515,7 @@
     <p:bg>
       <p:bgPr>
         <a:solidFill>
-          <a:srgbClr val="0A0A0A"/>
+          <a:srgbClr val="F5F6F8"/>
         </a:solidFill>
       </p:bgPr>
     </p:bg>
@@ -6560,11 +6560,11 @@
             <a:r>
               <a:rPr lang="en-US" sz="1200" b="1" spc="300" kern="0" dirty="0">
                 <a:solidFill>
-                  <a:srgbClr val="D62828"/>
-                </a:solidFill>
-                <a:latin typeface="Arial" pitchFamily="34" charset="0"/>
-                <a:ea typeface="Arial" pitchFamily="34" charset="-122"/>
-                <a:cs typeface="Arial" pitchFamily="34" charset="-120"/>
+                  <a:srgbClr val="C8161D"/>
+                </a:solidFill>
+                <a:latin typeface="Arial" pitchFamily="34" charset="0"/>
+                <a:ea typeface="BIZ UDPGothic" pitchFamily="34" charset="-122"/>
+                <a:cs typeface="BIZ UDPGothic" pitchFamily="34" charset="-120"/>
               </a:rPr>
               <a:t>3. 柱② 税率のしくみ</a:t>
             </a:r>
@@ -6599,11 +6599,11 @@
             <a:r>
               <a:rPr lang="en-US" sz="3000" b="1" dirty="0">
                 <a:solidFill>
-                  <a:srgbClr val="F5F5F0"/>
-                </a:solidFill>
-                <a:latin typeface="Arial" pitchFamily="34" charset="0"/>
-                <a:ea typeface="Arial" pitchFamily="34" charset="-122"/>
-                <a:cs typeface="Arial" pitchFamily="34" charset="-120"/>
+                  <a:srgbClr val="16181D"/>
+                </a:solidFill>
+                <a:latin typeface="Arial" pitchFamily="34" charset="0"/>
+                <a:ea typeface="BIZ UDPGothic" pitchFamily="34" charset="-122"/>
+                <a:cs typeface="BIZ UDPGothic" pitchFamily="34" charset="-120"/>
               </a:rPr>
               <a:t>10億円を超えた「分だけ」に、フラット30%</a:t>
             </a:r>
@@ -6638,11 +6638,11 @@
             <a:r>
               <a:rPr lang="en-US" sz="1000" dirty="0">
                 <a:solidFill>
-                  <a:srgbClr val="CCCCCC"/>
-                </a:solidFill>
-                <a:latin typeface="Arial" pitchFamily="34" charset="0"/>
-                <a:ea typeface="Arial" pitchFamily="34" charset="-122"/>
-                <a:cs typeface="Arial" pitchFamily="34" charset="-120"/>
+                  <a:srgbClr val="2B2F36"/>
+                </a:solidFill>
+                <a:latin typeface="Arial" pitchFamily="34" charset="0"/>
+                <a:ea typeface="BIZ UDPGothic" pitchFamily="34" charset="-122"/>
+                <a:cs typeface="BIZ UDPGothic" pitchFamily="34" charset="-120"/>
               </a:rPr>
               <a:t>17</a:t>
             </a:r>
@@ -6677,11 +6677,11 @@
             <a:r>
               <a:rPr lang="en-US" sz="900" dirty="0">
                 <a:solidFill>
-                  <a:srgbClr val="555555"/>
-                </a:solidFill>
-                <a:latin typeface="Arial" pitchFamily="34" charset="0"/>
-                <a:ea typeface="Arial" pitchFamily="34" charset="-122"/>
-                <a:cs typeface="Arial" pitchFamily="34" charset="-120"/>
+                  <a:srgbClr val="9AA0AA"/>
+                </a:solidFill>
+                <a:latin typeface="Arial" pitchFamily="34" charset="0"/>
+                <a:ea typeface="BIZ UDPGothic" pitchFamily="34" charset="-122"/>
+                <a:cs typeface="BIZ UDPGothic" pitchFamily="34" charset="-120"/>
               </a:rPr>
               <a:t>REBOOT JAPAN ── 提言004</a:t>
             </a:r>
@@ -6706,11 +6706,11 @@
             </a:avLst>
           </a:prstGeom>
           <a:solidFill>
-            <a:srgbClr val="1A1A1A"/>
+            <a:srgbClr val="FFFFFF"/>
           </a:solidFill>
           <a:ln w="12700">
             <a:solidFill>
-              <a:srgbClr val="2E2E2E"/>
+              <a:srgbClr val="DDE0E6"/>
             </a:solidFill>
             <a:prstDash val="solid"/>
           </a:ln>
@@ -6743,11 +6743,11 @@
             <a:r>
               <a:rPr lang="en-US" sz="1600" b="1" dirty="0">
                 <a:solidFill>
-                  <a:srgbClr val="F5F5F0"/>
-                </a:solidFill>
-                <a:latin typeface="Arial" pitchFamily="34" charset="0"/>
-                <a:ea typeface="Arial" pitchFamily="34" charset="-122"/>
-                <a:cs typeface="Arial" pitchFamily="34" charset="-120"/>
+                  <a:srgbClr val="16181D"/>
+                </a:solidFill>
+                <a:latin typeface="Arial" pitchFamily="34" charset="0"/>
+                <a:ea typeface="BIZ UDPGothic" pitchFamily="34" charset="-122"/>
+                <a:cs typeface="BIZ UDPGothic" pitchFamily="34" charset="-120"/>
               </a:rPr>
               <a:t>課税遺産額 ≦ 10億円　→　税額 0円</a:t>
             </a:r>
@@ -6782,11 +6782,11 @@
             <a:r>
               <a:rPr lang="en-US" sz="1600" b="1" dirty="0">
                 <a:solidFill>
-                  <a:srgbClr val="D62828"/>
-                </a:solidFill>
-                <a:latin typeface="Arial" pitchFamily="34" charset="0"/>
-                <a:ea typeface="Arial" pitchFamily="34" charset="-122"/>
-                <a:cs typeface="Arial" pitchFamily="34" charset="-120"/>
+                  <a:srgbClr val="C8161D"/>
+                </a:solidFill>
+                <a:latin typeface="Arial" pitchFamily="34" charset="0"/>
+                <a:ea typeface="BIZ UDPGothic" pitchFamily="34" charset="-122"/>
+                <a:cs typeface="BIZ UDPGothic" pitchFamily="34" charset="-120"/>
               </a:rPr>
               <a:t>課税遺産額 &gt; 10億円　→　（課税遺産額 − 10億円）× 30%</a:t>
             </a:r>
@@ -6821,11 +6821,11 @@
             <a:r>
               <a:rPr lang="en-US" sz="1300" b="1" dirty="0">
                 <a:solidFill>
-                  <a:srgbClr val="D62828"/>
-                </a:solidFill>
-                <a:latin typeface="Arial" pitchFamily="34" charset="0"/>
-                <a:ea typeface="Arial" pitchFamily="34" charset="-122"/>
-                <a:cs typeface="Arial" pitchFamily="34" charset="-120"/>
+                  <a:srgbClr val="C8161D"/>
+                </a:solidFill>
+                <a:latin typeface="Arial" pitchFamily="34" charset="0"/>
+                <a:ea typeface="BIZ UDPGothic" pitchFamily="34" charset="-122"/>
+                <a:cs typeface="BIZ UDPGothic" pitchFamily="34" charset="-120"/>
               </a:rPr>
               <a:t>用語解説：「崖」がない、ということ</a:t>
             </a:r>
@@ -6863,11 +6863,11 @@
             <a:r>
               <a:rPr lang="en-US" sz="1300" dirty="0">
                 <a:solidFill>
-                  <a:srgbClr val="CCCCCC"/>
-                </a:solidFill>
-                <a:latin typeface="Arial" pitchFamily="34" charset="0"/>
-                <a:ea typeface="Arial" pitchFamily="34" charset="-122"/>
-                <a:cs typeface="Arial" pitchFamily="34" charset="-120"/>
+                  <a:srgbClr val="2B2F36"/>
+                </a:solidFill>
+                <a:latin typeface="Arial" pitchFamily="34" charset="0"/>
+                <a:ea typeface="BIZ UDPGothic" pitchFamily="34" charset="-122"/>
+                <a:cs typeface="BIZ UDPGothic" pitchFamily="34" charset="-120"/>
               </a:rPr>
               <a:t>10億円ちょうどの人と、10億円1円の人とで、税金の差はほとんどありません。線を1円超えた瞬間に全額へ課税される「崖」のような仕組みにはしません。</a:t>
             </a:r>
@@ -6905,11 +6905,11 @@
             <a:r>
               <a:rPr lang="en-US" sz="1250" i="1" dirty="0">
                 <a:solidFill>
-                  <a:srgbClr val="999999"/>
-                </a:solidFill>
-                <a:latin typeface="Arial" pitchFamily="34" charset="0"/>
-                <a:ea typeface="Arial" pitchFamily="34" charset="-122"/>
-                <a:cs typeface="Arial" pitchFamily="34" charset="-120"/>
+                  <a:srgbClr val="4B515C"/>
+                </a:solidFill>
+                <a:latin typeface="Arial" pitchFamily="34" charset="0"/>
+                <a:ea typeface="BIZ UDPGothic" pitchFamily="34" charset="-122"/>
+                <a:cs typeface="BIZ UDPGothic" pitchFamily="34" charset="-120"/>
               </a:rPr>
               <a:t>また、「稼ぐほど税率がどんどん上がる」仕組み（累進課税）も採用しません。超えた分にはどこまでも同じ30%です。</a:t>
             </a:r>
@@ -6931,7 +6931,7 @@
     <p:bg>
       <p:bgPr>
         <a:solidFill>
-          <a:srgbClr val="0A0A0A"/>
+          <a:srgbClr val="F5F6F8"/>
         </a:solidFill>
       </p:bgPr>
     </p:bg>
@@ -6976,11 +6976,11 @@
             <a:r>
               <a:rPr lang="en-US" sz="1200" b="1" spc="300" kern="0" dirty="0">
                 <a:solidFill>
-                  <a:srgbClr val="D62828"/>
-                </a:solidFill>
-                <a:latin typeface="Arial" pitchFamily="34" charset="0"/>
-                <a:ea typeface="Arial" pitchFamily="34" charset="-122"/>
-                <a:cs typeface="Arial" pitchFamily="34" charset="-120"/>
+                  <a:srgbClr val="C8161D"/>
+                </a:solidFill>
+                <a:latin typeface="Arial" pitchFamily="34" charset="0"/>
+                <a:ea typeface="BIZ UDPGothic" pitchFamily="34" charset="-122"/>
+                <a:cs typeface="BIZ UDPGothic" pitchFamily="34" charset="-120"/>
               </a:rPr>
               <a:t>3. 柱③ 住んでいる家を守る</a:t>
             </a:r>
@@ -7015,11 +7015,11 @@
             <a:r>
               <a:rPr lang="en-US" sz="3000" b="1" dirty="0">
                 <a:solidFill>
-                  <a:srgbClr val="F5F5F0"/>
-                </a:solidFill>
-                <a:latin typeface="Arial" pitchFamily="34" charset="0"/>
-                <a:ea typeface="Arial" pitchFamily="34" charset="-122"/>
-                <a:cs typeface="Arial" pitchFamily="34" charset="-120"/>
+                  <a:srgbClr val="16181D"/>
+                </a:solidFill>
+                <a:latin typeface="Arial" pitchFamily="34" charset="0"/>
+                <a:ea typeface="BIZ UDPGothic" pitchFamily="34" charset="-122"/>
+                <a:cs typeface="BIZ UDPGothic" pitchFamily="34" charset="-120"/>
               </a:rPr>
               <a:t>10年間住み続ければ、実家は税金の対象外に</a:t>
             </a:r>
@@ -7054,11 +7054,11 @@
             <a:r>
               <a:rPr lang="en-US" sz="1000" dirty="0">
                 <a:solidFill>
-                  <a:srgbClr val="CCCCCC"/>
-                </a:solidFill>
-                <a:latin typeface="Arial" pitchFamily="34" charset="0"/>
-                <a:ea typeface="Arial" pitchFamily="34" charset="-122"/>
-                <a:cs typeface="Arial" pitchFamily="34" charset="-120"/>
+                  <a:srgbClr val="2B2F36"/>
+                </a:solidFill>
+                <a:latin typeface="Arial" pitchFamily="34" charset="0"/>
+                <a:ea typeface="BIZ UDPGothic" pitchFamily="34" charset="-122"/>
+                <a:cs typeface="BIZ UDPGothic" pitchFamily="34" charset="-120"/>
               </a:rPr>
               <a:t>18</a:t>
             </a:r>
@@ -7093,11 +7093,11 @@
             <a:r>
               <a:rPr lang="en-US" sz="900" dirty="0">
                 <a:solidFill>
-                  <a:srgbClr val="555555"/>
-                </a:solidFill>
-                <a:latin typeface="Arial" pitchFamily="34" charset="0"/>
-                <a:ea typeface="Arial" pitchFamily="34" charset="-122"/>
-                <a:cs typeface="Arial" pitchFamily="34" charset="-120"/>
+                  <a:srgbClr val="9AA0AA"/>
+                </a:solidFill>
+                <a:latin typeface="Arial" pitchFamily="34" charset="0"/>
+                <a:ea typeface="BIZ UDPGothic" pitchFamily="34" charset="-122"/>
+                <a:cs typeface="BIZ UDPGothic" pitchFamily="34" charset="-120"/>
               </a:rPr>
               <a:t>REBOOT JAPAN ── 提言004</a:t>
             </a:r>
@@ -7122,11 +7122,11 @@
             </a:avLst>
           </a:prstGeom>
           <a:solidFill>
-            <a:srgbClr val="1A1A1A"/>
+            <a:srgbClr val="FFFFFF"/>
           </a:solidFill>
           <a:ln w="12700">
             <a:solidFill>
-              <a:srgbClr val="2E2E2E"/>
+              <a:srgbClr val="DDE0E6"/>
             </a:solidFill>
             <a:prstDash val="solid"/>
           </a:ln>
@@ -7147,11 +7147,11 @@
             <a:avLst/>
           </a:prstGeom>
           <a:solidFill>
-            <a:srgbClr val="0A0A0A"/>
+            <a:srgbClr val="F5F6F8"/>
           </a:solidFill>
           <a:ln w="12700">
             <a:solidFill>
-              <a:srgbClr val="2E2E2E"/>
+              <a:srgbClr val="DDE0E6"/>
             </a:solidFill>
             <a:prstDash val="solid"/>
           </a:ln>
@@ -7211,11 +7211,11 @@
             <a:r>
               <a:rPr lang="en-US" sz="1500" b="1" dirty="0">
                 <a:solidFill>
-                  <a:srgbClr val="F5F5F0"/>
-                </a:solidFill>
-                <a:latin typeface="Arial" pitchFamily="34" charset="0"/>
-                <a:ea typeface="Arial" pitchFamily="34" charset="-122"/>
-                <a:cs typeface="Arial" pitchFamily="34" charset="-120"/>
+                  <a:srgbClr val="16181D"/>
+                </a:solidFill>
+                <a:latin typeface="Arial" pitchFamily="34" charset="0"/>
+                <a:ea typeface="BIZ UDPGothic" pitchFamily="34" charset="-122"/>
+                <a:cs typeface="BIZ UDPGothic" pitchFamily="34" charset="-120"/>
               </a:rPr>
               <a:t>住んでいる家（居住用財産）は、評価額をまるごとゼロに</a:t>
             </a:r>
@@ -7253,11 +7253,11 @@
             <a:r>
               <a:rPr lang="en-US" sz="1200" dirty="0">
                 <a:solidFill>
-                  <a:srgbClr val="CCCCCC"/>
-                </a:solidFill>
-                <a:latin typeface="Arial" pitchFamily="34" charset="0"/>
-                <a:ea typeface="Arial" pitchFamily="34" charset="-122"/>
-                <a:cs typeface="Arial" pitchFamily="34" charset="-120"/>
+                  <a:srgbClr val="2B2F36"/>
+                </a:solidFill>
+                <a:latin typeface="Arial" pitchFamily="34" charset="0"/>
+                <a:ea typeface="BIZ UDPGothic" pitchFamily="34" charset="-122"/>
+                <a:cs typeface="BIZ UDPGothic" pitchFamily="34" charset="-120"/>
               </a:rPr>
               <a:t>条件は「相続後10年間、そこに住み続けること」。目安は1か月のうち15日以上、実際に生活していることです。</a:t>
             </a:r>
@@ -7292,11 +7292,11 @@
             <a:r>
               <a:rPr lang="en-US" sz="1400" b="1" dirty="0">
                 <a:solidFill>
-                  <a:srgbClr val="D62828"/>
-                </a:solidFill>
-                <a:latin typeface="Arial" pitchFamily="34" charset="0"/>
-                <a:ea typeface="Arial" pitchFamily="34" charset="-122"/>
-                <a:cs typeface="Arial" pitchFamily="34" charset="-120"/>
+                  <a:srgbClr val="C8161D"/>
+                </a:solidFill>
+                <a:latin typeface="Arial" pitchFamily="34" charset="0"/>
+                <a:ea typeface="BIZ UDPGothic" pitchFamily="34" charset="-122"/>
+                <a:cs typeface="BIZ UDPGothic" pitchFamily="34" charset="-120"/>
               </a:rPr>
               <a:t>条件が免除されるケース</a:t>
             </a:r>
@@ -7335,11 +7335,11 @@
             <a:r>
               <a:rPr lang="en-US" sz="1300" dirty="0">
                 <a:solidFill>
-                  <a:srgbClr val="CCCCCC"/>
-                </a:solidFill>
-                <a:latin typeface="Arial" pitchFamily="34" charset="0"/>
-                <a:ea typeface="Arial" pitchFamily="34" charset="-122"/>
-                <a:cs typeface="Arial" pitchFamily="34" charset="-120"/>
+                  <a:srgbClr val="2B2F36"/>
+                </a:solidFill>
+                <a:latin typeface="Arial" pitchFamily="34" charset="0"/>
+                <a:ea typeface="BIZ UDPGothic" pitchFamily="34" charset="-122"/>
+                <a:cs typeface="BIZ UDPGothic" pitchFamily="34" charset="-120"/>
               </a:rPr>
               <a:t>立ち退きや区画整理など、公的な理由</a:t>
             </a:r>
@@ -7356,11 +7356,11 @@
             <a:r>
               <a:rPr lang="en-US" sz="1300" dirty="0">
                 <a:solidFill>
-                  <a:srgbClr val="CCCCCC"/>
-                </a:solidFill>
-                <a:latin typeface="Arial" pitchFamily="34" charset="0"/>
-                <a:ea typeface="Arial" pitchFamily="34" charset="-122"/>
-                <a:cs typeface="Arial" pitchFamily="34" charset="-120"/>
+                  <a:srgbClr val="2B2F36"/>
+                </a:solidFill>
+                <a:latin typeface="Arial" pitchFamily="34" charset="0"/>
+                <a:ea typeface="BIZ UDPGothic" pitchFamily="34" charset="-122"/>
+                <a:cs typeface="BIZ UDPGothic" pitchFamily="34" charset="-120"/>
               </a:rPr>
               <a:t>介護施設への入所など、病気や健康上の理由</a:t>
             </a:r>
@@ -7382,7 +7382,7 @@
     <p:bg>
       <p:bgPr>
         <a:solidFill>
-          <a:srgbClr val="0A0A0A"/>
+          <a:srgbClr val="F5F6F8"/>
         </a:solidFill>
       </p:bgPr>
     </p:bg>
@@ -7427,11 +7427,11 @@
             <a:r>
               <a:rPr lang="en-US" sz="1200" b="1" spc="300" kern="0" dirty="0">
                 <a:solidFill>
-                  <a:srgbClr val="D62828"/>
-                </a:solidFill>
-                <a:latin typeface="Arial" pitchFamily="34" charset="0"/>
-                <a:ea typeface="Arial" pitchFamily="34" charset="-122"/>
-                <a:cs typeface="Arial" pitchFamily="34" charset="-120"/>
+                  <a:srgbClr val="C8161D"/>
+                </a:solidFill>
+                <a:latin typeface="Arial" pitchFamily="34" charset="0"/>
+                <a:ea typeface="BIZ UDPGothic" pitchFamily="34" charset="-122"/>
+                <a:cs typeface="BIZ UDPGothic" pitchFamily="34" charset="-120"/>
               </a:rPr>
               <a:t>3. 柱③ ズルを防ぐしくみ</a:t>
             </a:r>
@@ -7466,11 +7466,11 @@
             <a:r>
               <a:rPr lang="en-US" sz="3000" b="1" dirty="0">
                 <a:solidFill>
-                  <a:srgbClr val="F5F5F0"/>
-                </a:solidFill>
-                <a:latin typeface="Arial" pitchFamily="34" charset="0"/>
-                <a:ea typeface="Arial" pitchFamily="34" charset="-122"/>
-                <a:cs typeface="Arial" pitchFamily="34" charset="-120"/>
+                  <a:srgbClr val="16181D"/>
+                </a:solidFill>
+                <a:latin typeface="Arial" pitchFamily="34" charset="0"/>
+                <a:ea typeface="BIZ UDPGothic" pitchFamily="34" charset="-122"/>
+                <a:cs typeface="BIZ UDPGothic" pitchFamily="34" charset="-120"/>
               </a:rPr>
               <a:t>条件を破ったら、利息付きでさかのぼって課税</a:t>
             </a:r>
@@ -7505,11 +7505,11 @@
             <a:r>
               <a:rPr lang="en-US" sz="1000" dirty="0">
                 <a:solidFill>
-                  <a:srgbClr val="CCCCCC"/>
-                </a:solidFill>
-                <a:latin typeface="Arial" pitchFamily="34" charset="0"/>
-                <a:ea typeface="Arial" pitchFamily="34" charset="-122"/>
-                <a:cs typeface="Arial" pitchFamily="34" charset="-120"/>
+                  <a:srgbClr val="2B2F36"/>
+                </a:solidFill>
+                <a:latin typeface="Arial" pitchFamily="34" charset="0"/>
+                <a:ea typeface="BIZ UDPGothic" pitchFamily="34" charset="-122"/>
+                <a:cs typeface="BIZ UDPGothic" pitchFamily="34" charset="-120"/>
               </a:rPr>
               <a:t>19</a:t>
             </a:r>
@@ -7544,11 +7544,11 @@
             <a:r>
               <a:rPr lang="en-US" sz="900" dirty="0">
                 <a:solidFill>
-                  <a:srgbClr val="555555"/>
-                </a:solidFill>
-                <a:latin typeface="Arial" pitchFamily="34" charset="0"/>
-                <a:ea typeface="Arial" pitchFamily="34" charset="-122"/>
-                <a:cs typeface="Arial" pitchFamily="34" charset="-120"/>
+                  <a:srgbClr val="9AA0AA"/>
+                </a:solidFill>
+                <a:latin typeface="Arial" pitchFamily="34" charset="0"/>
+                <a:ea typeface="BIZ UDPGothic" pitchFamily="34" charset="-122"/>
+                <a:cs typeface="BIZ UDPGothic" pitchFamily="34" charset="-120"/>
               </a:rPr>
               <a:t>REBOOT JAPAN ── 提言004</a:t>
             </a:r>
@@ -7583,11 +7583,11 @@
             <a:r>
               <a:rPr lang="en-US" sz="1500" b="1" dirty="0">
                 <a:solidFill>
-                  <a:srgbClr val="D62828"/>
-                </a:solidFill>
-                <a:latin typeface="Arial" pitchFamily="34" charset="0"/>
-                <a:ea typeface="Arial" pitchFamily="34" charset="-122"/>
-                <a:cs typeface="Arial" pitchFamily="34" charset="-120"/>
+                  <a:srgbClr val="C8161D"/>
+                </a:solidFill>
+                <a:latin typeface="Arial" pitchFamily="34" charset="0"/>
+                <a:ea typeface="BIZ UDPGothic" pitchFamily="34" charset="-122"/>
+                <a:cs typeface="BIZ UDPGothic" pitchFamily="34" charset="-120"/>
               </a:rPr>
               <a:t>なぜこのルールが必要なのか</a:t>
             </a:r>
@@ -7625,11 +7625,11 @@
             <a:r>
               <a:rPr lang="en-US" sz="1350" dirty="0">
                 <a:solidFill>
-                  <a:srgbClr val="CCCCCC"/>
-                </a:solidFill>
-                <a:latin typeface="Arial" pitchFamily="34" charset="0"/>
-                <a:ea typeface="Arial" pitchFamily="34" charset="-122"/>
-                <a:cs typeface="Arial" pitchFamily="34" charset="-120"/>
+                  <a:srgbClr val="2B2F36"/>
+                </a:solidFill>
+                <a:latin typeface="Arial" pitchFamily="34" charset="0"/>
+                <a:ea typeface="BIZ UDPGothic" pitchFamily="34" charset="-122"/>
+                <a:cs typeface="BIZ UDPGothic" pitchFamily="34" charset="-120"/>
               </a:rPr>
               <a:t>もし無条件で評価額をゼロにできるなら、「死ぬ直前に現金で家を買って、相続したらすぐ売る」という抜け道が使われてしまいます。これを防ぐためのルールです。</a:t>
             </a:r>
@@ -7654,11 +7654,11 @@
             </a:avLst>
           </a:prstGeom>
           <a:solidFill>
-            <a:srgbClr val="1A1A1A"/>
+            <a:srgbClr val="FFFFFF"/>
           </a:solidFill>
           <a:ln w="19050">
             <a:solidFill>
-              <a:srgbClr val="D62828"/>
+              <a:srgbClr val="C8161D"/>
             </a:solidFill>
             <a:prstDash val="solid"/>
           </a:ln>
@@ -7718,11 +7718,11 @@
             <a:r>
               <a:rPr lang="en-US" sz="1600" b="1" dirty="0">
                 <a:solidFill>
-                  <a:srgbClr val="F5F5F0"/>
-                </a:solidFill>
-                <a:latin typeface="Arial" pitchFamily="34" charset="0"/>
-                <a:ea typeface="Arial" pitchFamily="34" charset="-122"/>
-                <a:cs typeface="Arial" pitchFamily="34" charset="-120"/>
+                  <a:srgbClr val="16181D"/>
+                </a:solidFill>
+                <a:latin typeface="Arial" pitchFamily="34" charset="0"/>
+                <a:ea typeface="BIZ UDPGothic" pitchFamily="34" charset="-122"/>
+                <a:cs typeface="BIZ UDPGothic" pitchFamily="34" charset="-120"/>
               </a:rPr>
               <a:t>10年以内に条件を破ったら、最初にさかのぼって課税＋利息分も追加で支払う</a:t>
             </a:r>
@@ -7757,11 +7757,11 @@
             <a:r>
               <a:rPr lang="en-US" sz="1250" i="1" dirty="0">
                 <a:solidFill>
-                  <a:srgbClr val="999999"/>
-                </a:solidFill>
-                <a:latin typeface="Arial" pitchFamily="34" charset="0"/>
-                <a:ea typeface="Arial" pitchFamily="34" charset="-122"/>
-                <a:cs typeface="Arial" pitchFamily="34" charset="-120"/>
+                  <a:srgbClr val="4B515C"/>
+                </a:solidFill>
+                <a:latin typeface="Arial" pitchFamily="34" charset="0"/>
+                <a:ea typeface="BIZ UDPGothic" pitchFamily="34" charset="-122"/>
+                <a:cs typeface="BIZ UDPGothic" pitchFamily="34" charset="-120"/>
               </a:rPr>
               <a:t>控除される金額が大きいからこそ、抜け道を防ぐルールもセットで必要、という考え方です。</a:t>
             </a:r>
@@ -7783,7 +7783,7 @@
     <p:bg>
       <p:bgPr>
         <a:solidFill>
-          <a:srgbClr val="0A0A0A"/>
+          <a:srgbClr val="F5F6F8"/>
         </a:solidFill>
       </p:bgPr>
     </p:bg>
@@ -7828,11 +7828,11 @@
             <a:r>
               <a:rPr lang="en-US" sz="1200" b="1" spc="300" kern="0" dirty="0">
                 <a:solidFill>
-                  <a:srgbClr val="D62828"/>
-                </a:solidFill>
-                <a:latin typeface="Arial" pitchFamily="34" charset="0"/>
-                <a:ea typeface="Arial" pitchFamily="34" charset="-122"/>
-                <a:cs typeface="Arial" pitchFamily="34" charset="-120"/>
+                  <a:srgbClr val="C8161D"/>
+                </a:solidFill>
+                <a:latin typeface="Arial" pitchFamily="34" charset="0"/>
+                <a:ea typeface="BIZ UDPGothic" pitchFamily="34" charset="-122"/>
+                <a:cs typeface="BIZ UDPGothic" pitchFamily="34" charset="-120"/>
               </a:rPr>
               <a:t>CONTENTS</a:t>
             </a:r>
@@ -7867,11 +7867,11 @@
             <a:r>
               <a:rPr lang="en-US" sz="3000" b="1" dirty="0">
                 <a:solidFill>
-                  <a:srgbClr val="F5F5F0"/>
-                </a:solidFill>
-                <a:latin typeface="Arial" pitchFamily="34" charset="0"/>
-                <a:ea typeface="Arial" pitchFamily="34" charset="-122"/>
-                <a:cs typeface="Arial" pitchFamily="34" charset="-120"/>
+                  <a:srgbClr val="16181D"/>
+                </a:solidFill>
+                <a:latin typeface="Arial" pitchFamily="34" charset="0"/>
+                <a:ea typeface="BIZ UDPGothic" pitchFamily="34" charset="-122"/>
+                <a:cs typeface="BIZ UDPGothic" pitchFamily="34" charset="-120"/>
               </a:rPr>
               <a:t>このスライドで分かること</a:t>
             </a:r>
@@ -7906,11 +7906,11 @@
             <a:r>
               <a:rPr lang="en-US" sz="1000" dirty="0">
                 <a:solidFill>
-                  <a:srgbClr val="CCCCCC"/>
-                </a:solidFill>
-                <a:latin typeface="Arial" pitchFamily="34" charset="0"/>
-                <a:ea typeface="Arial" pitchFamily="34" charset="-122"/>
-                <a:cs typeface="Arial" pitchFamily="34" charset="-120"/>
+                  <a:srgbClr val="2B2F36"/>
+                </a:solidFill>
+                <a:latin typeface="Arial" pitchFamily="34" charset="0"/>
+                <a:ea typeface="BIZ UDPGothic" pitchFamily="34" charset="-122"/>
+                <a:cs typeface="BIZ UDPGothic" pitchFamily="34" charset="-120"/>
               </a:rPr>
               <a:t>02</a:t>
             </a:r>
@@ -7945,11 +7945,11 @@
             <a:r>
               <a:rPr lang="en-US" sz="900" dirty="0">
                 <a:solidFill>
-                  <a:srgbClr val="555555"/>
-                </a:solidFill>
-                <a:latin typeface="Arial" pitchFamily="34" charset="0"/>
-                <a:ea typeface="Arial" pitchFamily="34" charset="-122"/>
-                <a:cs typeface="Arial" pitchFamily="34" charset="-120"/>
+                  <a:srgbClr val="9AA0AA"/>
+                </a:solidFill>
+                <a:latin typeface="Arial" pitchFamily="34" charset="0"/>
+                <a:ea typeface="BIZ UDPGothic" pitchFamily="34" charset="-122"/>
+                <a:cs typeface="BIZ UDPGothic" pitchFamily="34" charset="-120"/>
               </a:rPr>
               <a:t>REBOOT JAPAN ── 提言004</a:t>
             </a:r>
@@ -7974,11 +7974,11 @@
             </a:avLst>
           </a:prstGeom>
           <a:solidFill>
-            <a:srgbClr val="1A1A1A"/>
+            <a:srgbClr val="FFFFFF"/>
           </a:solidFill>
           <a:ln w="12700">
             <a:solidFill>
-              <a:srgbClr val="2E2E2E"/>
+              <a:srgbClr val="DDE0E6"/>
             </a:solidFill>
             <a:prstDash val="solid"/>
           </a:ln>
@@ -8011,11 +8011,11 @@
             <a:r>
               <a:rPr lang="en-US" sz="3000" b="1" dirty="0">
                 <a:solidFill>
-                  <a:srgbClr val="D62828"/>
-                </a:solidFill>
-                <a:latin typeface="Arial" pitchFamily="34" charset="0"/>
-                <a:ea typeface="Arial" pitchFamily="34" charset="-122"/>
-                <a:cs typeface="Arial" pitchFamily="34" charset="-120"/>
+                  <a:srgbClr val="C8161D"/>
+                </a:solidFill>
+                <a:latin typeface="Arial" pitchFamily="34" charset="0"/>
+                <a:ea typeface="BIZ UDPGothic" pitchFamily="34" charset="-122"/>
+                <a:cs typeface="BIZ UDPGothic" pitchFamily="34" charset="-120"/>
               </a:rPr>
               <a:t>01</a:t>
             </a:r>
@@ -8050,11 +8050,11 @@
             <a:r>
               <a:rPr lang="en-US" sz="1500" b="1" dirty="0">
                 <a:solidFill>
-                  <a:srgbClr val="F5F5F0"/>
-                </a:solidFill>
-                <a:latin typeface="Arial" pitchFamily="34" charset="0"/>
-                <a:ea typeface="Arial" pitchFamily="34" charset="-122"/>
-                <a:cs typeface="Arial" pitchFamily="34" charset="-120"/>
+                  <a:srgbClr val="16181D"/>
+                </a:solidFill>
+                <a:latin typeface="Arial" pitchFamily="34" charset="0"/>
+                <a:ea typeface="BIZ UDPGothic" pitchFamily="34" charset="-122"/>
+                <a:cs typeface="BIZ UDPGothic" pitchFamily="34" charset="-120"/>
               </a:rPr>
               <a:t>今、何が問題なのか</a:t>
             </a:r>
@@ -8092,11 +8092,11 @@
             <a:r>
               <a:rPr lang="en-US" sz="1100" dirty="0">
                 <a:solidFill>
-                  <a:srgbClr val="CCCCCC"/>
-                </a:solidFill>
-                <a:latin typeface="Arial" pitchFamily="34" charset="0"/>
-                <a:ea typeface="Arial" pitchFamily="34" charset="-122"/>
-                <a:cs typeface="Arial" pitchFamily="34" charset="-120"/>
+                  <a:srgbClr val="2B2F36"/>
+                </a:solidFill>
+                <a:latin typeface="Arial" pitchFamily="34" charset="0"/>
+                <a:ea typeface="BIZ UDPGothic" pitchFamily="34" charset="-122"/>
+                <a:cs typeface="BIZ UDPGothic" pitchFamily="34" charset="-120"/>
               </a:rPr>
               <a:t>実家を売って税金を払う、という本末転倒な悲劇</a:t>
             </a:r>
@@ -8121,11 +8121,11 @@
             </a:avLst>
           </a:prstGeom>
           <a:solidFill>
-            <a:srgbClr val="1A1A1A"/>
+            <a:srgbClr val="FFFFFF"/>
           </a:solidFill>
           <a:ln w="12700">
             <a:solidFill>
-              <a:srgbClr val="2E2E2E"/>
+              <a:srgbClr val="DDE0E6"/>
             </a:solidFill>
             <a:prstDash val="solid"/>
           </a:ln>
@@ -8158,11 +8158,11 @@
             <a:r>
               <a:rPr lang="en-US" sz="3000" b="1" dirty="0">
                 <a:solidFill>
-                  <a:srgbClr val="D62828"/>
-                </a:solidFill>
-                <a:latin typeface="Arial" pitchFamily="34" charset="0"/>
-                <a:ea typeface="Arial" pitchFamily="34" charset="-122"/>
-                <a:cs typeface="Arial" pitchFamily="34" charset="-120"/>
+                  <a:srgbClr val="C8161D"/>
+                </a:solidFill>
+                <a:latin typeface="Arial" pitchFamily="34" charset="0"/>
+                <a:ea typeface="BIZ UDPGothic" pitchFamily="34" charset="-122"/>
+                <a:cs typeface="BIZ UDPGothic" pitchFamily="34" charset="-120"/>
               </a:rPr>
               <a:t>02</a:t>
             </a:r>
@@ -8197,11 +8197,11 @@
             <a:r>
               <a:rPr lang="en-US" sz="1500" b="1" dirty="0">
                 <a:solidFill>
-                  <a:srgbClr val="F5F5F0"/>
-                </a:solidFill>
-                <a:latin typeface="Arial" pitchFamily="34" charset="0"/>
-                <a:ea typeface="Arial" pitchFamily="34" charset="-122"/>
-                <a:cs typeface="Arial" pitchFamily="34" charset="-120"/>
+                  <a:srgbClr val="16181D"/>
+                </a:solidFill>
+                <a:latin typeface="Arial" pitchFamily="34" charset="0"/>
+                <a:ea typeface="BIZ UDPGothic" pitchFamily="34" charset="-122"/>
+                <a:cs typeface="BIZ UDPGothic" pitchFamily="34" charset="-120"/>
               </a:rPr>
               <a:t>なぜそうなったのか</a:t>
             </a:r>
@@ -8239,11 +8239,11 @@
             <a:r>
               <a:rPr lang="en-US" sz="1100" dirty="0">
                 <a:solidFill>
-                  <a:srgbClr val="CCCCCC"/>
-                </a:solidFill>
-                <a:latin typeface="Arial" pitchFamily="34" charset="0"/>
-                <a:ea typeface="Arial" pitchFamily="34" charset="-122"/>
-                <a:cs typeface="Arial" pitchFamily="34" charset="-120"/>
+                  <a:srgbClr val="2B2F36"/>
+                </a:solidFill>
+                <a:latin typeface="Arial" pitchFamily="34" charset="0"/>
+                <a:ea typeface="BIZ UDPGothic" pitchFamily="34" charset="-122"/>
+                <a:cs typeface="BIZ UDPGothic" pitchFamily="34" charset="-120"/>
               </a:rPr>
               <a:t>古いボーダーラインと、重すぎる最高税率55%</a:t>
             </a:r>
@@ -8268,11 +8268,11 @@
             </a:avLst>
           </a:prstGeom>
           <a:solidFill>
-            <a:srgbClr val="1A1A1A"/>
+            <a:srgbClr val="FFFFFF"/>
           </a:solidFill>
           <a:ln w="12700">
             <a:solidFill>
-              <a:srgbClr val="2E2E2E"/>
+              <a:srgbClr val="DDE0E6"/>
             </a:solidFill>
             <a:prstDash val="solid"/>
           </a:ln>
@@ -8305,11 +8305,11 @@
             <a:r>
               <a:rPr lang="en-US" sz="3000" b="1" dirty="0">
                 <a:solidFill>
-                  <a:srgbClr val="D62828"/>
-                </a:solidFill>
-                <a:latin typeface="Arial" pitchFamily="34" charset="0"/>
-                <a:ea typeface="Arial" pitchFamily="34" charset="-122"/>
-                <a:cs typeface="Arial" pitchFamily="34" charset="-120"/>
+                  <a:srgbClr val="C8161D"/>
+                </a:solidFill>
+                <a:latin typeface="Arial" pitchFamily="34" charset="0"/>
+                <a:ea typeface="BIZ UDPGothic" pitchFamily="34" charset="-122"/>
+                <a:cs typeface="BIZ UDPGothic" pitchFamily="34" charset="-120"/>
               </a:rPr>
               <a:t>03</a:t>
             </a:r>
@@ -8344,11 +8344,11 @@
             <a:r>
               <a:rPr lang="en-US" sz="1500" b="1" dirty="0">
                 <a:solidFill>
-                  <a:srgbClr val="F5F5F0"/>
-                </a:solidFill>
-                <a:latin typeface="Arial" pitchFamily="34" charset="0"/>
-                <a:ea typeface="Arial" pitchFamily="34" charset="-122"/>
-                <a:cs typeface="Arial" pitchFamily="34" charset="-120"/>
+                  <a:srgbClr val="16181D"/>
+                </a:solidFill>
+                <a:latin typeface="Arial" pitchFamily="34" charset="0"/>
+                <a:ea typeface="BIZ UDPGothic" pitchFamily="34" charset="-122"/>
+                <a:cs typeface="BIZ UDPGothic" pitchFamily="34" charset="-120"/>
               </a:rPr>
               <a:t>事業承継という見落とし</a:t>
             </a:r>
@@ -8386,11 +8386,11 @@
             <a:r>
               <a:rPr lang="en-US" sz="1100" dirty="0">
                 <a:solidFill>
-                  <a:srgbClr val="CCCCCC"/>
-                </a:solidFill>
-                <a:latin typeface="Arial" pitchFamily="34" charset="0"/>
-                <a:ea typeface="Arial" pitchFamily="34" charset="-122"/>
-                <a:cs typeface="Arial" pitchFamily="34" charset="-120"/>
+                  <a:srgbClr val="2B2F36"/>
+                </a:solidFill>
+                <a:latin typeface="Arial" pitchFamily="34" charset="0"/>
+                <a:ea typeface="BIZ UDPGothic" pitchFamily="34" charset="-122"/>
+                <a:cs typeface="BIZ UDPGothic" pitchFamily="34" charset="-120"/>
               </a:rPr>
               <a:t>会社を継ぐだけで、お金が無いのに税金がかかる矛盾</a:t>
             </a:r>
@@ -8415,11 +8415,11 @@
             </a:avLst>
           </a:prstGeom>
           <a:solidFill>
-            <a:srgbClr val="1A1A1A"/>
+            <a:srgbClr val="FFFFFF"/>
           </a:solidFill>
           <a:ln w="12700">
             <a:solidFill>
-              <a:srgbClr val="2E2E2E"/>
+              <a:srgbClr val="DDE0E6"/>
             </a:solidFill>
             <a:prstDash val="solid"/>
           </a:ln>
@@ -8452,11 +8452,11 @@
             <a:r>
               <a:rPr lang="en-US" sz="3000" b="1" dirty="0">
                 <a:solidFill>
-                  <a:srgbClr val="D62828"/>
-                </a:solidFill>
-                <a:latin typeface="Arial" pitchFamily="34" charset="0"/>
-                <a:ea typeface="Arial" pitchFamily="34" charset="-122"/>
-                <a:cs typeface="Arial" pitchFamily="34" charset="-120"/>
+                  <a:srgbClr val="C8161D"/>
+                </a:solidFill>
+                <a:latin typeface="Arial" pitchFamily="34" charset="0"/>
+                <a:ea typeface="BIZ UDPGothic" pitchFamily="34" charset="-122"/>
+                <a:cs typeface="BIZ UDPGothic" pitchFamily="34" charset="-120"/>
               </a:rPr>
               <a:t>04</a:t>
             </a:r>
@@ -8491,11 +8491,11 @@
             <a:r>
               <a:rPr lang="en-US" sz="1500" b="1" dirty="0">
                 <a:solidFill>
-                  <a:srgbClr val="F5F5F0"/>
-                </a:solidFill>
-                <a:latin typeface="Arial" pitchFamily="34" charset="0"/>
-                <a:ea typeface="Arial" pitchFamily="34" charset="-122"/>
-                <a:cs typeface="Arial" pitchFamily="34" charset="-120"/>
+                  <a:srgbClr val="16181D"/>
+                </a:solidFill>
+                <a:latin typeface="Arial" pitchFamily="34" charset="0"/>
+                <a:ea typeface="BIZ UDPGothic" pitchFamily="34" charset="-122"/>
+                <a:cs typeface="BIZ UDPGothic" pitchFamily="34" charset="-120"/>
               </a:rPr>
               <a:t>本当のデータはどうか</a:t>
             </a:r>
@@ -8533,11 +8533,11 @@
             <a:r>
               <a:rPr lang="en-US" sz="1100" dirty="0">
                 <a:solidFill>
-                  <a:srgbClr val="CCCCCC"/>
-                </a:solidFill>
-                <a:latin typeface="Arial" pitchFamily="34" charset="0"/>
-                <a:ea typeface="Arial" pitchFamily="34" charset="-122"/>
-                <a:cs typeface="Arial" pitchFamily="34" charset="-120"/>
+                  <a:srgbClr val="2B2F36"/>
+                </a:solidFill>
+                <a:latin typeface="Arial" pitchFamily="34" charset="0"/>
+                <a:ea typeface="BIZ UDPGothic" pitchFamily="34" charset="-122"/>
+                <a:cs typeface="BIZ UDPGothic" pitchFamily="34" charset="-120"/>
               </a:rPr>
               <a:t>課税されるのは10人に1人。5億円超は2.2%だけ</a:t>
             </a:r>
@@ -8562,11 +8562,11 @@
             </a:avLst>
           </a:prstGeom>
           <a:solidFill>
-            <a:srgbClr val="1A1A1A"/>
+            <a:srgbClr val="FFFFFF"/>
           </a:solidFill>
           <a:ln w="12700">
             <a:solidFill>
-              <a:srgbClr val="2E2E2E"/>
+              <a:srgbClr val="DDE0E6"/>
             </a:solidFill>
             <a:prstDash val="solid"/>
           </a:ln>
@@ -8599,11 +8599,11 @@
             <a:r>
               <a:rPr lang="en-US" sz="3000" b="1" dirty="0">
                 <a:solidFill>
-                  <a:srgbClr val="D62828"/>
-                </a:solidFill>
-                <a:latin typeface="Arial" pitchFamily="34" charset="0"/>
-                <a:ea typeface="Arial" pitchFamily="34" charset="-122"/>
-                <a:cs typeface="Arial" pitchFamily="34" charset="-120"/>
+                  <a:srgbClr val="C8161D"/>
+                </a:solidFill>
+                <a:latin typeface="Arial" pitchFamily="34" charset="0"/>
+                <a:ea typeface="BIZ UDPGothic" pitchFamily="34" charset="-122"/>
+                <a:cs typeface="BIZ UDPGothic" pitchFamily="34" charset="-120"/>
               </a:rPr>
               <a:t>05</a:t>
             </a:r>
@@ -8638,11 +8638,11 @@
             <a:r>
               <a:rPr lang="en-US" sz="1500" b="1" dirty="0">
                 <a:solidFill>
-                  <a:srgbClr val="F5F5F0"/>
-                </a:solidFill>
-                <a:latin typeface="Arial" pitchFamily="34" charset="0"/>
-                <a:ea typeface="Arial" pitchFamily="34" charset="-122"/>
-                <a:cs typeface="Arial" pitchFamily="34" charset="-120"/>
+                  <a:srgbClr val="16181D"/>
+                </a:solidFill>
+                <a:latin typeface="Arial" pitchFamily="34" charset="0"/>
+                <a:ea typeface="BIZ UDPGothic" pitchFamily="34" charset="-122"/>
+                <a:cs typeface="BIZ UDPGothic" pitchFamily="34" charset="-120"/>
               </a:rPr>
               <a:t>新しい相続税の形</a:t>
             </a:r>
@@ -8680,11 +8680,11 @@
             <a:r>
               <a:rPr lang="en-US" sz="1100" dirty="0">
                 <a:solidFill>
-                  <a:srgbClr val="CCCCCC"/>
-                </a:solidFill>
-                <a:latin typeface="Arial" pitchFamily="34" charset="0"/>
-                <a:ea typeface="Arial" pitchFamily="34" charset="-122"/>
-                <a:cs typeface="Arial" pitchFamily="34" charset="-120"/>
+                  <a:srgbClr val="2B2F36"/>
+                </a:solidFill>
+                <a:latin typeface="Arial" pitchFamily="34" charset="0"/>
+                <a:ea typeface="BIZ UDPGothic" pitchFamily="34" charset="-122"/>
+                <a:cs typeface="BIZ UDPGothic" pitchFamily="34" charset="-120"/>
               </a:rPr>
               <a:t>10億円まではゼロ、超えた分だけ30%</a:t>
             </a:r>
@@ -8709,11 +8709,11 @@
             </a:avLst>
           </a:prstGeom>
           <a:solidFill>
-            <a:srgbClr val="1A1A1A"/>
+            <a:srgbClr val="FFFFFF"/>
           </a:solidFill>
           <a:ln w="12700">
             <a:solidFill>
-              <a:srgbClr val="2E2E2E"/>
+              <a:srgbClr val="DDE0E6"/>
             </a:solidFill>
             <a:prstDash val="solid"/>
           </a:ln>
@@ -8746,11 +8746,11 @@
             <a:r>
               <a:rPr lang="en-US" sz="3000" b="1" dirty="0">
                 <a:solidFill>
-                  <a:srgbClr val="D62828"/>
-                </a:solidFill>
-                <a:latin typeface="Arial" pitchFamily="34" charset="0"/>
-                <a:ea typeface="Arial" pitchFamily="34" charset="-122"/>
-                <a:cs typeface="Arial" pitchFamily="34" charset="-120"/>
+                  <a:srgbClr val="C8161D"/>
+                </a:solidFill>
+                <a:latin typeface="Arial" pitchFamily="34" charset="0"/>
+                <a:ea typeface="BIZ UDPGothic" pitchFamily="34" charset="-122"/>
+                <a:cs typeface="BIZ UDPGothic" pitchFamily="34" charset="-120"/>
               </a:rPr>
               <a:t>06</a:t>
             </a:r>
@@ -8785,11 +8785,11 @@
             <a:r>
               <a:rPr lang="en-US" sz="1500" b="1" dirty="0">
                 <a:solidFill>
-                  <a:srgbClr val="F5F5F0"/>
-                </a:solidFill>
-                <a:latin typeface="Arial" pitchFamily="34" charset="0"/>
-                <a:ea typeface="Arial" pitchFamily="34" charset="-122"/>
-                <a:cs typeface="Arial" pitchFamily="34" charset="-120"/>
+                  <a:srgbClr val="16181D"/>
+                </a:solidFill>
+                <a:latin typeface="Arial" pitchFamily="34" charset="0"/>
+                <a:ea typeface="BIZ UDPGothic" pitchFamily="34" charset="-122"/>
+                <a:cs typeface="BIZ UDPGothic" pitchFamily="34" charset="-120"/>
               </a:rPr>
               <a:t>結局どうなるのか</a:t>
             </a:r>
@@ -8827,11 +8827,11 @@
             <a:r>
               <a:rPr lang="en-US" sz="1100" dirty="0">
                 <a:solidFill>
-                  <a:srgbClr val="CCCCCC"/>
-                </a:solidFill>
-                <a:latin typeface="Arial" pitchFamily="34" charset="0"/>
-                <a:ea typeface="Arial" pitchFamily="34" charset="-122"/>
-                <a:cs typeface="Arial" pitchFamily="34" charset="-120"/>
+                  <a:srgbClr val="2B2F36"/>
+                </a:solidFill>
+                <a:latin typeface="Arial" pitchFamily="34" charset="0"/>
+                <a:ea typeface="BIZ UDPGothic" pitchFamily="34" charset="-122"/>
+                <a:cs typeface="BIZ UDPGothic" pitchFamily="34" charset="-120"/>
               </a:rPr>
               <a:t>財源の考え方と、他の提言とのつながり</a:t>
             </a:r>
@@ -8853,7 +8853,7 @@
     <p:bg>
       <p:bgPr>
         <a:solidFill>
-          <a:srgbClr val="0A0A0A"/>
+          <a:srgbClr val="F5F6F8"/>
         </a:solidFill>
       </p:bgPr>
     </p:bg>
@@ -8898,11 +8898,11 @@
             <a:r>
               <a:rPr lang="en-US" sz="1200" b="1" spc="300" kern="0" dirty="0">
                 <a:solidFill>
-                  <a:srgbClr val="D62828"/>
-                </a:solidFill>
-                <a:latin typeface="Arial" pitchFamily="34" charset="0"/>
-                <a:ea typeface="Arial" pitchFamily="34" charset="-122"/>
-                <a:cs typeface="Arial" pitchFamily="34" charset="-120"/>
+                  <a:srgbClr val="C8161D"/>
+                </a:solidFill>
+                <a:latin typeface="Arial" pitchFamily="34" charset="0"/>
+                <a:ea typeface="BIZ UDPGothic" pitchFamily="34" charset="-122"/>
+                <a:cs typeface="BIZ UDPGothic" pitchFamily="34" charset="-120"/>
               </a:rPr>
               <a:t>4. 財源についての考え方</a:t>
             </a:r>
@@ -8937,11 +8937,11 @@
             <a:r>
               <a:rPr lang="en-US" sz="3000" b="1" dirty="0">
                 <a:solidFill>
-                  <a:srgbClr val="F5F5F0"/>
-                </a:solidFill>
-                <a:latin typeface="Arial" pitchFamily="34" charset="0"/>
-                <a:ea typeface="Arial" pitchFamily="34" charset="-122"/>
-                <a:cs typeface="Arial" pitchFamily="34" charset="-120"/>
+                  <a:srgbClr val="16181D"/>
+                </a:solidFill>
+                <a:latin typeface="Arial" pitchFamily="34" charset="0"/>
+                <a:ea typeface="BIZ UDPGothic" pitchFamily="34" charset="-122"/>
+                <a:cs typeface="BIZ UDPGothic" pitchFamily="34" charset="-120"/>
               </a:rPr>
               <a:t>相続税収が減ることは、問題なのか？</a:t>
             </a:r>
@@ -8976,11 +8976,11 @@
             <a:r>
               <a:rPr lang="en-US" sz="1000" dirty="0">
                 <a:solidFill>
-                  <a:srgbClr val="CCCCCC"/>
-                </a:solidFill>
-                <a:latin typeface="Arial" pitchFamily="34" charset="0"/>
-                <a:ea typeface="Arial" pitchFamily="34" charset="-122"/>
-                <a:cs typeface="Arial" pitchFamily="34" charset="-120"/>
+                  <a:srgbClr val="2B2F36"/>
+                </a:solidFill>
+                <a:latin typeface="Arial" pitchFamily="34" charset="0"/>
+                <a:ea typeface="BIZ UDPGothic" pitchFamily="34" charset="-122"/>
+                <a:cs typeface="BIZ UDPGothic" pitchFamily="34" charset="-120"/>
               </a:rPr>
               <a:t>20</a:t>
             </a:r>
@@ -9015,11 +9015,11 @@
             <a:r>
               <a:rPr lang="en-US" sz="900" dirty="0">
                 <a:solidFill>
-                  <a:srgbClr val="555555"/>
-                </a:solidFill>
-                <a:latin typeface="Arial" pitchFamily="34" charset="0"/>
-                <a:ea typeface="Arial" pitchFamily="34" charset="-122"/>
-                <a:cs typeface="Arial" pitchFamily="34" charset="-120"/>
+                  <a:srgbClr val="9AA0AA"/>
+                </a:solidFill>
+                <a:latin typeface="Arial" pitchFamily="34" charset="0"/>
+                <a:ea typeface="BIZ UDPGothic" pitchFamily="34" charset="-122"/>
+                <a:cs typeface="BIZ UDPGothic" pitchFamily="34" charset="-120"/>
               </a:rPr>
               <a:t>REBOOT JAPAN ── 提言004</a:t>
             </a:r>
@@ -9044,11 +9044,11 @@
             </a:avLst>
           </a:prstGeom>
           <a:solidFill>
-            <a:srgbClr val="1A1A1A"/>
+            <a:srgbClr val="FFFFFF"/>
           </a:solidFill>
           <a:ln w="12700">
             <a:solidFill>
-              <a:srgbClr val="2E2E2E"/>
+              <a:srgbClr val="DDE0E6"/>
             </a:solidFill>
             <a:prstDash val="solid"/>
           </a:ln>
@@ -9081,11 +9081,11 @@
             <a:r>
               <a:rPr lang="en-US" sz="1700" b="1" dirty="0">
                 <a:solidFill>
-                  <a:srgbClr val="F5F5F0"/>
-                </a:solidFill>
-                <a:latin typeface="Arial" pitchFamily="34" charset="0"/>
-                <a:ea typeface="Arial" pitchFamily="34" charset="-122"/>
-                <a:cs typeface="Arial" pitchFamily="34" charset="-120"/>
+                  <a:srgbClr val="16181D"/>
+                </a:solidFill>
+                <a:latin typeface="Arial" pitchFamily="34" charset="0"/>
+                <a:ea typeface="BIZ UDPGothic" pitchFamily="34" charset="-122"/>
+                <a:cs typeface="BIZ UDPGothic" pitchFamily="34" charset="-120"/>
               </a:rPr>
               <a:t>相続税は、国の税収全体のわずか数%です。</a:t>
             </a:r>
@@ -9123,11 +9123,11 @@
             <a:r>
               <a:rPr lang="en-US" sz="1250" dirty="0">
                 <a:solidFill>
-                  <a:srgbClr val="CCCCCC"/>
-                </a:solidFill>
-                <a:latin typeface="Arial" pitchFamily="34" charset="0"/>
-                <a:ea typeface="Arial" pitchFamily="34" charset="-122"/>
-                <a:cs typeface="Arial" pitchFamily="34" charset="-120"/>
+                  <a:srgbClr val="2B2F36"/>
+                </a:solidFill>
+                <a:latin typeface="Arial" pitchFamily="34" charset="0"/>
+                <a:ea typeface="BIZ UDPGothic" pitchFamily="34" charset="-122"/>
+                <a:cs typeface="BIZ UDPGothic" pitchFamily="34" charset="-120"/>
               </a:rPr>
               <a:t>この提言では、相続税収が減ることよりも、「中産階級の生活基盤が壊れること」「強い会社が代替わりで潰れること」の方が、社会にとって大きな損失だと考えます。</a:t>
             </a:r>
@@ -9162,11 +9162,11 @@
             <a:r>
               <a:rPr lang="en-US" sz="1500" b="1" dirty="0">
                 <a:solidFill>
-                  <a:srgbClr val="D62828"/>
-                </a:solidFill>
-                <a:latin typeface="Arial" pitchFamily="34" charset="0"/>
-                <a:ea typeface="Arial" pitchFamily="34" charset="-122"/>
-                <a:cs typeface="Arial" pitchFamily="34" charset="-120"/>
+                  <a:srgbClr val="C8161D"/>
+                </a:solidFill>
+                <a:latin typeface="Arial" pitchFamily="34" charset="0"/>
+                <a:ea typeface="BIZ UDPGothic" pitchFamily="34" charset="-122"/>
+                <a:cs typeface="BIZ UDPGothic" pitchFamily="34" charset="-120"/>
               </a:rPr>
               <a:t>足りなくなる分は、どうするのか？</a:t>
             </a:r>
@@ -9204,11 +9204,11 @@
             <a:r>
               <a:rPr lang="en-US" sz="1350" dirty="0">
                 <a:solidFill>
-                  <a:srgbClr val="CCCCCC"/>
-                </a:solidFill>
-                <a:latin typeface="Arial" pitchFamily="34" charset="0"/>
-                <a:ea typeface="Arial" pitchFamily="34" charset="-122"/>
-                <a:cs typeface="Arial" pitchFamily="34" charset="-120"/>
+                  <a:srgbClr val="2B2F36"/>
+                </a:solidFill>
+                <a:latin typeface="Arial" pitchFamily="34" charset="0"/>
+                <a:ea typeface="BIZ UDPGothic" pitchFamily="34" charset="-122"/>
+                <a:cs typeface="BIZ UDPGothic" pitchFamily="34" charset="-120"/>
               </a:rPr>
               <a:t>具体的な財源は、提言001で示した「フラット税」「消費税」など、他の提言の枠組みの中で確保していく考え方です。相続税という、もともと小さな財源に固執しません。</a:t>
             </a:r>
@@ -9230,7 +9230,7 @@
     <p:bg>
       <p:bgPr>
         <a:solidFill>
-          <a:srgbClr val="0A0A0A"/>
+          <a:srgbClr val="F5F6F8"/>
         </a:solidFill>
       </p:bgPr>
     </p:bg>
@@ -9275,11 +9275,11 @@
             <a:r>
               <a:rPr lang="en-US" sz="1200" b="1" spc="300" kern="0" dirty="0">
                 <a:solidFill>
-                  <a:srgbClr val="D62828"/>
-                </a:solidFill>
-                <a:latin typeface="Arial" pitchFamily="34" charset="0"/>
-                <a:ea typeface="Arial" pitchFamily="34" charset="-122"/>
-                <a:cs typeface="Arial" pitchFamily="34" charset="-120"/>
+                  <a:srgbClr val="C8161D"/>
+                </a:solidFill>
+                <a:latin typeface="Arial" pitchFamily="34" charset="0"/>
+                <a:ea typeface="BIZ UDPGothic" pitchFamily="34" charset="-122"/>
+                <a:cs typeface="BIZ UDPGothic" pitchFamily="34" charset="-120"/>
               </a:rPr>
               <a:t>4. 他の提言とのつながり</a:t>
             </a:r>
@@ -9314,11 +9314,11 @@
             <a:r>
               <a:rPr lang="en-US" sz="3000" b="1" dirty="0">
                 <a:solidFill>
-                  <a:srgbClr val="F5F5F0"/>
-                </a:solidFill>
-                <a:latin typeface="Arial" pitchFamily="34" charset="0"/>
-                <a:ea typeface="Arial" pitchFamily="34" charset="-122"/>
-                <a:cs typeface="Arial" pitchFamily="34" charset="-120"/>
+                  <a:srgbClr val="16181D"/>
+                </a:solidFill>
+                <a:latin typeface="Arial" pitchFamily="34" charset="0"/>
+                <a:ea typeface="BIZ UDPGothic" pitchFamily="34" charset="-122"/>
+                <a:cs typeface="BIZ UDPGothic" pitchFamily="34" charset="-120"/>
               </a:rPr>
               <a:t>提言001・003と、同じ考え方でつながっている</a:t>
             </a:r>
@@ -9353,11 +9353,11 @@
             <a:r>
               <a:rPr lang="en-US" sz="1000" dirty="0">
                 <a:solidFill>
-                  <a:srgbClr val="CCCCCC"/>
-                </a:solidFill>
-                <a:latin typeface="Arial" pitchFamily="34" charset="0"/>
-                <a:ea typeface="Arial" pitchFamily="34" charset="-122"/>
-                <a:cs typeface="Arial" pitchFamily="34" charset="-120"/>
+                  <a:srgbClr val="2B2F36"/>
+                </a:solidFill>
+                <a:latin typeface="Arial" pitchFamily="34" charset="0"/>
+                <a:ea typeface="BIZ UDPGothic" pitchFamily="34" charset="-122"/>
+                <a:cs typeface="BIZ UDPGothic" pitchFamily="34" charset="-120"/>
               </a:rPr>
               <a:t>21</a:t>
             </a:r>
@@ -9392,11 +9392,11 @@
             <a:r>
               <a:rPr lang="en-US" sz="900" dirty="0">
                 <a:solidFill>
-                  <a:srgbClr val="555555"/>
-                </a:solidFill>
-                <a:latin typeface="Arial" pitchFamily="34" charset="0"/>
-                <a:ea typeface="Arial" pitchFamily="34" charset="-122"/>
-                <a:cs typeface="Arial" pitchFamily="34" charset="-120"/>
+                  <a:srgbClr val="9AA0AA"/>
+                </a:solidFill>
+                <a:latin typeface="Arial" pitchFamily="34" charset="0"/>
+                <a:ea typeface="BIZ UDPGothic" pitchFamily="34" charset="-122"/>
+                <a:cs typeface="BIZ UDPGothic" pitchFamily="34" charset="-120"/>
               </a:rPr>
               <a:t>REBOOT JAPAN ── 提言004</a:t>
             </a:r>
@@ -9419,7 +9419,7 @@
             <a:avLst/>
           </a:prstGeom>
           <a:solidFill>
-            <a:srgbClr val="2E2E2E"/>
+            <a:srgbClr val="DDE0E6"/>
           </a:solidFill>
           <a:ln/>
         </p:spPr>
@@ -9451,11 +9451,11 @@
             <a:r>
               <a:rPr lang="en-US" sz="1150" b="1" dirty="0">
                 <a:solidFill>
-                  <a:srgbClr val="F5F5F0"/>
-                </a:solidFill>
-                <a:latin typeface="Arial" pitchFamily="34" charset="0"/>
-                <a:ea typeface="Arial" pitchFamily="34" charset="-122"/>
-                <a:cs typeface="Arial" pitchFamily="34" charset="-120"/>
+                  <a:srgbClr val="16181D"/>
+                </a:solidFill>
+                <a:latin typeface="Arial" pitchFamily="34" charset="0"/>
+                <a:ea typeface="BIZ UDPGothic" pitchFamily="34" charset="-122"/>
+                <a:cs typeface="BIZ UDPGothic" pitchFamily="34" charset="-120"/>
               </a:rPr>
               <a:t>観点</a:t>
             </a:r>
@@ -9478,7 +9478,7 @@
             <a:avLst/>
           </a:prstGeom>
           <a:solidFill>
-            <a:srgbClr val="2E2E2E"/>
+            <a:srgbClr val="DDE0E6"/>
           </a:solidFill>
           <a:ln/>
         </p:spPr>
@@ -9510,11 +9510,11 @@
             <a:r>
               <a:rPr lang="en-US" sz="1150" b="1" dirty="0">
                 <a:solidFill>
-                  <a:srgbClr val="F5F5F0"/>
-                </a:solidFill>
-                <a:latin typeface="Arial" pitchFamily="34" charset="0"/>
-                <a:ea typeface="Arial" pitchFamily="34" charset="-122"/>
-                <a:cs typeface="Arial" pitchFamily="34" charset="-120"/>
+                  <a:srgbClr val="16181D"/>
+                </a:solidFill>
+                <a:latin typeface="Arial" pitchFamily="34" charset="0"/>
+                <a:ea typeface="BIZ UDPGothic" pitchFamily="34" charset="-122"/>
+                <a:cs typeface="BIZ UDPGothic" pitchFamily="34" charset="-120"/>
               </a:rPr>
               <a:t>提言001（民間）</a:t>
             </a:r>
@@ -9537,7 +9537,7 @@
             <a:avLst/>
           </a:prstGeom>
           <a:solidFill>
-            <a:srgbClr val="2E2E2E"/>
+            <a:srgbClr val="DDE0E6"/>
           </a:solidFill>
           <a:ln/>
         </p:spPr>
@@ -9569,11 +9569,11 @@
             <a:r>
               <a:rPr lang="en-US" sz="1150" b="1" dirty="0">
                 <a:solidFill>
-                  <a:srgbClr val="F5F5F0"/>
-                </a:solidFill>
-                <a:latin typeface="Arial" pitchFamily="34" charset="0"/>
-                <a:ea typeface="Arial" pitchFamily="34" charset="-122"/>
-                <a:cs typeface="Arial" pitchFamily="34" charset="-120"/>
+                  <a:srgbClr val="16181D"/>
+                </a:solidFill>
+                <a:latin typeface="Arial" pitchFamily="34" charset="0"/>
+                <a:ea typeface="BIZ UDPGothic" pitchFamily="34" charset="-122"/>
+                <a:cs typeface="BIZ UDPGothic" pitchFamily="34" charset="-120"/>
               </a:rPr>
               <a:t>提言003（企業）</a:t>
             </a:r>
@@ -9596,7 +9596,7 @@
             <a:avLst/>
           </a:prstGeom>
           <a:solidFill>
-            <a:srgbClr val="2E2E2E"/>
+            <a:srgbClr val="DDE0E6"/>
           </a:solidFill>
           <a:ln/>
         </p:spPr>
@@ -9628,11 +9628,11 @@
             <a:r>
               <a:rPr lang="en-US" sz="1150" b="1" dirty="0">
                 <a:solidFill>
-                  <a:srgbClr val="F5F5F0"/>
-                </a:solidFill>
-                <a:latin typeface="Arial" pitchFamily="34" charset="0"/>
-                <a:ea typeface="Arial" pitchFamily="34" charset="-122"/>
-                <a:cs typeface="Arial" pitchFamily="34" charset="-120"/>
+                  <a:srgbClr val="16181D"/>
+                </a:solidFill>
+                <a:latin typeface="Arial" pitchFamily="34" charset="0"/>
+                <a:ea typeface="BIZ UDPGothic" pitchFamily="34" charset="-122"/>
+                <a:cs typeface="BIZ UDPGothic" pitchFamily="34" charset="-120"/>
               </a:rPr>
               <a:t>提言004（相続）</a:t>
             </a:r>
@@ -9655,11 +9655,11 @@
             <a:avLst/>
           </a:prstGeom>
           <a:solidFill>
-            <a:srgbClr val="1A1A1A"/>
+            <a:srgbClr val="FFFFFF"/>
           </a:solidFill>
           <a:ln w="9525">
             <a:solidFill>
-              <a:srgbClr val="2E2E2E"/>
+              <a:srgbClr val="DDE0E6"/>
             </a:solidFill>
             <a:prstDash val="solid"/>
           </a:ln>
@@ -9695,11 +9695,11 @@
             <a:r>
               <a:rPr lang="en-US" sz="1100" b="1" dirty="0">
                 <a:solidFill>
-                  <a:srgbClr val="F5F5F0"/>
-                </a:solidFill>
-                <a:latin typeface="Arial" pitchFamily="34" charset="0"/>
-                <a:ea typeface="Arial" pitchFamily="34" charset="-122"/>
-                <a:cs typeface="Arial" pitchFamily="34" charset="-120"/>
+                  <a:srgbClr val="16181D"/>
+                </a:solidFill>
+                <a:latin typeface="Arial" pitchFamily="34" charset="0"/>
+                <a:ea typeface="BIZ UDPGothic" pitchFamily="34" charset="-122"/>
+                <a:cs typeface="BIZ UDPGothic" pitchFamily="34" charset="-120"/>
               </a:rPr>
               <a:t>累進課税への考え方</a:t>
             </a:r>
@@ -9722,11 +9722,11 @@
             <a:avLst/>
           </a:prstGeom>
           <a:solidFill>
-            <a:srgbClr val="1A1A1A"/>
+            <a:srgbClr val="FFFFFF"/>
           </a:solidFill>
           <a:ln w="9525">
             <a:solidFill>
-              <a:srgbClr val="2E2E2E"/>
+              <a:srgbClr val="DDE0E6"/>
             </a:solidFill>
             <a:prstDash val="solid"/>
           </a:ln>
@@ -9762,11 +9762,11 @@
             <a:r>
               <a:rPr lang="en-US" sz="1100" dirty="0">
                 <a:solidFill>
-                  <a:srgbClr val="CCCCCC"/>
-                </a:solidFill>
-                <a:latin typeface="Arial" pitchFamily="34" charset="0"/>
-                <a:ea typeface="Arial" pitchFamily="34" charset="-122"/>
-                <a:cs typeface="Arial" pitchFamily="34" charset="-120"/>
+                  <a:srgbClr val="2B2F36"/>
+                </a:solidFill>
+                <a:latin typeface="Arial" pitchFamily="34" charset="0"/>
+                <a:ea typeface="BIZ UDPGothic" pitchFamily="34" charset="-122"/>
+                <a:cs typeface="BIZ UDPGothic" pitchFamily="34" charset="-120"/>
               </a:rPr>
               <a:t>フラット税率を支持</a:t>
             </a:r>
@@ -9789,11 +9789,11 @@
             <a:avLst/>
           </a:prstGeom>
           <a:solidFill>
-            <a:srgbClr val="1A1A1A"/>
+            <a:srgbClr val="FFFFFF"/>
           </a:solidFill>
           <a:ln w="9525">
             <a:solidFill>
-              <a:srgbClr val="2E2E2E"/>
+              <a:srgbClr val="DDE0E6"/>
             </a:solidFill>
             <a:prstDash val="solid"/>
           </a:ln>
@@ -9829,11 +9829,11 @@
             <a:r>
               <a:rPr lang="en-US" sz="1100" dirty="0">
                 <a:solidFill>
-                  <a:srgbClr val="CCCCCC"/>
-                </a:solidFill>
-                <a:latin typeface="Arial" pitchFamily="34" charset="0"/>
-                <a:ea typeface="Arial" pitchFamily="34" charset="-122"/>
-                <a:cs typeface="Arial" pitchFamily="34" charset="-120"/>
+                  <a:srgbClr val="2B2F36"/>
+                </a:solidFill>
+                <a:latin typeface="Arial" pitchFamily="34" charset="0"/>
+                <a:ea typeface="BIZ UDPGothic" pitchFamily="34" charset="-122"/>
+                <a:cs typeface="BIZ UDPGothic" pitchFamily="34" charset="-120"/>
               </a:rPr>
               <a:t>成長すればフラットに優遇</a:t>
             </a:r>
@@ -9856,11 +9856,11 @@
             <a:avLst/>
           </a:prstGeom>
           <a:solidFill>
-            <a:srgbClr val="2A1414"/>
+            <a:srgbClr val="FCEBEB"/>
           </a:solidFill>
           <a:ln w="9525">
             <a:solidFill>
-              <a:srgbClr val="2E2E2E"/>
+              <a:srgbClr val="DDE0E6"/>
             </a:solidFill>
             <a:prstDash val="solid"/>
           </a:ln>
@@ -9896,11 +9896,11 @@
             <a:r>
               <a:rPr lang="en-US" sz="1100" b="1" dirty="0">
                 <a:solidFill>
-                  <a:srgbClr val="D62828"/>
-                </a:solidFill>
-                <a:latin typeface="Arial" pitchFamily="34" charset="0"/>
-                <a:ea typeface="Arial" pitchFamily="34" charset="-122"/>
-                <a:cs typeface="Arial" pitchFamily="34" charset="-120"/>
+                  <a:srgbClr val="C8161D"/>
+                </a:solidFill>
+                <a:latin typeface="Arial" pitchFamily="34" charset="0"/>
+                <a:ea typeface="BIZ UDPGothic" pitchFamily="34" charset="-122"/>
+                <a:cs typeface="BIZ UDPGothic" pitchFamily="34" charset="-120"/>
               </a:rPr>
               <a:t>超えた分だけフラット30%</a:t>
             </a:r>
@@ -9923,11 +9923,11 @@
             <a:avLst/>
           </a:prstGeom>
           <a:solidFill>
-            <a:srgbClr val="0A0A0A"/>
+            <a:srgbClr val="F5F6F8"/>
           </a:solidFill>
           <a:ln w="9525">
             <a:solidFill>
-              <a:srgbClr val="2E2E2E"/>
+              <a:srgbClr val="DDE0E6"/>
             </a:solidFill>
             <a:prstDash val="solid"/>
           </a:ln>
@@ -9963,11 +9963,11 @@
             <a:r>
               <a:rPr lang="en-US" sz="1100" b="1" dirty="0">
                 <a:solidFill>
-                  <a:srgbClr val="F5F5F0"/>
-                </a:solidFill>
-                <a:latin typeface="Arial" pitchFamily="34" charset="0"/>
-                <a:ea typeface="Arial" pitchFamily="34" charset="-122"/>
-                <a:cs typeface="Arial" pitchFamily="34" charset="-120"/>
+                  <a:srgbClr val="16181D"/>
+                </a:solidFill>
+                <a:latin typeface="Arial" pitchFamily="34" charset="0"/>
+                <a:ea typeface="BIZ UDPGothic" pitchFamily="34" charset="-122"/>
+                <a:cs typeface="BIZ UDPGothic" pitchFamily="34" charset="-120"/>
               </a:rPr>
               <a:t>対象の絞り込み</a:t>
             </a:r>
@@ -9990,11 +9990,11 @@
             <a:avLst/>
           </a:prstGeom>
           <a:solidFill>
-            <a:srgbClr val="0A0A0A"/>
+            <a:srgbClr val="F5F6F8"/>
           </a:solidFill>
           <a:ln w="9525">
             <a:solidFill>
-              <a:srgbClr val="2E2E2E"/>
+              <a:srgbClr val="DDE0E6"/>
             </a:solidFill>
             <a:prstDash val="solid"/>
           </a:ln>
@@ -10030,11 +10030,11 @@
             <a:r>
               <a:rPr lang="en-US" sz="1100" dirty="0">
                 <a:solidFill>
-                  <a:srgbClr val="CCCCCC"/>
-                </a:solidFill>
-                <a:latin typeface="Arial" pitchFamily="34" charset="0"/>
-                <a:ea typeface="Arial" pitchFamily="34" charset="-122"/>
-                <a:cs typeface="Arial" pitchFamily="34" charset="-120"/>
+                  <a:srgbClr val="2B2F36"/>
+                </a:solidFill>
+                <a:latin typeface="Arial" pitchFamily="34" charset="0"/>
+                <a:ea typeface="BIZ UDPGothic" pitchFamily="34" charset="-122"/>
+                <a:cs typeface="BIZ UDPGothic" pitchFamily="34" charset="-120"/>
               </a:rPr>
               <a:t>全国民を公平に</a:t>
             </a:r>
@@ -10057,11 +10057,11 @@
             <a:avLst/>
           </a:prstGeom>
           <a:solidFill>
-            <a:srgbClr val="0A0A0A"/>
+            <a:srgbClr val="F5F6F8"/>
           </a:solidFill>
           <a:ln w="9525">
             <a:solidFill>
-              <a:srgbClr val="2E2E2E"/>
+              <a:srgbClr val="DDE0E6"/>
             </a:solidFill>
             <a:prstDash val="solid"/>
           </a:ln>
@@ -10097,11 +10097,11 @@
             <a:r>
               <a:rPr lang="en-US" sz="1100" dirty="0">
                 <a:solidFill>
-                  <a:srgbClr val="CCCCCC"/>
-                </a:solidFill>
-                <a:latin typeface="Arial" pitchFamily="34" charset="0"/>
-                <a:ea typeface="Arial" pitchFamily="34" charset="-122"/>
-                <a:cs typeface="Arial" pitchFamily="34" charset="-120"/>
+                  <a:srgbClr val="2B2F36"/>
+                </a:solidFill>
+                <a:latin typeface="Arial" pitchFamily="34" charset="0"/>
+                <a:ea typeface="BIZ UDPGothic" pitchFamily="34" charset="-122"/>
+                <a:cs typeface="BIZ UDPGothic" pitchFamily="34" charset="-120"/>
               </a:rPr>
               <a:t>成長する会社だけ優遇</a:t>
             </a:r>
@@ -10124,11 +10124,11 @@
             <a:avLst/>
           </a:prstGeom>
           <a:solidFill>
-            <a:srgbClr val="2A1414"/>
+            <a:srgbClr val="FCEBEB"/>
           </a:solidFill>
           <a:ln w="9525">
             <a:solidFill>
-              <a:srgbClr val="2E2E2E"/>
+              <a:srgbClr val="DDE0E6"/>
             </a:solidFill>
             <a:prstDash val="solid"/>
           </a:ln>
@@ -10164,11 +10164,11 @@
             <a:r>
               <a:rPr lang="en-US" sz="1100" b="1" dirty="0">
                 <a:solidFill>
-                  <a:srgbClr val="D62828"/>
-                </a:solidFill>
-                <a:latin typeface="Arial" pitchFamily="34" charset="0"/>
-                <a:ea typeface="Arial" pitchFamily="34" charset="-122"/>
-                <a:cs typeface="Arial" pitchFamily="34" charset="-120"/>
+                  <a:srgbClr val="C8161D"/>
+                </a:solidFill>
+                <a:latin typeface="Arial" pitchFamily="34" charset="0"/>
+                <a:ea typeface="BIZ UDPGothic" pitchFamily="34" charset="-122"/>
+                <a:cs typeface="BIZ UDPGothic" pitchFamily="34" charset="-120"/>
               </a:rPr>
               <a:t>超富裕層のみに限定</a:t>
             </a:r>
@@ -10191,11 +10191,11 @@
             <a:avLst/>
           </a:prstGeom>
           <a:solidFill>
-            <a:srgbClr val="1A1A1A"/>
+            <a:srgbClr val="FFFFFF"/>
           </a:solidFill>
           <a:ln w="9525">
             <a:solidFill>
-              <a:srgbClr val="2E2E2E"/>
+              <a:srgbClr val="DDE0E6"/>
             </a:solidFill>
             <a:prstDash val="solid"/>
           </a:ln>
@@ -10231,11 +10231,11 @@
             <a:r>
               <a:rPr lang="en-US" sz="1100" b="1" dirty="0">
                 <a:solidFill>
-                  <a:srgbClr val="F5F5F0"/>
-                </a:solidFill>
-                <a:latin typeface="Arial" pitchFamily="34" charset="0"/>
-                <a:ea typeface="Arial" pitchFamily="34" charset="-122"/>
-                <a:cs typeface="Arial" pitchFamily="34" charset="-120"/>
+                  <a:srgbClr val="16181D"/>
+                </a:solidFill>
+                <a:latin typeface="Arial" pitchFamily="34" charset="0"/>
+                <a:ea typeface="BIZ UDPGothic" pitchFamily="34" charset="-122"/>
+                <a:cs typeface="BIZ UDPGothic" pitchFamily="34" charset="-120"/>
               </a:rPr>
               <a:t>中間層・中小企業の保護</a:t>
             </a:r>
@@ -10258,11 +10258,11 @@
             <a:avLst/>
           </a:prstGeom>
           <a:solidFill>
-            <a:srgbClr val="1A1A1A"/>
+            <a:srgbClr val="FFFFFF"/>
           </a:solidFill>
           <a:ln w="9525">
             <a:solidFill>
-              <a:srgbClr val="2E2E2E"/>
+              <a:srgbClr val="DDE0E6"/>
             </a:solidFill>
             <a:prstDash val="solid"/>
           </a:ln>
@@ -10298,11 +10298,11 @@
             <a:r>
               <a:rPr lang="en-US" sz="1100" dirty="0">
                 <a:solidFill>
-                  <a:srgbClr val="CCCCCC"/>
-                </a:solidFill>
-                <a:latin typeface="Arial" pitchFamily="34" charset="0"/>
-                <a:ea typeface="Arial" pitchFamily="34" charset="-122"/>
-                <a:cs typeface="Arial" pitchFamily="34" charset="-120"/>
+                  <a:srgbClr val="2B2F36"/>
+                </a:solidFill>
+                <a:latin typeface="Arial" pitchFamily="34" charset="0"/>
+                <a:ea typeface="BIZ UDPGothic" pitchFamily="34" charset="-122"/>
+                <a:cs typeface="BIZ UDPGothic" pitchFamily="34" charset="-120"/>
               </a:rPr>
               <a:t>中央値水準に揃える</a:t>
             </a:r>
@@ -10325,11 +10325,11 @@
             <a:avLst/>
           </a:prstGeom>
           <a:solidFill>
-            <a:srgbClr val="1A1A1A"/>
+            <a:srgbClr val="FFFFFF"/>
           </a:solidFill>
           <a:ln w="9525">
             <a:solidFill>
-              <a:srgbClr val="2E2E2E"/>
+              <a:srgbClr val="DDE0E6"/>
             </a:solidFill>
             <a:prstDash val="solid"/>
           </a:ln>
@@ -10365,11 +10365,11 @@
             <a:r>
               <a:rPr lang="en-US" sz="1100" dirty="0">
                 <a:solidFill>
-                  <a:srgbClr val="CCCCCC"/>
-                </a:solidFill>
-                <a:latin typeface="Arial" pitchFamily="34" charset="0"/>
-                <a:ea typeface="Arial" pitchFamily="34" charset="-122"/>
-                <a:cs typeface="Arial" pitchFamily="34" charset="-120"/>
+                  <a:srgbClr val="2B2F36"/>
+                </a:solidFill>
+                <a:latin typeface="Arial" pitchFamily="34" charset="0"/>
+                <a:ea typeface="BIZ UDPGothic" pitchFamily="34" charset="-122"/>
+                <a:cs typeface="BIZ UDPGothic" pitchFamily="34" charset="-120"/>
               </a:rPr>
               <a:t>中小・零細企業を保護</a:t>
             </a:r>
@@ -10392,11 +10392,11 @@
             <a:avLst/>
           </a:prstGeom>
           <a:solidFill>
-            <a:srgbClr val="2A1414"/>
+            <a:srgbClr val="FCEBEB"/>
           </a:solidFill>
           <a:ln w="9525">
             <a:solidFill>
-              <a:srgbClr val="2E2E2E"/>
+              <a:srgbClr val="DDE0E6"/>
             </a:solidFill>
             <a:prstDash val="solid"/>
           </a:ln>
@@ -10432,11 +10432,11 @@
             <a:r>
               <a:rPr lang="en-US" sz="1100" b="1" dirty="0">
                 <a:solidFill>
-                  <a:srgbClr val="D62828"/>
-                </a:solidFill>
-                <a:latin typeface="Arial" pitchFamily="34" charset="0"/>
-                <a:ea typeface="Arial" pitchFamily="34" charset="-122"/>
-                <a:cs typeface="Arial" pitchFamily="34" charset="-120"/>
+                  <a:srgbClr val="C8161D"/>
+                </a:solidFill>
+                <a:latin typeface="Arial" pitchFamily="34" charset="0"/>
+                <a:ea typeface="BIZ UDPGothic" pitchFamily="34" charset="-122"/>
+                <a:cs typeface="BIZ UDPGothic" pitchFamily="34" charset="-120"/>
               </a:rPr>
               <a:t>中産階級・事業承継を保護</a:t>
             </a:r>
@@ -10471,11 +10471,11 @@
             <a:r>
               <a:rPr lang="en-US" sz="1300" i="1" dirty="0">
                 <a:solidFill>
-                  <a:srgbClr val="D62828"/>
-                </a:solidFill>
-                <a:latin typeface="Arial" pitchFamily="34" charset="0"/>
-                <a:ea typeface="Arial" pitchFamily="34" charset="-122"/>
-                <a:cs typeface="Arial" pitchFamily="34" charset="-120"/>
+                  <a:srgbClr val="C8161D"/>
+                </a:solidFill>
+                <a:latin typeface="Arial" pitchFamily="34" charset="0"/>
+                <a:ea typeface="BIZ UDPGothic" pitchFamily="34" charset="-122"/>
+                <a:cs typeface="BIZ UDPGothic" pitchFamily="34" charset="-120"/>
               </a:rPr>
               <a:t>「頑張って築いた資産・事業は、世代を超えてもきちんと守られるべきだ」という一貫した思想です。</a:t>
             </a:r>
@@ -10497,7 +10497,7 @@
     <p:bg>
       <p:bgPr>
         <a:solidFill>
-          <a:srgbClr val="0A0A0A"/>
+          <a:srgbClr val="F5F6F8"/>
         </a:solidFill>
       </p:bgPr>
     </p:bg>
@@ -10542,11 +10542,11 @@
             <a:r>
               <a:rPr lang="en-US" sz="1200" b="1" spc="300" kern="0" dirty="0">
                 <a:solidFill>
-                  <a:srgbClr val="D62828"/>
-                </a:solidFill>
-                <a:latin typeface="Arial" pitchFamily="34" charset="0"/>
-                <a:ea typeface="Arial" pitchFamily="34" charset="-122"/>
-                <a:cs typeface="Arial" pitchFamily="34" charset="-120"/>
+                  <a:srgbClr val="C8161D"/>
+                </a:solidFill>
+                <a:latin typeface="Arial" pitchFamily="34" charset="0"/>
+                <a:ea typeface="BIZ UDPGothic" pitchFamily="34" charset="-122"/>
+                <a:cs typeface="BIZ UDPGothic" pitchFamily="34" charset="-120"/>
               </a:rPr>
               <a:t>5. これから詰めること</a:t>
             </a:r>
@@ -10581,11 +10581,11 @@
             <a:r>
               <a:rPr lang="en-US" sz="3000" b="1" dirty="0">
                 <a:solidFill>
-                  <a:srgbClr val="F5F5F0"/>
-                </a:solidFill>
-                <a:latin typeface="Arial" pitchFamily="34" charset="0"/>
-                <a:ea typeface="Arial" pitchFamily="34" charset="-122"/>
-                <a:cs typeface="Arial" pitchFamily="34" charset="-120"/>
+                  <a:srgbClr val="16181D"/>
+                </a:solidFill>
+                <a:latin typeface="Arial" pitchFamily="34" charset="0"/>
+                <a:ea typeface="BIZ UDPGothic" pitchFamily="34" charset="-122"/>
+                <a:cs typeface="BIZ UDPGothic" pitchFamily="34" charset="-120"/>
               </a:rPr>
               <a:t>まだ議論が必要な、5つの論点</a:t>
             </a:r>
@@ -10620,11 +10620,11 @@
             <a:r>
               <a:rPr lang="en-US" sz="1000" dirty="0">
                 <a:solidFill>
-                  <a:srgbClr val="CCCCCC"/>
-                </a:solidFill>
-                <a:latin typeface="Arial" pitchFamily="34" charset="0"/>
-                <a:ea typeface="Arial" pitchFamily="34" charset="-122"/>
-                <a:cs typeface="Arial" pitchFamily="34" charset="-120"/>
+                  <a:srgbClr val="2B2F36"/>
+                </a:solidFill>
+                <a:latin typeface="Arial" pitchFamily="34" charset="0"/>
+                <a:ea typeface="BIZ UDPGothic" pitchFamily="34" charset="-122"/>
+                <a:cs typeface="BIZ UDPGothic" pitchFamily="34" charset="-120"/>
               </a:rPr>
               <a:t>22</a:t>
             </a:r>
@@ -10659,11 +10659,11 @@
             <a:r>
               <a:rPr lang="en-US" sz="900" dirty="0">
                 <a:solidFill>
-                  <a:srgbClr val="555555"/>
-                </a:solidFill>
-                <a:latin typeface="Arial" pitchFamily="34" charset="0"/>
-                <a:ea typeface="Arial" pitchFamily="34" charset="-122"/>
-                <a:cs typeface="Arial" pitchFamily="34" charset="-120"/>
+                  <a:srgbClr val="9AA0AA"/>
+                </a:solidFill>
+                <a:latin typeface="Arial" pitchFamily="34" charset="0"/>
+                <a:ea typeface="BIZ UDPGothic" pitchFamily="34" charset="-122"/>
+                <a:cs typeface="BIZ UDPGothic" pitchFamily="34" charset="-120"/>
               </a:rPr>
               <a:t>REBOOT JAPAN ── 提言004</a:t>
             </a:r>
@@ -10688,11 +10688,11 @@
             </a:avLst>
           </a:prstGeom>
           <a:solidFill>
-            <a:srgbClr val="1A1A1A"/>
+            <a:srgbClr val="FFFFFF"/>
           </a:solidFill>
           <a:ln w="12700">
             <a:solidFill>
-              <a:srgbClr val="2E2E2E"/>
+              <a:srgbClr val="DDE0E6"/>
             </a:solidFill>
             <a:prstDash val="solid"/>
           </a:ln>
@@ -10725,11 +10725,11 @@
             <a:r>
               <a:rPr lang="en-US" sz="1800" b="1" dirty="0">
                 <a:solidFill>
-                  <a:srgbClr val="D62828"/>
-                </a:solidFill>
-                <a:latin typeface="Arial" pitchFamily="34" charset="0"/>
-                <a:ea typeface="Arial" pitchFamily="34" charset="-122"/>
-                <a:cs typeface="Arial" pitchFamily="34" charset="-120"/>
+                  <a:srgbClr val="C8161D"/>
+                </a:solidFill>
+                <a:latin typeface="Arial" pitchFamily="34" charset="0"/>
+                <a:ea typeface="BIZ UDPGothic" pitchFamily="34" charset="-122"/>
+                <a:cs typeface="BIZ UDPGothic" pitchFamily="34" charset="-120"/>
               </a:rPr>
               <a:t>1</a:t>
             </a:r>
@@ -10767,11 +10767,11 @@
             <a:r>
               <a:rPr lang="en-US" sz="1300" dirty="0">
                 <a:solidFill>
-                  <a:srgbClr val="CCCCCC"/>
-                </a:solidFill>
-                <a:latin typeface="Arial" pitchFamily="34" charset="0"/>
-                <a:ea typeface="Arial" pitchFamily="34" charset="-122"/>
-                <a:cs typeface="Arial" pitchFamily="34" charset="-120"/>
+                  <a:srgbClr val="2B2F36"/>
+                </a:solidFill>
+                <a:latin typeface="Arial" pitchFamily="34" charset="0"/>
+                <a:ea typeface="BIZ UDPGothic" pitchFamily="34" charset="-122"/>
+                <a:cs typeface="BIZ UDPGothic" pitchFamily="34" charset="-120"/>
               </a:rPr>
               <a:t>事業承継の対象となる「自社株式・事業用資産」の具体的な線引き</a:t>
             </a:r>
@@ -10796,11 +10796,11 @@
             </a:avLst>
           </a:prstGeom>
           <a:solidFill>
-            <a:srgbClr val="1A1A1A"/>
+            <a:srgbClr val="FFFFFF"/>
           </a:solidFill>
           <a:ln w="12700">
             <a:solidFill>
-              <a:srgbClr val="2E2E2E"/>
+              <a:srgbClr val="DDE0E6"/>
             </a:solidFill>
             <a:prstDash val="solid"/>
           </a:ln>
@@ -10833,11 +10833,11 @@
             <a:r>
               <a:rPr lang="en-US" sz="1800" b="1" dirty="0">
                 <a:solidFill>
-                  <a:srgbClr val="D62828"/>
-                </a:solidFill>
-                <a:latin typeface="Arial" pitchFamily="34" charset="0"/>
-                <a:ea typeface="Arial" pitchFamily="34" charset="-122"/>
-                <a:cs typeface="Arial" pitchFamily="34" charset="-120"/>
+                  <a:srgbClr val="C8161D"/>
+                </a:solidFill>
+                <a:latin typeface="Arial" pitchFamily="34" charset="0"/>
+                <a:ea typeface="BIZ UDPGothic" pitchFamily="34" charset="-122"/>
+                <a:cs typeface="BIZ UDPGothic" pitchFamily="34" charset="-120"/>
               </a:rPr>
               <a:t>2</a:t>
             </a:r>
@@ -10875,11 +10875,11 @@
             <a:r>
               <a:rPr lang="en-US" sz="1300" dirty="0">
                 <a:solidFill>
-                  <a:srgbClr val="CCCCCC"/>
-                </a:solidFill>
-                <a:latin typeface="Arial" pitchFamily="34" charset="0"/>
-                <a:ea typeface="Arial" pitchFamily="34" charset="-122"/>
-                <a:cs typeface="Arial" pitchFamily="34" charset="-120"/>
+                  <a:srgbClr val="2B2F36"/>
+                </a:solidFill>
+                <a:latin typeface="Arial" pitchFamily="34" charset="0"/>
+                <a:ea typeface="BIZ UDPGothic" pitchFamily="34" charset="-122"/>
+                <a:cs typeface="BIZ UDPGothic" pitchFamily="34" charset="-120"/>
               </a:rPr>
               <a:t>直系（配偶者・子・孫）以外が会社を継ぐ場合（従業員承継・M&amp;Aなど）の扱い</a:t>
             </a:r>
@@ -10904,11 +10904,11 @@
             </a:avLst>
           </a:prstGeom>
           <a:solidFill>
-            <a:srgbClr val="1A1A1A"/>
+            <a:srgbClr val="FFFFFF"/>
           </a:solidFill>
           <a:ln w="12700">
             <a:solidFill>
-              <a:srgbClr val="2E2E2E"/>
+              <a:srgbClr val="DDE0E6"/>
             </a:solidFill>
             <a:prstDash val="solid"/>
           </a:ln>
@@ -10941,11 +10941,11 @@
             <a:r>
               <a:rPr lang="en-US" sz="1800" b="1" dirty="0">
                 <a:solidFill>
-                  <a:srgbClr val="D62828"/>
-                </a:solidFill>
-                <a:latin typeface="Arial" pitchFamily="34" charset="0"/>
-                <a:ea typeface="Arial" pitchFamily="34" charset="-122"/>
-                <a:cs typeface="Arial" pitchFamily="34" charset="-120"/>
+                  <a:srgbClr val="C8161D"/>
+                </a:solidFill>
+                <a:latin typeface="Arial" pitchFamily="34" charset="0"/>
+                <a:ea typeface="BIZ UDPGothic" pitchFamily="34" charset="-122"/>
+                <a:cs typeface="BIZ UDPGothic" pitchFamily="34" charset="-120"/>
               </a:rPr>
               <a:t>3</a:t>
             </a:r>
@@ -10983,11 +10983,11 @@
             <a:r>
               <a:rPr lang="en-US" sz="1300" dirty="0">
                 <a:solidFill>
-                  <a:srgbClr val="CCCCCC"/>
-                </a:solidFill>
-                <a:latin typeface="Arial" pitchFamily="34" charset="0"/>
-                <a:ea typeface="Arial" pitchFamily="34" charset="-122"/>
-                <a:cs typeface="Arial" pitchFamily="34" charset="-120"/>
+                  <a:srgbClr val="2B2F36"/>
+                </a:solidFill>
+                <a:latin typeface="Arial" pitchFamily="34" charset="0"/>
+                <a:ea typeface="BIZ UDPGothic" pitchFamily="34" charset="-122"/>
+                <a:cs typeface="BIZ UDPGothic" pitchFamily="34" charset="-120"/>
               </a:rPr>
               <a:t>10億円ボーダー・住んでいる家のゼロ評価による、具体的な税収減少額の試算</a:t>
             </a:r>
@@ -11012,11 +11012,11 @@
             </a:avLst>
           </a:prstGeom>
           <a:solidFill>
-            <a:srgbClr val="1A1A1A"/>
+            <a:srgbClr val="FFFFFF"/>
           </a:solidFill>
           <a:ln w="12700">
             <a:solidFill>
-              <a:srgbClr val="2E2E2E"/>
+              <a:srgbClr val="DDE0E6"/>
             </a:solidFill>
             <a:prstDash val="solid"/>
           </a:ln>
@@ -11049,11 +11049,11 @@
             <a:r>
               <a:rPr lang="en-US" sz="1800" b="1" dirty="0">
                 <a:solidFill>
-                  <a:srgbClr val="D62828"/>
-                </a:solidFill>
-                <a:latin typeface="Arial" pitchFamily="34" charset="0"/>
-                <a:ea typeface="Arial" pitchFamily="34" charset="-122"/>
-                <a:cs typeface="Arial" pitchFamily="34" charset="-120"/>
+                  <a:srgbClr val="C8161D"/>
+                </a:solidFill>
+                <a:latin typeface="Arial" pitchFamily="34" charset="0"/>
+                <a:ea typeface="BIZ UDPGothic" pitchFamily="34" charset="-122"/>
+                <a:cs typeface="BIZ UDPGothic" pitchFamily="34" charset="-120"/>
               </a:rPr>
               <a:t>4</a:t>
             </a:r>
@@ -11091,11 +11091,11 @@
             <a:r>
               <a:rPr lang="en-US" sz="1300" dirty="0">
                 <a:solidFill>
-                  <a:srgbClr val="CCCCCC"/>
-                </a:solidFill>
-                <a:latin typeface="Arial" pitchFamily="34" charset="0"/>
-                <a:ea typeface="Arial" pitchFamily="34" charset="-122"/>
-                <a:cs typeface="Arial" pitchFamily="34" charset="-120"/>
+                  <a:srgbClr val="2B2F36"/>
+                </a:solidFill>
+                <a:latin typeface="Arial" pitchFamily="34" charset="0"/>
+                <a:ea typeface="BIZ UDPGothic" pitchFamily="34" charset="-122"/>
+                <a:cs typeface="BIZ UDPGothic" pitchFamily="34" charset="-120"/>
               </a:rPr>
               <a:t>「月15日以上住んでいる」ことを、どうやって確認するか</a:t>
             </a:r>
@@ -11120,11 +11120,11 @@
             </a:avLst>
           </a:prstGeom>
           <a:solidFill>
-            <a:srgbClr val="1A1A1A"/>
+            <a:srgbClr val="FFFFFF"/>
           </a:solidFill>
           <a:ln w="12700">
             <a:solidFill>
-              <a:srgbClr val="2E2E2E"/>
+              <a:srgbClr val="DDE0E6"/>
             </a:solidFill>
             <a:prstDash val="solid"/>
           </a:ln>
@@ -11157,11 +11157,11 @@
             <a:r>
               <a:rPr lang="en-US" sz="1800" b="1" dirty="0">
                 <a:solidFill>
-                  <a:srgbClr val="D62828"/>
-                </a:solidFill>
-                <a:latin typeface="Arial" pitchFamily="34" charset="0"/>
-                <a:ea typeface="Arial" pitchFamily="34" charset="-122"/>
-                <a:cs typeface="Arial" pitchFamily="34" charset="-120"/>
+                  <a:srgbClr val="C8161D"/>
+                </a:solidFill>
+                <a:latin typeface="Arial" pitchFamily="34" charset="0"/>
+                <a:ea typeface="BIZ UDPGothic" pitchFamily="34" charset="-122"/>
+                <a:cs typeface="BIZ UDPGothic" pitchFamily="34" charset="-120"/>
               </a:rPr>
               <a:t>5</a:t>
             </a:r>
@@ -11199,11 +11199,11 @@
             <a:r>
               <a:rPr lang="en-US" sz="1300" dirty="0">
                 <a:solidFill>
-                  <a:srgbClr val="CCCCCC"/>
-                </a:solidFill>
-                <a:latin typeface="Arial" pitchFamily="34" charset="0"/>
-                <a:ea typeface="Arial" pitchFamily="34" charset="-122"/>
-                <a:cs typeface="Arial" pitchFamily="34" charset="-120"/>
+                  <a:srgbClr val="2B2F36"/>
+                </a:solidFill>
+                <a:latin typeface="Arial" pitchFamily="34" charset="0"/>
+                <a:ea typeface="BIZ UDPGothic" pitchFamily="34" charset="-122"/>
+                <a:cs typeface="BIZ UDPGothic" pitchFamily="34" charset="-120"/>
               </a:rPr>
               <a:t>海外に住んでいる家族が関わる相続への適用関係</a:t>
             </a:r>
@@ -11225,7 +11225,7 @@
     <p:bg>
       <p:bgPr>
         <a:solidFill>
-          <a:srgbClr val="0A0A0A"/>
+          <a:srgbClr val="F5F6F8"/>
         </a:solidFill>
       </p:bgPr>
     </p:bg>
@@ -11270,11 +11270,11 @@
             <a:r>
               <a:rPr lang="en-US" sz="1200" b="1" spc="300" kern="0" dirty="0">
                 <a:solidFill>
-                  <a:srgbClr val="D62828"/>
-                </a:solidFill>
-                <a:latin typeface="Arial" pitchFamily="34" charset="0"/>
-                <a:ea typeface="Arial" pitchFamily="34" charset="-122"/>
-                <a:cs typeface="Arial" pitchFamily="34" charset="-120"/>
+                  <a:srgbClr val="C8161D"/>
+                </a:solidFill>
+                <a:latin typeface="Arial" pitchFamily="34" charset="0"/>
+                <a:ea typeface="BIZ UDPGothic" pitchFamily="34" charset="-122"/>
+                <a:cs typeface="BIZ UDPGothic" pitchFamily="34" charset="-120"/>
               </a:rPr>
               <a:t>まとめ</a:t>
             </a:r>
@@ -11309,11 +11309,11 @@
             <a:r>
               <a:rPr lang="en-US" sz="1000" dirty="0">
                 <a:solidFill>
-                  <a:srgbClr val="CCCCCC"/>
-                </a:solidFill>
-                <a:latin typeface="Arial" pitchFamily="34" charset="0"/>
-                <a:ea typeface="Arial" pitchFamily="34" charset="-122"/>
-                <a:cs typeface="Arial" pitchFamily="34" charset="-120"/>
+                  <a:srgbClr val="2B2F36"/>
+                </a:solidFill>
+                <a:latin typeface="Arial" pitchFamily="34" charset="0"/>
+                <a:ea typeface="BIZ UDPGothic" pitchFamily="34" charset="-122"/>
+                <a:cs typeface="BIZ UDPGothic" pitchFamily="34" charset="-120"/>
               </a:rPr>
               <a:t>23</a:t>
             </a:r>
@@ -11348,11 +11348,11 @@
             <a:r>
               <a:rPr lang="en-US" sz="900" dirty="0">
                 <a:solidFill>
-                  <a:srgbClr val="555555"/>
-                </a:solidFill>
-                <a:latin typeface="Arial" pitchFamily="34" charset="0"/>
-                <a:ea typeface="Arial" pitchFamily="34" charset="-122"/>
-                <a:cs typeface="Arial" pitchFamily="34" charset="-120"/>
+                  <a:srgbClr val="9AA0AA"/>
+                </a:solidFill>
+                <a:latin typeface="Arial" pitchFamily="34" charset="0"/>
+                <a:ea typeface="BIZ UDPGothic" pitchFamily="34" charset="-122"/>
+                <a:cs typeface="BIZ UDPGothic" pitchFamily="34" charset="-120"/>
               </a:rPr>
               <a:t>REBOOT JAPAN ── 提言004</a:t>
             </a:r>
@@ -11387,11 +11387,11 @@
             <a:r>
               <a:rPr lang="en-US" sz="2800" b="1" dirty="0">
                 <a:solidFill>
-                  <a:srgbClr val="F5F5F0"/>
-                </a:solidFill>
-                <a:latin typeface="Arial" pitchFamily="34" charset="0"/>
-                <a:ea typeface="Arial" pitchFamily="34" charset="-122"/>
-                <a:cs typeface="Arial" pitchFamily="34" charset="-120"/>
+                  <a:srgbClr val="16181D"/>
+                </a:solidFill>
+                <a:latin typeface="Arial" pitchFamily="34" charset="0"/>
+                <a:ea typeface="BIZ UDPGothic" pitchFamily="34" charset="-122"/>
+                <a:cs typeface="BIZ UDPGothic" pitchFamily="34" charset="-120"/>
               </a:rPr>
               <a:t>資産を築き、遺すことに、誇りを持てる社会へ</a:t>
             </a:r>
@@ -11429,11 +11429,11 @@
             <a:r>
               <a:rPr lang="en-US" sz="1500" dirty="0">
                 <a:solidFill>
-                  <a:srgbClr val="CCCCCC"/>
-                </a:solidFill>
-                <a:latin typeface="Arial" pitchFamily="34" charset="0"/>
-                <a:ea typeface="Arial" pitchFamily="34" charset="-122"/>
-                <a:cs typeface="Arial" pitchFamily="34" charset="-120"/>
+                  <a:srgbClr val="2B2F36"/>
+                </a:solidFill>
+                <a:latin typeface="Arial" pitchFamily="34" charset="0"/>
+                <a:ea typeface="BIZ UDPGothic" pitchFamily="34" charset="-122"/>
+                <a:cs typeface="BIZ UDPGothic" pitchFamily="34" charset="-120"/>
               </a:rPr>
               <a:t>相続税は、本来「なくてもいい税」です。それでも残すのであれば、対象はごく一部の超富裕層に限り、税率も常識的な範囲にとどめるべきです。</a:t>
             </a:r>
@@ -11471,11 +11471,11 @@
             <a:r>
               <a:rPr lang="en-US" sz="1500" dirty="0">
                 <a:solidFill>
-                  <a:srgbClr val="CCCCCC"/>
-                </a:solidFill>
-                <a:latin typeface="Arial" pitchFamily="34" charset="0"/>
-                <a:ea typeface="Arial" pitchFamily="34" charset="-122"/>
-                <a:cs typeface="Arial" pitchFamily="34" charset="-120"/>
+                  <a:srgbClr val="2B2F36"/>
+                </a:solidFill>
+                <a:latin typeface="Arial" pitchFamily="34" charset="0"/>
+                <a:ea typeface="BIZ UDPGothic" pitchFamily="34" charset="-122"/>
+                <a:cs typeface="BIZ UDPGothic" pitchFamily="34" charset="-120"/>
               </a:rPr>
               <a:t>中産階級が生涯かけて築いた家を、相続のために手放す必要はありません。強い中堅企業が、創業者の死をきっかけに解体される必要もありません。</a:t>
             </a:r>
@@ -11500,7 +11500,7 @@
           <a:noFill/>
           <a:ln w="12700">
             <a:solidFill>
-              <a:srgbClr val="2E2E2E"/>
+              <a:srgbClr val="DDE0E6"/>
             </a:solidFill>
             <a:prstDash val="solid"/>
           </a:ln>
@@ -11536,11 +11536,11 @@
             <a:r>
               <a:rPr lang="en-US" sz="2200" b="1" dirty="0">
                 <a:solidFill>
-                  <a:srgbClr val="D62828"/>
-                </a:solidFill>
-                <a:latin typeface="Arial" pitchFamily="34" charset="0"/>
-                <a:ea typeface="Arial" pitchFamily="34" charset="-122"/>
-                <a:cs typeface="Arial" pitchFamily="34" charset="-120"/>
+                  <a:srgbClr val="C8161D"/>
+                </a:solidFill>
+                <a:latin typeface="Arial" pitchFamily="34" charset="0"/>
+                <a:ea typeface="BIZ UDPGothic" pitchFamily="34" charset="-122"/>
+                <a:cs typeface="BIZ UDPGothic" pitchFamily="34" charset="-120"/>
               </a:rPr>
               <a:t>一生懸命働き、事業を育て、資産を遺すこと。</a:t>
             </a:r>
@@ -11556,11 +11556,11 @@
             <a:r>
               <a:rPr lang="en-US" sz="2200" b="1" dirty="0">
                 <a:solidFill>
-                  <a:srgbClr val="D62828"/>
-                </a:solidFill>
-                <a:latin typeface="Arial" pitchFamily="34" charset="0"/>
-                <a:ea typeface="Arial" pitchFamily="34" charset="-122"/>
-                <a:cs typeface="Arial" pitchFamily="34" charset="-120"/>
+                  <a:srgbClr val="C8161D"/>
+                </a:solidFill>
+                <a:latin typeface="Arial" pitchFamily="34" charset="0"/>
+                <a:ea typeface="BIZ UDPGothic" pitchFamily="34" charset="-122"/>
+                <a:cs typeface="BIZ UDPGothic" pitchFamily="34" charset="-120"/>
               </a:rPr>
               <a:t>それが世代を超えて尊重される国を目指す。</a:t>
             </a:r>
@@ -11582,7 +11582,7 @@
     <p:bg>
       <p:bgPr>
         <a:solidFill>
-          <a:srgbClr val="0A0A0A"/>
+          <a:srgbClr val="F5F6F8"/>
         </a:solidFill>
       </p:bgPr>
     </p:bg>
@@ -11627,11 +11627,11 @@
             <a:r>
               <a:rPr lang="en-US" sz="1200" b="1" spc="300" kern="0" dirty="0">
                 <a:solidFill>
-                  <a:srgbClr val="D62828"/>
-                </a:solidFill>
-                <a:latin typeface="Arial" pitchFamily="34" charset="0"/>
-                <a:ea typeface="Arial" pitchFamily="34" charset="-122"/>
-                <a:cs typeface="Arial" pitchFamily="34" charset="-120"/>
+                  <a:srgbClr val="C8161D"/>
+                </a:solidFill>
+                <a:latin typeface="Arial" pitchFamily="34" charset="0"/>
+                <a:ea typeface="BIZ UDPGothic" pitchFamily="34" charset="-122"/>
+                <a:cs typeface="BIZ UDPGothic" pitchFamily="34" charset="-120"/>
               </a:rPr>
               <a:t>0. この提言の立ち位置</a:t>
             </a:r>
@@ -11666,11 +11666,11 @@
             <a:r>
               <a:rPr lang="en-US" sz="3000" b="1" dirty="0">
                 <a:solidFill>
-                  <a:srgbClr val="F5F5F0"/>
-                </a:solidFill>
-                <a:latin typeface="Arial" pitchFamily="34" charset="0"/>
-                <a:ea typeface="Arial" pitchFamily="34" charset="-122"/>
-                <a:cs typeface="Arial" pitchFamily="34" charset="-120"/>
+                  <a:srgbClr val="16181D"/>
+                </a:solidFill>
+                <a:latin typeface="Arial" pitchFamily="34" charset="0"/>
+                <a:ea typeface="BIZ UDPGothic" pitchFamily="34" charset="-122"/>
+                <a:cs typeface="BIZ UDPGothic" pitchFamily="34" charset="-120"/>
               </a:rPr>
               <a:t>相続税は、そもそも「なくてもいい税」</a:t>
             </a:r>
@@ -11705,11 +11705,11 @@
             <a:r>
               <a:rPr lang="en-US" sz="1000" dirty="0">
                 <a:solidFill>
-                  <a:srgbClr val="CCCCCC"/>
-                </a:solidFill>
-                <a:latin typeface="Arial" pitchFamily="34" charset="0"/>
-                <a:ea typeface="Arial" pitchFamily="34" charset="-122"/>
-                <a:cs typeface="Arial" pitchFamily="34" charset="-120"/>
+                  <a:srgbClr val="2B2F36"/>
+                </a:solidFill>
+                <a:latin typeface="Arial" pitchFamily="34" charset="0"/>
+                <a:ea typeface="BIZ UDPGothic" pitchFamily="34" charset="-122"/>
+                <a:cs typeface="BIZ UDPGothic" pitchFamily="34" charset="-120"/>
               </a:rPr>
               <a:t>03</a:t>
             </a:r>
@@ -11744,11 +11744,11 @@
             <a:r>
               <a:rPr lang="en-US" sz="900" dirty="0">
                 <a:solidFill>
-                  <a:srgbClr val="555555"/>
-                </a:solidFill>
-                <a:latin typeface="Arial" pitchFamily="34" charset="0"/>
-                <a:ea typeface="Arial" pitchFamily="34" charset="-122"/>
-                <a:cs typeface="Arial" pitchFamily="34" charset="-120"/>
+                  <a:srgbClr val="9AA0AA"/>
+                </a:solidFill>
+                <a:latin typeface="Arial" pitchFamily="34" charset="0"/>
+                <a:ea typeface="BIZ UDPGothic" pitchFamily="34" charset="-122"/>
+                <a:cs typeface="BIZ UDPGothic" pitchFamily="34" charset="-120"/>
               </a:rPr>
               <a:t>REBOOT JAPAN ── 提言004</a:t>
             </a:r>
@@ -11773,11 +11773,11 @@
             </a:avLst>
           </a:prstGeom>
           <a:solidFill>
-            <a:srgbClr val="1A1A1A"/>
+            <a:srgbClr val="FFFFFF"/>
           </a:solidFill>
           <a:ln w="19050">
             <a:solidFill>
-              <a:srgbClr val="D62828"/>
+              <a:srgbClr val="C8161D"/>
             </a:solidFill>
             <a:prstDash val="solid"/>
           </a:ln>
@@ -11813,11 +11813,11 @@
             <a:r>
               <a:rPr lang="en-US" sz="1900" b="1" dirty="0">
                 <a:solidFill>
-                  <a:srgbClr val="F5F5F0"/>
-                </a:solidFill>
-                <a:latin typeface="Arial" pitchFamily="34" charset="0"/>
-                <a:ea typeface="Arial" pitchFamily="34" charset="-122"/>
-                <a:cs typeface="Arial" pitchFamily="34" charset="-120"/>
+                  <a:srgbClr val="16181D"/>
+                </a:solidFill>
+                <a:latin typeface="Arial" pitchFamily="34" charset="0"/>
+                <a:ea typeface="BIZ UDPGothic" pitchFamily="34" charset="-122"/>
+                <a:cs typeface="BIZ UDPGothic" pitchFamily="34" charset="-120"/>
               </a:rPr>
               <a:t>それでも残すなら、対象はごく一部の超富裕層に限定し、税率も「敬意ある水準」にとどめるべき</a:t>
             </a:r>
@@ -11855,11 +11855,11 @@
             <a:r>
               <a:rPr lang="en-US" sz="1400" dirty="0">
                 <a:solidFill>
-                  <a:srgbClr val="CCCCCC"/>
-                </a:solidFill>
-                <a:latin typeface="Arial" pitchFamily="34" charset="0"/>
-                <a:ea typeface="Arial" pitchFamily="34" charset="-122"/>
-                <a:cs typeface="Arial" pitchFamily="34" charset="-120"/>
+                  <a:srgbClr val="2B2F36"/>
+                </a:solidFill>
+                <a:latin typeface="Arial" pitchFamily="34" charset="0"/>
+                <a:ea typeface="BIZ UDPGothic" pitchFamily="34" charset="-122"/>
+                <a:cs typeface="BIZ UDPGothic" pitchFamily="34" charset="-120"/>
               </a:rPr>
               <a:t>特に「会社を継ぐこと」への課税は、お金が動かないのに税金だけがかかるという、最も不合理な部分です。提言003の「強い中堅企業を育てる」という方向性とも真っ向から矛盾しています。</a:t>
             </a:r>
@@ -11881,7 +11881,7 @@
     <p:bg>
       <p:bgPr>
         <a:solidFill>
-          <a:srgbClr val="0A0A0A"/>
+          <a:srgbClr val="F5F6F8"/>
         </a:solidFill>
       </p:bgPr>
     </p:bg>
@@ -11926,11 +11926,11 @@
             <a:r>
               <a:rPr lang="en-US" sz="1200" b="1" spc="300" kern="0" dirty="0">
                 <a:solidFill>
-                  <a:srgbClr val="D62828"/>
-                </a:solidFill>
-                <a:latin typeface="Arial" pitchFamily="34" charset="0"/>
-                <a:ea typeface="Arial" pitchFamily="34" charset="-122"/>
-                <a:cs typeface="Arial" pitchFamily="34" charset="-120"/>
+                  <a:srgbClr val="C8161D"/>
+                </a:solidFill>
+                <a:latin typeface="Arial" pitchFamily="34" charset="0"/>
+                <a:ea typeface="BIZ UDPGothic" pitchFamily="34" charset="-122"/>
+                <a:cs typeface="BIZ UDPGothic" pitchFamily="34" charset="-120"/>
               </a:rPr>
               <a:t>用語解説</a:t>
             </a:r>
@@ -11965,11 +11965,11 @@
             <a:r>
               <a:rPr lang="en-US" sz="3000" b="1" dirty="0">
                 <a:solidFill>
-                  <a:srgbClr val="F5F5F0"/>
-                </a:solidFill>
-                <a:latin typeface="Arial" pitchFamily="34" charset="0"/>
-                <a:ea typeface="Arial" pitchFamily="34" charset="-122"/>
-                <a:cs typeface="Arial" pitchFamily="34" charset="-120"/>
+                  <a:srgbClr val="16181D"/>
+                </a:solidFill>
+                <a:latin typeface="Arial" pitchFamily="34" charset="0"/>
+                <a:ea typeface="BIZ UDPGothic" pitchFamily="34" charset="-122"/>
+                <a:cs typeface="BIZ UDPGothic" pitchFamily="34" charset="-120"/>
               </a:rPr>
               <a:t>そもそも「相続税」って何？</a:t>
             </a:r>
@@ -12004,11 +12004,11 @@
             <a:r>
               <a:rPr lang="en-US" sz="1000" dirty="0">
                 <a:solidFill>
-                  <a:srgbClr val="CCCCCC"/>
-                </a:solidFill>
-                <a:latin typeface="Arial" pitchFamily="34" charset="0"/>
-                <a:ea typeface="Arial" pitchFamily="34" charset="-122"/>
-                <a:cs typeface="Arial" pitchFamily="34" charset="-120"/>
+                  <a:srgbClr val="2B2F36"/>
+                </a:solidFill>
+                <a:latin typeface="Arial" pitchFamily="34" charset="0"/>
+                <a:ea typeface="BIZ UDPGothic" pitchFamily="34" charset="-122"/>
+                <a:cs typeface="BIZ UDPGothic" pitchFamily="34" charset="-120"/>
               </a:rPr>
               <a:t>04</a:t>
             </a:r>
@@ -12043,11 +12043,11 @@
             <a:r>
               <a:rPr lang="en-US" sz="900" dirty="0">
                 <a:solidFill>
-                  <a:srgbClr val="555555"/>
-                </a:solidFill>
-                <a:latin typeface="Arial" pitchFamily="34" charset="0"/>
-                <a:ea typeface="Arial" pitchFamily="34" charset="-122"/>
-                <a:cs typeface="Arial" pitchFamily="34" charset="-120"/>
+                  <a:srgbClr val="9AA0AA"/>
+                </a:solidFill>
+                <a:latin typeface="Arial" pitchFamily="34" charset="0"/>
+                <a:ea typeface="BIZ UDPGothic" pitchFamily="34" charset="-122"/>
+                <a:cs typeface="BIZ UDPGothic" pitchFamily="34" charset="-120"/>
               </a:rPr>
               <a:t>REBOOT JAPAN ── 提言004</a:t>
             </a:r>
@@ -12072,11 +12072,11 @@
             </a:avLst>
           </a:prstGeom>
           <a:solidFill>
-            <a:srgbClr val="1A1A1A"/>
+            <a:srgbClr val="FFFFFF"/>
           </a:solidFill>
           <a:ln w="12700">
             <a:solidFill>
-              <a:srgbClr val="2E2E2E"/>
+              <a:srgbClr val="DDE0E6"/>
             </a:solidFill>
             <a:prstDash val="solid"/>
           </a:ln>
@@ -12097,11 +12097,11 @@
             <a:avLst/>
           </a:prstGeom>
           <a:solidFill>
-            <a:srgbClr val="0A0A0A"/>
+            <a:srgbClr val="F5F6F8"/>
           </a:solidFill>
           <a:ln w="12700">
             <a:solidFill>
-              <a:srgbClr val="2E2E2E"/>
+              <a:srgbClr val="DDE0E6"/>
             </a:solidFill>
             <a:prstDash val="solid"/>
           </a:ln>
@@ -12161,11 +12161,11 @@
             <a:r>
               <a:rPr lang="en-US" sz="1500" b="1" dirty="0">
                 <a:solidFill>
-                  <a:srgbClr val="F5F5F0"/>
-                </a:solidFill>
-                <a:latin typeface="Arial" pitchFamily="34" charset="0"/>
-                <a:ea typeface="Arial" pitchFamily="34" charset="-122"/>
-                <a:cs typeface="Arial" pitchFamily="34" charset="-120"/>
+                  <a:srgbClr val="16181D"/>
+                </a:solidFill>
+                <a:latin typeface="Arial" pitchFamily="34" charset="0"/>
+                <a:ea typeface="BIZ UDPGothic" pitchFamily="34" charset="-122"/>
+                <a:cs typeface="BIZ UDPGothic" pitchFamily="34" charset="-120"/>
               </a:rPr>
               <a:t>相続税とは</a:t>
             </a:r>
@@ -12203,11 +12203,11 @@
             <a:r>
               <a:rPr lang="en-US" sz="1200" dirty="0">
                 <a:solidFill>
-                  <a:srgbClr val="CCCCCC"/>
-                </a:solidFill>
-                <a:latin typeface="Arial" pitchFamily="34" charset="0"/>
-                <a:ea typeface="Arial" pitchFamily="34" charset="-122"/>
-                <a:cs typeface="Arial" pitchFamily="34" charset="-120"/>
+                  <a:srgbClr val="2B2F36"/>
+                </a:solidFill>
+                <a:latin typeface="Arial" pitchFamily="34" charset="0"/>
+                <a:ea typeface="BIZ UDPGothic" pitchFamily="34" charset="-122"/>
+                <a:cs typeface="BIZ UDPGothic" pitchFamily="34" charset="-120"/>
               </a:rPr>
               <a:t>人が亡くなったとき、その人が持っていた財産（家・お金・株など）を家族が受け継ぐ際にかかる税金のことです。</a:t>
             </a:r>
@@ -12232,11 +12232,11 @@
             <a:r>
               <a:rPr lang="en-US" sz="1200" dirty="0">
                 <a:solidFill>
-                  <a:srgbClr val="CCCCCC"/>
-                </a:solidFill>
-                <a:latin typeface="Arial" pitchFamily="34" charset="0"/>
-                <a:ea typeface="Arial" pitchFamily="34" charset="-122"/>
-                <a:cs typeface="Arial" pitchFamily="34" charset="-120"/>
+                  <a:srgbClr val="2B2F36"/>
+                </a:solidFill>
+                <a:latin typeface="Arial" pitchFamily="34" charset="0"/>
+                <a:ea typeface="BIZ UDPGothic" pitchFamily="34" charset="-122"/>
+                <a:cs typeface="BIZ UDPGothic" pitchFamily="34" charset="-120"/>
               </a:rPr>
               <a:t>「もらった財産の額」が大きいほど、税金も大きくなる仕組みになっています。</a:t>
             </a:r>
@@ -12261,11 +12261,11 @@
             </a:avLst>
           </a:prstGeom>
           <a:solidFill>
-            <a:srgbClr val="1A1A1A"/>
+            <a:srgbClr val="FFFFFF"/>
           </a:solidFill>
           <a:ln w="12700">
             <a:solidFill>
-              <a:srgbClr val="2E2E2E"/>
+              <a:srgbClr val="DDE0E6"/>
             </a:solidFill>
             <a:prstDash val="solid"/>
           </a:ln>
@@ -12286,11 +12286,11 @@
             <a:avLst/>
           </a:prstGeom>
           <a:solidFill>
-            <a:srgbClr val="0A0A0A"/>
+            <a:srgbClr val="F5F6F8"/>
           </a:solidFill>
           <a:ln w="12700">
             <a:solidFill>
-              <a:srgbClr val="2E2E2E"/>
+              <a:srgbClr val="DDE0E6"/>
             </a:solidFill>
             <a:prstDash val="solid"/>
           </a:ln>
@@ -12350,11 +12350,11 @@
             <a:r>
               <a:rPr lang="en-US" sz="1500" b="1" dirty="0">
                 <a:solidFill>
-                  <a:srgbClr val="F5F5F0"/>
-                </a:solidFill>
-                <a:latin typeface="Arial" pitchFamily="34" charset="0"/>
-                <a:ea typeface="Arial" pitchFamily="34" charset="-122"/>
-                <a:cs typeface="Arial" pitchFamily="34" charset="-120"/>
+                  <a:srgbClr val="16181D"/>
+                </a:solidFill>
+                <a:latin typeface="Arial" pitchFamily="34" charset="0"/>
+                <a:ea typeface="BIZ UDPGothic" pitchFamily="34" charset="-122"/>
+                <a:cs typeface="BIZ UDPGothic" pitchFamily="34" charset="-120"/>
               </a:rPr>
               <a:t>今の基礎控除（非課税のライン）</a:t>
             </a:r>
@@ -12392,11 +12392,11 @@
             <a:r>
               <a:rPr lang="en-US" sz="1200" dirty="0">
                 <a:solidFill>
-                  <a:srgbClr val="CCCCCC"/>
-                </a:solidFill>
-                <a:latin typeface="Arial" pitchFamily="34" charset="0"/>
-                <a:ea typeface="Arial" pitchFamily="34" charset="-122"/>
-                <a:cs typeface="Arial" pitchFamily="34" charset="-120"/>
+                  <a:srgbClr val="2B2F36"/>
+                </a:solidFill>
+                <a:latin typeface="Arial" pitchFamily="34" charset="0"/>
+                <a:ea typeface="BIZ UDPGothic" pitchFamily="34" charset="-122"/>
+                <a:cs typeface="BIZ UDPGothic" pitchFamily="34" charset="-120"/>
               </a:rPr>
               <a:t>3,000万円＋600万円×相続する人数、までは税金がかかりません。</a:t>
             </a:r>
@@ -12421,11 +12421,11 @@
             <a:r>
               <a:rPr lang="en-US" sz="1200" dirty="0">
                 <a:solidFill>
-                  <a:srgbClr val="CCCCCC"/>
-                </a:solidFill>
-                <a:latin typeface="Arial" pitchFamily="34" charset="0"/>
-                <a:ea typeface="Arial" pitchFamily="34" charset="-122"/>
-                <a:cs typeface="Arial" pitchFamily="34" charset="-120"/>
+                  <a:srgbClr val="2B2F36"/>
+                </a:solidFill>
+                <a:latin typeface="Arial" pitchFamily="34" charset="0"/>
+                <a:ea typeface="BIZ UDPGothic" pitchFamily="34" charset="-122"/>
+                <a:cs typeface="BIZ UDPGothic" pitchFamily="34" charset="-120"/>
               </a:rPr>
               <a:t>例えば家族3人なら、3,000万円＋600万円×3人＝4,800万円が非課税のラインです。</a:t>
             </a:r>
@@ -12447,7 +12447,7 @@
     <p:bg>
       <p:bgPr>
         <a:solidFill>
-          <a:srgbClr val="0A0A0A"/>
+          <a:srgbClr val="F5F6F8"/>
         </a:solidFill>
       </p:bgPr>
     </p:bg>
@@ -12492,11 +12492,11 @@
             <a:r>
               <a:rPr lang="en-US" sz="1200" b="1" spc="300" kern="0" dirty="0">
                 <a:solidFill>
-                  <a:srgbClr val="D62828"/>
-                </a:solidFill>
-                <a:latin typeface="Arial" pitchFamily="34" charset="0"/>
-                <a:ea typeface="Arial" pitchFamily="34" charset="-122"/>
-                <a:cs typeface="Arial" pitchFamily="34" charset="-120"/>
+                  <a:srgbClr val="C8161D"/>
+                </a:solidFill>
+                <a:latin typeface="Arial" pitchFamily="34" charset="0"/>
+                <a:ea typeface="BIZ UDPGothic" pitchFamily="34" charset="-122"/>
+                <a:cs typeface="BIZ UDPGothic" pitchFamily="34" charset="-120"/>
               </a:rPr>
               <a:t>1. 問題① 線引きが低すぎる</a:t>
             </a:r>
@@ -12531,11 +12531,11 @@
             <a:r>
               <a:rPr lang="en-US" sz="3000" b="1" dirty="0">
                 <a:solidFill>
-                  <a:srgbClr val="F5F5F0"/>
-                </a:solidFill>
-                <a:latin typeface="Arial" pitchFamily="34" charset="0"/>
-                <a:ea typeface="Arial" pitchFamily="34" charset="-122"/>
-                <a:cs typeface="Arial" pitchFamily="34" charset="-120"/>
+                  <a:srgbClr val="16181D"/>
+                </a:solidFill>
+                <a:latin typeface="Arial" pitchFamily="34" charset="0"/>
+                <a:ea typeface="BIZ UDPGothic" pitchFamily="34" charset="-122"/>
+                <a:cs typeface="BIZ UDPGothic" pitchFamily="34" charset="-120"/>
               </a:rPr>
               <a:t>東京に家があるだけで、税金がかかる</a:t>
             </a:r>
@@ -12570,11 +12570,11 @@
             <a:r>
               <a:rPr lang="en-US" sz="1000" dirty="0">
                 <a:solidFill>
-                  <a:srgbClr val="CCCCCC"/>
-                </a:solidFill>
-                <a:latin typeface="Arial" pitchFamily="34" charset="0"/>
-                <a:ea typeface="Arial" pitchFamily="34" charset="-122"/>
-                <a:cs typeface="Arial" pitchFamily="34" charset="-120"/>
+                  <a:srgbClr val="2B2F36"/>
+                </a:solidFill>
+                <a:latin typeface="Arial" pitchFamily="34" charset="0"/>
+                <a:ea typeface="BIZ UDPGothic" pitchFamily="34" charset="-122"/>
+                <a:cs typeface="BIZ UDPGothic" pitchFamily="34" charset="-120"/>
               </a:rPr>
               <a:t>05</a:t>
             </a:r>
@@ -12609,11 +12609,11 @@
             <a:r>
               <a:rPr lang="en-US" sz="900" dirty="0">
                 <a:solidFill>
-                  <a:srgbClr val="555555"/>
-                </a:solidFill>
-                <a:latin typeface="Arial" pitchFamily="34" charset="0"/>
-                <a:ea typeface="Arial" pitchFamily="34" charset="-122"/>
-                <a:cs typeface="Arial" pitchFamily="34" charset="-120"/>
+                  <a:srgbClr val="9AA0AA"/>
+                </a:solidFill>
+                <a:latin typeface="Arial" pitchFamily="34" charset="0"/>
+                <a:ea typeface="BIZ UDPGothic" pitchFamily="34" charset="-122"/>
+                <a:cs typeface="BIZ UDPGothic" pitchFamily="34" charset="-120"/>
               </a:rPr>
               <a:t>REBOOT JAPAN ── 提言004</a:t>
             </a:r>
@@ -12648,11 +12648,11 @@
             <a:r>
               <a:rPr lang="en-US" sz="1400" dirty="0">
                 <a:solidFill>
-                  <a:srgbClr val="CCCCCC"/>
-                </a:solidFill>
-                <a:latin typeface="Arial" pitchFamily="34" charset="0"/>
-                <a:ea typeface="Arial" pitchFamily="34" charset="-122"/>
-                <a:cs typeface="Arial" pitchFamily="34" charset="-120"/>
+                  <a:srgbClr val="2B2F36"/>
+                </a:solidFill>
+                <a:latin typeface="Arial" pitchFamily="34" charset="0"/>
+                <a:ea typeface="BIZ UDPGothic" pitchFamily="34" charset="-122"/>
+                <a:cs typeface="BIZ UDPGothic" pitchFamily="34" charset="-120"/>
               </a:rPr>
               <a:t>4,800万円（家族3人の場合）という非課税のラインは、実は高くありません。</a:t>
             </a:r>
@@ -12677,11 +12677,11 @@
             </a:avLst>
           </a:prstGeom>
           <a:solidFill>
-            <a:srgbClr val="1A1A1A"/>
+            <a:srgbClr val="FFFFFF"/>
           </a:solidFill>
           <a:ln w="19050">
             <a:solidFill>
-              <a:srgbClr val="D62828"/>
+              <a:srgbClr val="C8161D"/>
             </a:solidFill>
             <a:prstDash val="solid"/>
           </a:ln>
@@ -12738,11 +12738,11 @@
             <a:r>
               <a:rPr lang="en-US" sz="1700" b="1" dirty="0">
                 <a:solidFill>
-                  <a:srgbClr val="F5F5F0"/>
-                </a:solidFill>
-                <a:latin typeface="Arial" pitchFamily="34" charset="0"/>
-                <a:ea typeface="Arial" pitchFamily="34" charset="-122"/>
-                <a:cs typeface="Arial" pitchFamily="34" charset="-120"/>
+                  <a:srgbClr val="16181D"/>
+                </a:solidFill>
+                <a:latin typeface="Arial" pitchFamily="34" charset="0"/>
+                <a:ea typeface="BIZ UDPGothic" pitchFamily="34" charset="-122"/>
+                <a:cs typeface="BIZ UDPGothic" pitchFamily="34" charset="-120"/>
               </a:rPr>
               <a:t>東京の一等地などに家を持っているだけで、それだけでボーダーを超えてしまう</a:t>
             </a:r>
@@ -12780,11 +12780,11 @@
             <a:r>
               <a:rPr lang="en-US" sz="1350" dirty="0">
                 <a:solidFill>
-                  <a:srgbClr val="CCCCCC"/>
-                </a:solidFill>
-                <a:latin typeface="Arial" pitchFamily="34" charset="0"/>
-                <a:ea typeface="Arial" pitchFamily="34" charset="-122"/>
-                <a:cs typeface="Arial" pitchFamily="34" charset="-120"/>
+                  <a:srgbClr val="2B2F36"/>
+                </a:solidFill>
+                <a:latin typeface="Arial" pitchFamily="34" charset="0"/>
+                <a:ea typeface="BIZ UDPGothic" pitchFamily="34" charset="-122"/>
+                <a:cs typeface="BIZ UDPGothic" pitchFamily="34" charset="-120"/>
               </a:rPr>
               <a:t>つまり、生涯まじめに働いて家と退職金を築いただけの「一般的な家庭」が、相続税の課税対象になってしまっているのです。</a:t>
             </a:r>
@@ -12819,11 +12819,11 @@
             <a:r>
               <a:rPr lang="en-US" sz="1300" i="1" dirty="0">
                 <a:solidFill>
-                  <a:srgbClr val="D62828"/>
-                </a:solidFill>
-                <a:latin typeface="Arial" pitchFamily="34" charset="0"/>
-                <a:ea typeface="Arial" pitchFamily="34" charset="-122"/>
-                <a:cs typeface="Arial" pitchFamily="34" charset="-120"/>
+                  <a:srgbClr val="C8161D"/>
+                </a:solidFill>
+                <a:latin typeface="Arial" pitchFamily="34" charset="0"/>
+                <a:ea typeface="BIZ UDPGothic" pitchFamily="34" charset="-122"/>
+                <a:cs typeface="BIZ UDPGothic" pitchFamily="34" charset="-120"/>
               </a:rPr>
               <a:t>これは「ちょっとお金持ち」ではなく「ふつうに頑張って生きてきた人」が対象になっているという問題です。</a:t>
             </a:r>
@@ -12845,7 +12845,7 @@
     <p:bg>
       <p:bgPr>
         <a:solidFill>
-          <a:srgbClr val="0A0A0A"/>
+          <a:srgbClr val="F5F6F8"/>
         </a:solidFill>
       </p:bgPr>
     </p:bg>
@@ -12890,11 +12890,11 @@
             <a:r>
               <a:rPr lang="en-US" sz="1200" b="1" spc="300" kern="0" dirty="0">
                 <a:solidFill>
-                  <a:srgbClr val="D62828"/>
-                </a:solidFill>
-                <a:latin typeface="Arial" pitchFamily="34" charset="0"/>
-                <a:ea typeface="Arial" pitchFamily="34" charset="-122"/>
-                <a:cs typeface="Arial" pitchFamily="34" charset="-120"/>
+                  <a:srgbClr val="C8161D"/>
+                </a:solidFill>
+                <a:latin typeface="Arial" pitchFamily="34" charset="0"/>
+                <a:ea typeface="BIZ UDPGothic" pitchFamily="34" charset="-122"/>
+                <a:cs typeface="BIZ UDPGothic" pitchFamily="34" charset="-120"/>
               </a:rPr>
               <a:t>1. 問題② 生活基盤の破壊</a:t>
             </a:r>
@@ -12929,11 +12929,11 @@
             <a:r>
               <a:rPr lang="en-US" sz="3000" b="1" dirty="0">
                 <a:solidFill>
-                  <a:srgbClr val="F5F5F0"/>
-                </a:solidFill>
-                <a:latin typeface="Arial" pitchFamily="34" charset="0"/>
-                <a:ea typeface="Arial" pitchFamily="34" charset="-122"/>
-                <a:cs typeface="Arial" pitchFamily="34" charset="-120"/>
+                  <a:srgbClr val="16181D"/>
+                </a:solidFill>
+                <a:latin typeface="Arial" pitchFamily="34" charset="0"/>
+                <a:ea typeface="BIZ UDPGothic" pitchFamily="34" charset="-122"/>
+                <a:cs typeface="BIZ UDPGothic" pitchFamily="34" charset="-120"/>
               </a:rPr>
               <a:t>「住んでいる家を売って税金を払う」という悲劇</a:t>
             </a:r>
@@ -12968,11 +12968,11 @@
             <a:r>
               <a:rPr lang="en-US" sz="1000" dirty="0">
                 <a:solidFill>
-                  <a:srgbClr val="CCCCCC"/>
-                </a:solidFill>
-                <a:latin typeface="Arial" pitchFamily="34" charset="0"/>
-                <a:ea typeface="Arial" pitchFamily="34" charset="-122"/>
-                <a:cs typeface="Arial" pitchFamily="34" charset="-120"/>
+                  <a:srgbClr val="2B2F36"/>
+                </a:solidFill>
+                <a:latin typeface="Arial" pitchFamily="34" charset="0"/>
+                <a:ea typeface="BIZ UDPGothic" pitchFamily="34" charset="-122"/>
+                <a:cs typeface="BIZ UDPGothic" pitchFamily="34" charset="-120"/>
               </a:rPr>
               <a:t>06</a:t>
             </a:r>
@@ -13007,11 +13007,11 @@
             <a:r>
               <a:rPr lang="en-US" sz="900" dirty="0">
                 <a:solidFill>
-                  <a:srgbClr val="555555"/>
-                </a:solidFill>
-                <a:latin typeface="Arial" pitchFamily="34" charset="0"/>
-                <a:ea typeface="Arial" pitchFamily="34" charset="-122"/>
-                <a:cs typeface="Arial" pitchFamily="34" charset="-120"/>
+                  <a:srgbClr val="9AA0AA"/>
+                </a:solidFill>
+                <a:latin typeface="Arial" pitchFamily="34" charset="0"/>
+                <a:ea typeface="BIZ UDPGothic" pitchFamily="34" charset="-122"/>
+                <a:cs typeface="BIZ UDPGothic" pitchFamily="34" charset="-120"/>
               </a:rPr>
               <a:t>REBOOT JAPAN ── 提言004</a:t>
             </a:r>
@@ -13036,11 +13036,11 @@
             </a:avLst>
           </a:prstGeom>
           <a:solidFill>
-            <a:srgbClr val="1A1A1A"/>
+            <a:srgbClr val="FFFFFF"/>
           </a:solidFill>
           <a:ln w="12700">
             <a:solidFill>
-              <a:srgbClr val="2E2E2E"/>
+              <a:srgbClr val="DDE0E6"/>
             </a:solidFill>
             <a:prstDash val="solid"/>
           </a:ln>
@@ -13061,11 +13061,11 @@
             <a:avLst/>
           </a:prstGeom>
           <a:solidFill>
-            <a:srgbClr val="0A0A0A"/>
+            <a:srgbClr val="F5F6F8"/>
           </a:solidFill>
           <a:ln w="12700">
             <a:solidFill>
-              <a:srgbClr val="2E2E2E"/>
+              <a:srgbClr val="DDE0E6"/>
             </a:solidFill>
             <a:prstDash val="solid"/>
           </a:ln>
@@ -13125,11 +13125,11 @@
             <a:r>
               <a:rPr lang="en-US" sz="1500" b="1" dirty="0">
                 <a:solidFill>
-                  <a:srgbClr val="F5F5F0"/>
-                </a:solidFill>
-                <a:latin typeface="Arial" pitchFamily="34" charset="0"/>
-                <a:ea typeface="Arial" pitchFamily="34" charset="-122"/>
-                <a:cs typeface="Arial" pitchFamily="34" charset="-120"/>
+                  <a:srgbClr val="16181D"/>
+                </a:solidFill>
+                <a:latin typeface="Arial" pitchFamily="34" charset="0"/>
+                <a:ea typeface="BIZ UDPGothic" pitchFamily="34" charset="-122"/>
+                <a:cs typeface="BIZ UDPGothic" pitchFamily="34" charset="-120"/>
               </a:rPr>
               <a:t>今、起きていること</a:t>
             </a:r>
@@ -13167,11 +13167,11 @@
             <a:r>
               <a:rPr lang="en-US" sz="1200" dirty="0">
                 <a:solidFill>
-                  <a:srgbClr val="CCCCCC"/>
-                </a:solidFill>
-                <a:latin typeface="Arial" pitchFamily="34" charset="0"/>
-                <a:ea typeface="Arial" pitchFamily="34" charset="-122"/>
-                <a:cs typeface="Arial" pitchFamily="34" charset="-120"/>
+                  <a:srgbClr val="2B2F36"/>
+                </a:solidFill>
+                <a:latin typeface="Arial" pitchFamily="34" charset="0"/>
+                <a:ea typeface="BIZ UDPGothic" pitchFamily="34" charset="-122"/>
+                <a:cs typeface="BIZ UDPGothic" pitchFamily="34" charset="-120"/>
               </a:rPr>
               <a:t>親が亡くなり、実家を相続した。でも相続税が払えない。</a:t>
             </a:r>
@@ -13196,11 +13196,11 @@
             <a:r>
               <a:rPr lang="en-US" sz="1200" dirty="0">
                 <a:solidFill>
-                  <a:srgbClr val="CCCCCC"/>
-                </a:solidFill>
-                <a:latin typeface="Arial" pitchFamily="34" charset="0"/>
-                <a:ea typeface="Arial" pitchFamily="34" charset="-122"/>
-                <a:cs typeface="Arial" pitchFamily="34" charset="-120"/>
+                  <a:srgbClr val="2B2F36"/>
+                </a:solidFill>
+                <a:latin typeface="Arial" pitchFamily="34" charset="0"/>
+                <a:ea typeface="BIZ UDPGothic" pitchFamily="34" charset="-122"/>
+                <a:cs typeface="BIZ UDPGothic" pitchFamily="34" charset="-120"/>
               </a:rPr>
               <a:t>仕方なく、ずっと住んでいた家を売って、その代金で税金を払う ── という本末転倒な事態が起きています。</a:t>
             </a:r>
@@ -13225,11 +13225,11 @@
             </a:avLst>
           </a:prstGeom>
           <a:solidFill>
-            <a:srgbClr val="1A1A1A"/>
+            <a:srgbClr val="FFFFFF"/>
           </a:solidFill>
           <a:ln w="19050">
             <a:solidFill>
-              <a:srgbClr val="D62828"/>
+              <a:srgbClr val="C8161D"/>
             </a:solidFill>
             <a:prstDash val="solid"/>
           </a:ln>
@@ -13250,11 +13250,11 @@
             <a:avLst/>
           </a:prstGeom>
           <a:solidFill>
-            <a:srgbClr val="0A0A0A"/>
+            <a:srgbClr val="F5F6F8"/>
           </a:solidFill>
           <a:ln w="12700">
             <a:solidFill>
-              <a:srgbClr val="2E2E2E"/>
+              <a:srgbClr val="DDE0E6"/>
             </a:solidFill>
             <a:prstDash val="solid"/>
           </a:ln>
@@ -13314,11 +13314,11 @@
             <a:r>
               <a:rPr lang="en-US" sz="1500" b="1" dirty="0">
                 <a:solidFill>
-                  <a:srgbClr val="F5F5F0"/>
-                </a:solidFill>
-                <a:latin typeface="Arial" pitchFamily="34" charset="0"/>
-                <a:ea typeface="Arial" pitchFamily="34" charset="-122"/>
-                <a:cs typeface="Arial" pitchFamily="34" charset="-120"/>
+                  <a:srgbClr val="16181D"/>
+                </a:solidFill>
+                <a:latin typeface="Arial" pitchFamily="34" charset="0"/>
+                <a:ea typeface="BIZ UDPGothic" pitchFamily="34" charset="-122"/>
+                <a:cs typeface="BIZ UDPGothic" pitchFamily="34" charset="-120"/>
               </a:rPr>
               <a:t>何が問題なのか</a:t>
             </a:r>
@@ -13356,11 +13356,11 @@
             <a:r>
               <a:rPr lang="en-US" sz="1200" dirty="0">
                 <a:solidFill>
-                  <a:srgbClr val="CCCCCC"/>
-                </a:solidFill>
-                <a:latin typeface="Arial" pitchFamily="34" charset="0"/>
-                <a:ea typeface="Arial" pitchFamily="34" charset="-122"/>
-                <a:cs typeface="Arial" pitchFamily="34" charset="-120"/>
+                  <a:srgbClr val="2B2F36"/>
+                </a:solidFill>
+                <a:latin typeface="Arial" pitchFamily="34" charset="0"/>
+                <a:ea typeface="BIZ UDPGothic" pitchFamily="34" charset="-122"/>
+                <a:cs typeface="BIZ UDPGothic" pitchFamily="34" charset="-120"/>
               </a:rPr>
               <a:t>相続税は本来「財産を受け継ぐこと」にかかる税金のはずです。</a:t>
             </a:r>
@@ -13385,11 +13385,11 @@
             <a:r>
               <a:rPr lang="en-US" sz="1200" dirty="0">
                 <a:solidFill>
-                  <a:srgbClr val="CCCCCC"/>
-                </a:solidFill>
-                <a:latin typeface="Arial" pitchFamily="34" charset="0"/>
-                <a:ea typeface="Arial" pitchFamily="34" charset="-122"/>
-                <a:cs typeface="Arial" pitchFamily="34" charset="-120"/>
+                  <a:srgbClr val="2B2F36"/>
+                </a:solidFill>
+                <a:latin typeface="Arial" pitchFamily="34" charset="0"/>
+                <a:ea typeface="BIZ UDPGothic" pitchFamily="34" charset="-122"/>
+                <a:cs typeface="BIZ UDPGothic" pitchFamily="34" charset="-120"/>
               </a:rPr>
               <a:t>それなのに、結果として「生活の場そのものを失う」ことになっているのは、制度の目的とズレています。</a:t>
             </a:r>
@@ -13411,7 +13411,7 @@
     <p:bg>
       <p:bgPr>
         <a:solidFill>
-          <a:srgbClr val="0A0A0A"/>
+          <a:srgbClr val="F5F6F8"/>
         </a:solidFill>
       </p:bgPr>
     </p:bg>
@@ -13456,11 +13456,11 @@
             <a:r>
               <a:rPr lang="en-US" sz="1200" b="1" spc="300" kern="0" dirty="0">
                 <a:solidFill>
-                  <a:srgbClr val="D62828"/>
-                </a:solidFill>
-                <a:latin typeface="Arial" pitchFamily="34" charset="0"/>
-                <a:ea typeface="Arial" pitchFamily="34" charset="-122"/>
-                <a:cs typeface="Arial" pitchFamily="34" charset="-120"/>
+                  <a:srgbClr val="C8161D"/>
+                </a:solidFill>
+                <a:latin typeface="Arial" pitchFamily="34" charset="0"/>
+                <a:ea typeface="BIZ UDPGothic" pitchFamily="34" charset="-122"/>
+                <a:cs typeface="BIZ UDPGothic" pitchFamily="34" charset="-120"/>
               </a:rPr>
               <a:t>1. 問題③ 税率が重すぎる</a:t>
             </a:r>
@@ -13495,11 +13495,11 @@
             <a:r>
               <a:rPr lang="en-US" sz="3000" b="1" dirty="0">
                 <a:solidFill>
-                  <a:srgbClr val="F5F5F0"/>
-                </a:solidFill>
-                <a:latin typeface="Arial" pitchFamily="34" charset="0"/>
-                <a:ea typeface="Arial" pitchFamily="34" charset="-122"/>
-                <a:cs typeface="Arial" pitchFamily="34" charset="-120"/>
+                  <a:srgbClr val="16181D"/>
+                </a:solidFill>
+                <a:latin typeface="Arial" pitchFamily="34" charset="0"/>
+                <a:ea typeface="BIZ UDPGothic" pitchFamily="34" charset="-122"/>
+                <a:cs typeface="BIZ UDPGothic" pitchFamily="34" charset="-120"/>
               </a:rPr>
               <a:t>最高税率55%は「資産整理しないと払えない」</a:t>
             </a:r>
@@ -13534,11 +13534,11 @@
             <a:r>
               <a:rPr lang="en-US" sz="1000" dirty="0">
                 <a:solidFill>
-                  <a:srgbClr val="CCCCCC"/>
-                </a:solidFill>
-                <a:latin typeface="Arial" pitchFamily="34" charset="0"/>
-                <a:ea typeface="Arial" pitchFamily="34" charset="-122"/>
-                <a:cs typeface="Arial" pitchFamily="34" charset="-120"/>
+                  <a:srgbClr val="2B2F36"/>
+                </a:solidFill>
+                <a:latin typeface="Arial" pitchFamily="34" charset="0"/>
+                <a:ea typeface="BIZ UDPGothic" pitchFamily="34" charset="-122"/>
+                <a:cs typeface="BIZ UDPGothic" pitchFamily="34" charset="-120"/>
               </a:rPr>
               <a:t>07</a:t>
             </a:r>
@@ -13573,11 +13573,11 @@
             <a:r>
               <a:rPr lang="en-US" sz="900" dirty="0">
                 <a:solidFill>
-                  <a:srgbClr val="555555"/>
-                </a:solidFill>
-                <a:latin typeface="Arial" pitchFamily="34" charset="0"/>
-                <a:ea typeface="Arial" pitchFamily="34" charset="-122"/>
-                <a:cs typeface="Arial" pitchFamily="34" charset="-120"/>
+                  <a:srgbClr val="9AA0AA"/>
+                </a:solidFill>
+                <a:latin typeface="Arial" pitchFamily="34" charset="0"/>
+                <a:ea typeface="BIZ UDPGothic" pitchFamily="34" charset="-122"/>
+                <a:cs typeface="BIZ UDPGothic" pitchFamily="34" charset="-120"/>
               </a:rPr>
               <a:t>REBOOT JAPAN ── 提言004</a:t>
             </a:r>
@@ -13612,11 +13612,11 @@
             <a:r>
               <a:rPr lang="en-US" sz="1400" dirty="0">
                 <a:solidFill>
-                  <a:srgbClr val="CCCCCC"/>
-                </a:solidFill>
-                <a:latin typeface="Arial" pitchFamily="34" charset="0"/>
-                <a:ea typeface="Arial" pitchFamily="34" charset="-122"/>
-                <a:cs typeface="Arial" pitchFamily="34" charset="-120"/>
+                  <a:srgbClr val="2B2F36"/>
+                </a:solidFill>
+                <a:latin typeface="Arial" pitchFamily="34" charset="0"/>
+                <a:ea typeface="BIZ UDPGothic" pitchFamily="34" charset="-122"/>
+                <a:cs typeface="BIZ UDPGothic" pitchFamily="34" charset="-120"/>
               </a:rPr>
               <a:t>もらった財産のうち、半分以上を税金として持っていかれる ── これが、現行制度の最高税率です。</a:t>
             </a:r>
@@ -13639,7 +13639,7 @@
             <a:avLst/>
           </a:prstGeom>
           <a:solidFill>
-            <a:srgbClr val="1A1A1A"/>
+            <a:srgbClr val="FFFFFF"/>
           </a:solidFill>
           <a:ln/>
         </p:spPr>
@@ -13659,7 +13659,7 @@
             <a:avLst/>
           </a:prstGeom>
           <a:solidFill>
-            <a:srgbClr val="D62828"/>
+            <a:srgbClr val="C8161D"/>
           </a:solidFill>
           <a:ln/>
         </p:spPr>
@@ -13691,11 +13691,11 @@
             <a:r>
               <a:rPr lang="en-US" sz="1400" b="1" dirty="0">
                 <a:solidFill>
-                  <a:srgbClr val="F5F5F0"/>
-                </a:solidFill>
-                <a:latin typeface="Arial" pitchFamily="34" charset="0"/>
-                <a:ea typeface="Arial" pitchFamily="34" charset="-122"/>
-                <a:cs typeface="Arial" pitchFamily="34" charset="-120"/>
+                  <a:srgbClr val="FFFFFF"/>
+                </a:solidFill>
+                <a:latin typeface="Arial" pitchFamily="34" charset="0"/>
+                <a:ea typeface="BIZ UDPGothic" pitchFamily="34" charset="-122"/>
+                <a:cs typeface="BIZ UDPGothic" pitchFamily="34" charset="-120"/>
               </a:rPr>
               <a:t>55%　税金として持っていかれる</a:t>
             </a:r>
@@ -13730,11 +13730,11 @@
             <a:r>
               <a:rPr lang="en-US" sz="1300" dirty="0">
                 <a:solidFill>
-                  <a:srgbClr val="CCCCCC"/>
-                </a:solidFill>
-                <a:latin typeface="Arial" pitchFamily="34" charset="0"/>
-                <a:ea typeface="Arial" pitchFamily="34" charset="-122"/>
-                <a:cs typeface="Arial" pitchFamily="34" charset="-120"/>
+                  <a:srgbClr val="2B2F36"/>
+                </a:solidFill>
+                <a:latin typeface="Arial" pitchFamily="34" charset="0"/>
+                <a:ea typeface="BIZ UDPGothic" pitchFamily="34" charset="-122"/>
+                <a:cs typeface="BIZ UDPGothic" pitchFamily="34" charset="-120"/>
               </a:rPr>
               <a:t>45%　手元に残る</a:t>
             </a:r>
@@ -13759,11 +13759,11 @@
             </a:avLst>
           </a:prstGeom>
           <a:solidFill>
-            <a:srgbClr val="1A1A1A"/>
+            <a:srgbClr val="FFFFFF"/>
           </a:solidFill>
           <a:ln w="12700">
             <a:solidFill>
-              <a:srgbClr val="2E2E2E"/>
+              <a:srgbClr val="DDE0E6"/>
             </a:solidFill>
             <a:prstDash val="solid"/>
           </a:ln>
@@ -13799,11 +13799,11 @@
             <a:r>
               <a:rPr lang="en-US" sz="1300" dirty="0">
                 <a:solidFill>
-                  <a:srgbClr val="CCCCCC"/>
-                </a:solidFill>
-                <a:latin typeface="Arial" pitchFamily="34" charset="0"/>
-                <a:ea typeface="Arial" pitchFamily="34" charset="-122"/>
-                <a:cs typeface="Arial" pitchFamily="34" charset="-120"/>
+                  <a:srgbClr val="2B2F36"/>
+                </a:solidFill>
+                <a:latin typeface="Arial" pitchFamily="34" charset="0"/>
+                <a:ea typeface="BIZ UDPGothic" pitchFamily="34" charset="-122"/>
+                <a:cs typeface="BIZ UDPGothic" pitchFamily="34" charset="-120"/>
               </a:rPr>
               <a:t>不動産や自社の株式など、すぐには現金化できない財産を多く持っている人ほど、税金を払うために資産の大部分を整理しなければならなくなります。どれだけ資産を築いた人に対しても、これは行き過ぎた負担です。</a:t>
             </a:r>
@@ -13825,7 +13825,7 @@
     <p:bg>
       <p:bgPr>
         <a:solidFill>
-          <a:srgbClr val="0A0A0A"/>
+          <a:srgbClr val="F5F6F8"/>
         </a:solidFill>
       </p:bgPr>
     </p:bg>
@@ -13870,11 +13870,11 @@
             <a:r>
               <a:rPr lang="en-US" sz="1200" b="1" spc="300" kern="0" dirty="0">
                 <a:solidFill>
-                  <a:srgbClr val="D62828"/>
-                </a:solidFill>
-                <a:latin typeface="Arial" pitchFamily="34" charset="0"/>
-                <a:ea typeface="Arial" pitchFamily="34" charset="-122"/>
-                <a:cs typeface="Arial" pitchFamily="34" charset="-120"/>
+                  <a:srgbClr val="C8161D"/>
+                </a:solidFill>
+                <a:latin typeface="Arial" pitchFamily="34" charset="0"/>
+                <a:ea typeface="BIZ UDPGothic" pitchFamily="34" charset="-122"/>
+                <a:cs typeface="BIZ UDPGothic" pitchFamily="34" charset="-120"/>
               </a:rPr>
               <a:t>1. 問題④ 最大の矛盾</a:t>
             </a:r>
@@ -13909,11 +13909,11 @@
             <a:r>
               <a:rPr lang="en-US" sz="3000" b="1" dirty="0">
                 <a:solidFill>
-                  <a:srgbClr val="F5F5F0"/>
-                </a:solidFill>
-                <a:latin typeface="Arial" pitchFamily="34" charset="0"/>
-                <a:ea typeface="Arial" pitchFamily="34" charset="-122"/>
-                <a:cs typeface="Arial" pitchFamily="34" charset="-120"/>
+                  <a:srgbClr val="16181D"/>
+                </a:solidFill>
+                <a:latin typeface="Arial" pitchFamily="34" charset="0"/>
+                <a:ea typeface="BIZ UDPGothic" pitchFamily="34" charset="-122"/>
+                <a:cs typeface="BIZ UDPGothic" pitchFamily="34" charset="-120"/>
               </a:rPr>
               <a:t>会社を継ぐだけなのに、お金がないのに税金がかかる</a:t>
             </a:r>
@@ -13948,11 +13948,11 @@
             <a:r>
               <a:rPr lang="en-US" sz="1000" dirty="0">
                 <a:solidFill>
-                  <a:srgbClr val="CCCCCC"/>
-                </a:solidFill>
-                <a:latin typeface="Arial" pitchFamily="34" charset="0"/>
-                <a:ea typeface="Arial" pitchFamily="34" charset="-122"/>
-                <a:cs typeface="Arial" pitchFamily="34" charset="-120"/>
+                  <a:srgbClr val="2B2F36"/>
+                </a:solidFill>
+                <a:latin typeface="Arial" pitchFamily="34" charset="0"/>
+                <a:ea typeface="BIZ UDPGothic" pitchFamily="34" charset="-122"/>
+                <a:cs typeface="BIZ UDPGothic" pitchFamily="34" charset="-120"/>
               </a:rPr>
               <a:t>08</a:t>
             </a:r>
@@ -13987,11 +13987,11 @@
             <a:r>
               <a:rPr lang="en-US" sz="900" dirty="0">
                 <a:solidFill>
-                  <a:srgbClr val="555555"/>
-                </a:solidFill>
-                <a:latin typeface="Arial" pitchFamily="34" charset="0"/>
-                <a:ea typeface="Arial" pitchFamily="34" charset="-122"/>
-                <a:cs typeface="Arial" pitchFamily="34" charset="-120"/>
+                  <a:srgbClr val="9AA0AA"/>
+                </a:solidFill>
+                <a:latin typeface="Arial" pitchFamily="34" charset="0"/>
+                <a:ea typeface="BIZ UDPGothic" pitchFamily="34" charset="-122"/>
+                <a:cs typeface="BIZ UDPGothic" pitchFamily="34" charset="-120"/>
               </a:rPr>
               <a:t>REBOOT JAPAN ── 提言004</a:t>
             </a:r>
@@ -14016,11 +14016,11 @@
             </a:avLst>
           </a:prstGeom>
           <a:solidFill>
-            <a:srgbClr val="1A1A1A"/>
+            <a:srgbClr val="FFFFFF"/>
           </a:solidFill>
           <a:ln w="19050">
             <a:solidFill>
-              <a:srgbClr val="D62828"/>
+              <a:srgbClr val="C8161D"/>
             </a:solidFill>
             <a:prstDash val="solid"/>
           </a:ln>
@@ -14080,11 +14080,11 @@
             <a:r>
               <a:rPr lang="en-US" sz="1600" b="1" dirty="0">
                 <a:solidFill>
-                  <a:srgbClr val="F5F5F0"/>
-                </a:solidFill>
-                <a:latin typeface="Arial" pitchFamily="34" charset="0"/>
-                <a:ea typeface="Arial" pitchFamily="34" charset="-122"/>
-                <a:cs typeface="Arial" pitchFamily="34" charset="-120"/>
+                  <a:srgbClr val="16181D"/>
+                </a:solidFill>
+                <a:latin typeface="Arial" pitchFamily="34" charset="0"/>
+                <a:ea typeface="BIZ UDPGothic" pitchFamily="34" charset="-122"/>
+                <a:cs typeface="BIZ UDPGothic" pitchFamily="34" charset="-120"/>
               </a:rPr>
               <a:t>会社のオーナーが亡くなり、子や孫が経営を引き継ぐ場合、自社の株式の評価額に対して相続税がかかる</a:t>
             </a:r>
@@ -14122,11 +14122,11 @@
             <a:r>
               <a:rPr lang="en-US" sz="1300" dirty="0">
                 <a:solidFill>
-                  <a:srgbClr val="CCCCCC"/>
-                </a:solidFill>
-                <a:latin typeface="Arial" pitchFamily="34" charset="0"/>
-                <a:ea typeface="Arial" pitchFamily="34" charset="-122"/>
-                <a:cs typeface="Arial" pitchFamily="34" charset="-120"/>
+                  <a:srgbClr val="2B2F36"/>
+                </a:solidFill>
+                <a:latin typeface="Arial" pitchFamily="34" charset="0"/>
+                <a:ea typeface="BIZ UDPGothic" pitchFamily="34" charset="-122"/>
+                <a:cs typeface="BIZ UDPGothic" pitchFamily="34" charset="-120"/>
               </a:rPr>
               <a:t>しかし、株式の評価額が高くても、相続人の手元に現金が入るわけではありません。会社の「所有権」が移るだけです。</a:t>
             </a:r>
@@ -14161,11 +14161,11 @@
             <a:r>
               <a:rPr lang="en-US" sz="1500" b="1" dirty="0">
                 <a:solidFill>
-                  <a:srgbClr val="D62828"/>
-                </a:solidFill>
-                <a:latin typeface="Arial" pitchFamily="34" charset="0"/>
-                <a:ea typeface="Arial" pitchFamily="34" charset="-122"/>
-                <a:cs typeface="Arial" pitchFamily="34" charset="-120"/>
+                  <a:srgbClr val="C8161D"/>
+                </a:solidFill>
+                <a:latin typeface="Arial" pitchFamily="34" charset="0"/>
+                <a:ea typeface="BIZ UDPGothic" pitchFamily="34" charset="-122"/>
+                <a:cs typeface="BIZ UDPGothic" pitchFamily="34" charset="-120"/>
               </a:rPr>
               <a:t>結果として、何が起きるか？</a:t>
             </a:r>
@@ -14204,11 +14204,11 @@
             <a:r>
               <a:rPr lang="en-US" sz="1350" dirty="0">
                 <a:solidFill>
-                  <a:srgbClr val="CCCCCC"/>
-                </a:solidFill>
-                <a:latin typeface="Arial" pitchFamily="34" charset="0"/>
-                <a:ea typeface="Arial" pitchFamily="34" charset="-122"/>
-                <a:cs typeface="Arial" pitchFamily="34" charset="-120"/>
+                  <a:srgbClr val="2B2F36"/>
+                </a:solidFill>
+                <a:latin typeface="Arial" pitchFamily="34" charset="0"/>
+                <a:ea typeface="BIZ UDPGothic" pitchFamily="34" charset="-122"/>
+                <a:cs typeface="BIZ UDPGothic" pitchFamily="34" charset="-120"/>
               </a:rPr>
               <a:t>納税のために自社の株式を売却する</a:t>
             </a:r>
@@ -14225,11 +14225,11 @@
             <a:r>
               <a:rPr lang="en-US" sz="1350" dirty="0">
                 <a:solidFill>
-                  <a:srgbClr val="CCCCCC"/>
-                </a:solidFill>
-                <a:latin typeface="Arial" pitchFamily="34" charset="0"/>
-                <a:ea typeface="Arial" pitchFamily="34" charset="-122"/>
-                <a:cs typeface="Arial" pitchFamily="34" charset="-120"/>
+                  <a:srgbClr val="2B2F36"/>
+                </a:solidFill>
+                <a:latin typeface="Arial" pitchFamily="34" charset="0"/>
+                <a:ea typeface="BIZ UDPGothic" pitchFamily="34" charset="-122"/>
+                <a:cs typeface="BIZ UDPGothic" pitchFamily="34" charset="-120"/>
               </a:rPr>
               <a:t>会社を解散させる</a:t>
             </a:r>
@@ -14246,11 +14246,11 @@
             <a:r>
               <a:rPr lang="en-US" sz="1350" dirty="0">
                 <a:solidFill>
-                  <a:srgbClr val="CCCCCC"/>
-                </a:solidFill>
-                <a:latin typeface="Arial" pitchFamily="34" charset="0"/>
-                <a:ea typeface="Arial" pitchFamily="34" charset="-122"/>
-                <a:cs typeface="Arial" pitchFamily="34" charset="-120"/>
+                  <a:srgbClr val="2B2F36"/>
+                </a:solidFill>
+                <a:latin typeface="Arial" pitchFamily="34" charset="0"/>
+                <a:ea typeface="BIZ UDPGothic" pitchFamily="34" charset="-122"/>
+                <a:cs typeface="BIZ UDPGothic" pitchFamily="34" charset="-120"/>
               </a:rPr>
               <a:t>銀行から借金をして納税する</a:t>
             </a:r>
@@ -14285,11 +14285,11 @@
             <a:r>
               <a:rPr lang="en-US" sz="1250" i="1" dirty="0">
                 <a:solidFill>
-                  <a:srgbClr val="D62828"/>
-                </a:solidFill>
-                <a:latin typeface="Arial" pitchFamily="34" charset="0"/>
-                <a:ea typeface="Arial" pitchFamily="34" charset="-122"/>
-                <a:cs typeface="Arial" pitchFamily="34" charset="-120"/>
+                  <a:srgbClr val="C8161D"/>
+                </a:solidFill>
+                <a:latin typeface="Arial" pitchFamily="34" charset="0"/>
+                <a:ea typeface="BIZ UDPGothic" pitchFamily="34" charset="-122"/>
+                <a:cs typeface="BIZ UDPGothic" pitchFamily="34" charset="-120"/>
               </a:rPr>
               <a:t>せっかく育った会社が、創業者の死をきっかけに壊れてしまう ── これが現実です。</a:t>
             </a:r>
@@ -14311,7 +14311,7 @@
     <p:bg>
       <p:bgPr>
         <a:solidFill>
-          <a:srgbClr val="0A0A0A"/>
+          <a:srgbClr val="F5F6F8"/>
         </a:solidFill>
       </p:bgPr>
     </p:bg>
@@ -14356,11 +14356,11 @@
             <a:r>
               <a:rPr lang="en-US" sz="1200" b="1" spc="300" kern="0" dirty="0">
                 <a:solidFill>
-                  <a:srgbClr val="D62828"/>
-                </a:solidFill>
-                <a:latin typeface="Arial" pitchFamily="34" charset="0"/>
-                <a:ea typeface="Arial" pitchFamily="34" charset="-122"/>
-                <a:cs typeface="Arial" pitchFamily="34" charset="-120"/>
+                  <a:srgbClr val="C8161D"/>
+                </a:solidFill>
+                <a:latin typeface="Arial" pitchFamily="34" charset="0"/>
+                <a:ea typeface="BIZ UDPGothic" pitchFamily="34" charset="-122"/>
+                <a:cs typeface="BIZ UDPGothic" pitchFamily="34" charset="-120"/>
               </a:rPr>
               <a:t>用語解説</a:t>
             </a:r>
@@ -14395,11 +14395,11 @@
             <a:r>
               <a:rPr lang="en-US" sz="3000" b="1" dirty="0">
                 <a:solidFill>
-                  <a:srgbClr val="F5F5F0"/>
-                </a:solidFill>
-                <a:latin typeface="Arial" pitchFamily="34" charset="0"/>
-                <a:ea typeface="Arial" pitchFamily="34" charset="-122"/>
-                <a:cs typeface="Arial" pitchFamily="34" charset="-120"/>
+                  <a:srgbClr val="16181D"/>
+                </a:solidFill>
+                <a:latin typeface="Arial" pitchFamily="34" charset="0"/>
+                <a:ea typeface="BIZ UDPGothic" pitchFamily="34" charset="-122"/>
+                <a:cs typeface="BIZ UDPGothic" pitchFamily="34" charset="-120"/>
               </a:rPr>
               <a:t>今ある「救済制度」は、実は不安定</a:t>
             </a:r>
@@ -14434,11 +14434,11 @@
             <a:r>
               <a:rPr lang="en-US" sz="1000" dirty="0">
                 <a:solidFill>
-                  <a:srgbClr val="CCCCCC"/>
-                </a:solidFill>
-                <a:latin typeface="Arial" pitchFamily="34" charset="0"/>
-                <a:ea typeface="Arial" pitchFamily="34" charset="-122"/>
-                <a:cs typeface="Arial" pitchFamily="34" charset="-120"/>
+                  <a:srgbClr val="2B2F36"/>
+                </a:solidFill>
+                <a:latin typeface="Arial" pitchFamily="34" charset="0"/>
+                <a:ea typeface="BIZ UDPGothic" pitchFamily="34" charset="-122"/>
+                <a:cs typeface="BIZ UDPGothic" pitchFamily="34" charset="-120"/>
               </a:rPr>
               <a:t>09</a:t>
             </a:r>
@@ -14473,11 +14473,11 @@
             <a:r>
               <a:rPr lang="en-US" sz="900" dirty="0">
                 <a:solidFill>
-                  <a:srgbClr val="555555"/>
-                </a:solidFill>
-                <a:latin typeface="Arial" pitchFamily="34" charset="0"/>
-                <a:ea typeface="Arial" pitchFamily="34" charset="-122"/>
-                <a:cs typeface="Arial" pitchFamily="34" charset="-120"/>
+                  <a:srgbClr val="9AA0AA"/>
+                </a:solidFill>
+                <a:latin typeface="Arial" pitchFamily="34" charset="0"/>
+                <a:ea typeface="BIZ UDPGothic" pitchFamily="34" charset="-122"/>
+                <a:cs typeface="BIZ UDPGothic" pitchFamily="34" charset="-120"/>
               </a:rPr>
               <a:t>REBOOT JAPAN ── 提言004</a:t>
             </a:r>
@@ -14515,11 +14515,11 @@
             <a:r>
               <a:rPr lang="en-US" sz="1350" dirty="0">
                 <a:solidFill>
-                  <a:srgbClr val="CCCCCC"/>
-                </a:solidFill>
-                <a:latin typeface="Arial" pitchFamily="34" charset="0"/>
-                <a:ea typeface="Arial" pitchFamily="34" charset="-122"/>
-                <a:cs typeface="Arial" pitchFamily="34" charset="-120"/>
+                  <a:srgbClr val="2B2F36"/>
+                </a:solidFill>
+                <a:latin typeface="Arial" pitchFamily="34" charset="0"/>
+                <a:ea typeface="BIZ UDPGothic" pitchFamily="34" charset="-122"/>
+                <a:cs typeface="BIZ UDPGothic" pitchFamily="34" charset="-120"/>
               </a:rPr>
               <a:t>実は今も「事業承継税制（特例措置）」という、自社株式の相続税を100%猶予する制度はあります。でも、これには大きな弱点があります。</a:t>
             </a:r>
@@ -14544,11 +14544,11 @@
             </a:avLst>
           </a:prstGeom>
           <a:solidFill>
-            <a:srgbClr val="1A1A1A"/>
+            <a:srgbClr val="FFFFFF"/>
           </a:solidFill>
           <a:ln w="12700">
             <a:solidFill>
-              <a:srgbClr val="2E2E2E"/>
+              <a:srgbClr val="DDE0E6"/>
             </a:solidFill>
             <a:prstDash val="solid"/>
           </a:ln>
@@ -14581,11 +14581,11 @@
             <a:r>
               <a:rPr lang="en-US" sz="1250" b="1" dirty="0">
                 <a:solidFill>
-                  <a:srgbClr val="D62828"/>
-                </a:solidFill>
-                <a:latin typeface="Arial" pitchFamily="34" charset="0"/>
-                <a:ea typeface="Arial" pitchFamily="34" charset="-122"/>
-                <a:cs typeface="Arial" pitchFamily="34" charset="-120"/>
+                  <a:srgbClr val="C8161D"/>
+                </a:solidFill>
+                <a:latin typeface="Arial" pitchFamily="34" charset="0"/>
+                <a:ea typeface="BIZ UDPGothic" pitchFamily="34" charset="-122"/>
+                <a:cs typeface="BIZ UDPGothic" pitchFamily="34" charset="-120"/>
               </a:rPr>
               <a:t>猶予であって免除ではない</a:t>
             </a:r>
@@ -14620,11 +14620,11 @@
             <a:r>
               <a:rPr lang="en-US" sz="1200" dirty="0">
                 <a:solidFill>
-                  <a:srgbClr val="CCCCCC"/>
-                </a:solidFill>
-                <a:latin typeface="Arial" pitchFamily="34" charset="0"/>
-                <a:ea typeface="Arial" pitchFamily="34" charset="-122"/>
-                <a:cs typeface="Arial" pitchFamily="34" charset="-120"/>
+                  <a:srgbClr val="2B2F36"/>
+                </a:solidFill>
+                <a:latin typeface="Arial" pitchFamily="34" charset="0"/>
+                <a:ea typeface="BIZ UDPGothic" pitchFamily="34" charset="-122"/>
+                <a:cs typeface="BIZ UDPGothic" pitchFamily="34" charset="-120"/>
               </a:rPr>
               <a:t>次の後継者へ引き継ぐまでは「先送り」されているだけ</a:t>
             </a:r>
@@ -14649,11 +14649,11 @@
             </a:avLst>
           </a:prstGeom>
           <a:solidFill>
-            <a:srgbClr val="1A1A1A"/>
+            <a:srgbClr val="FFFFFF"/>
           </a:solidFill>
           <a:ln w="12700">
             <a:solidFill>
-              <a:srgbClr val="2E2E2E"/>
+              <a:srgbClr val="DDE0E6"/>
             </a:solidFill>
             <a:prstDash val="solid"/>
           </a:ln>
@@ -14686,11 +14686,11 @@
             <a:r>
               <a:rPr lang="en-US" sz="1250" b="1" dirty="0">
                 <a:solidFill>
-                  <a:srgbClr val="D62828"/>
-                </a:solidFill>
-                <a:latin typeface="Arial" pitchFamily="34" charset="0"/>
-                <a:ea typeface="Arial" pitchFamily="34" charset="-122"/>
-                <a:cs typeface="Arial" pitchFamily="34" charset="-120"/>
+                  <a:srgbClr val="C8161D"/>
+                </a:solidFill>
+                <a:latin typeface="Arial" pitchFamily="34" charset="0"/>
+                <a:ea typeface="BIZ UDPGothic" pitchFamily="34" charset="-122"/>
+                <a:cs typeface="BIZ UDPGothic" pitchFamily="34" charset="-120"/>
               </a:rPr>
               <a:t>期限付きの制度</a:t>
             </a:r>
@@ -14725,11 +14725,11 @@
             <a:r>
               <a:rPr lang="en-US" sz="1200" dirty="0">
                 <a:solidFill>
-                  <a:srgbClr val="CCCCCC"/>
-                </a:solidFill>
-                <a:latin typeface="Arial" pitchFamily="34" charset="0"/>
-                <a:ea typeface="Arial" pitchFamily="34" charset="-122"/>
-                <a:cs typeface="Arial" pitchFamily="34" charset="-120"/>
+                  <a:srgbClr val="2B2F36"/>
+                </a:solidFill>
+                <a:latin typeface="Arial" pitchFamily="34" charset="0"/>
+                <a:ea typeface="BIZ UDPGothic" pitchFamily="34" charset="-122"/>
+                <a:cs typeface="BIZ UDPGothic" pitchFamily="34" charset="-120"/>
               </a:rPr>
               <a:t>申請期限は令和9年9月末まで。延長されない見込み</a:t>
             </a:r>
@@ -14754,11 +14754,11 @@
             </a:avLst>
           </a:prstGeom>
           <a:solidFill>
-            <a:srgbClr val="1A1A1A"/>
+            <a:srgbClr val="FFFFFF"/>
           </a:solidFill>
           <a:ln w="12700">
             <a:solidFill>
-              <a:srgbClr val="2E2E2E"/>
+              <a:srgbClr val="DDE0E6"/>
             </a:solidFill>
             <a:prstDash val="solid"/>
           </a:ln>
@@ -14791,11 +14791,11 @@
             <a:r>
               <a:rPr lang="en-US" sz="1250" b="1" dirty="0">
                 <a:solidFill>
-                  <a:srgbClr val="D62828"/>
-                </a:solidFill>
-                <a:latin typeface="Arial" pitchFamily="34" charset="0"/>
-                <a:ea typeface="Arial" pitchFamily="34" charset="-122"/>
-                <a:cs typeface="Arial" pitchFamily="34" charset="-120"/>
+                  <a:srgbClr val="C8161D"/>
+                </a:solidFill>
+                <a:latin typeface="Arial" pitchFamily="34" charset="0"/>
+                <a:ea typeface="BIZ UDPGothic" pitchFamily="34" charset="-122"/>
+                <a:cs typeface="BIZ UDPGothic" pitchFamily="34" charset="-120"/>
               </a:rPr>
               <a:t>重い継続条件</a:t>
             </a:r>
@@ -14830,11 +14830,11 @@
             <a:r>
               <a:rPr lang="en-US" sz="1200" dirty="0">
                 <a:solidFill>
-                  <a:srgbClr val="CCCCCC"/>
-                </a:solidFill>
-                <a:latin typeface="Arial" pitchFamily="34" charset="0"/>
-                <a:ea typeface="Arial" pitchFamily="34" charset="-122"/>
-                <a:cs typeface="Arial" pitchFamily="34" charset="-120"/>
+                  <a:srgbClr val="2B2F36"/>
+                </a:solidFill>
+                <a:latin typeface="Arial" pitchFamily="34" charset="0"/>
+                <a:ea typeface="BIZ UDPGothic" pitchFamily="34" charset="-122"/>
+                <a:cs typeface="BIZ UDPGothic" pitchFamily="34" charset="-120"/>
               </a:rPr>
               <a:t>申告から5年間、代表者として経営を続ける必要がある</a:t>
             </a:r>
@@ -14859,11 +14859,11 @@
             </a:avLst>
           </a:prstGeom>
           <a:solidFill>
-            <a:srgbClr val="1A1A1A"/>
+            <a:srgbClr val="FFFFFF"/>
           </a:solidFill>
           <a:ln w="12700">
             <a:solidFill>
-              <a:srgbClr val="2E2E2E"/>
+              <a:srgbClr val="DDE0E6"/>
             </a:solidFill>
             <a:prstDash val="solid"/>
           </a:ln>
@@ -14896,11 +14896,11 @@
             <a:r>
               <a:rPr lang="en-US" sz="1250" b="1" dirty="0">
                 <a:solidFill>
-                  <a:srgbClr val="D62828"/>
-                </a:solidFill>
-                <a:latin typeface="Arial" pitchFamily="34" charset="0"/>
-                <a:ea typeface="Arial" pitchFamily="34" charset="-122"/>
-                <a:cs typeface="Arial" pitchFamily="34" charset="-120"/>
+                  <a:srgbClr val="C8161D"/>
+                </a:solidFill>
+                <a:latin typeface="Arial" pitchFamily="34" charset="0"/>
+                <a:ea typeface="BIZ UDPGothic" pitchFamily="34" charset="-122"/>
+                <a:cs typeface="BIZ UDPGothic" pitchFamily="34" charset="-120"/>
               </a:rPr>
               <a:t>取り消されると一括請求</a:t>
             </a:r>
@@ -14935,11 +14935,11 @@
             <a:r>
               <a:rPr lang="en-US" sz="1200" dirty="0">
                 <a:solidFill>
-                  <a:srgbClr val="CCCCCC"/>
-                </a:solidFill>
-                <a:latin typeface="Arial" pitchFamily="34" charset="0"/>
-                <a:ea typeface="Arial" pitchFamily="34" charset="-122"/>
-                <a:cs typeface="Arial" pitchFamily="34" charset="-120"/>
+                  <a:srgbClr val="2B2F36"/>
+                </a:solidFill>
+                <a:latin typeface="Arial" pitchFamily="34" charset="0"/>
+                <a:ea typeface="BIZ UDPGothic" pitchFamily="34" charset="-122"/>
+                <a:cs typeface="BIZ UDPGothic" pitchFamily="34" charset="-120"/>
               </a:rPr>
               <a:t>条件を破ると、猶予されていた税金＋利息（10年で約4%）が一気に請求される</a:t>
             </a:r>
@@ -14964,11 +14964,11 @@
             </a:avLst>
           </a:prstGeom>
           <a:solidFill>
-            <a:srgbClr val="1A1A1A"/>
+            <a:srgbClr val="FFFFFF"/>
           </a:solidFill>
           <a:ln w="12700">
             <a:solidFill>
-              <a:srgbClr val="2E2E2E"/>
+              <a:srgbClr val="DDE0E6"/>
             </a:solidFill>
             <a:prstDash val="solid"/>
           </a:ln>
@@ -15001,11 +15001,11 @@
             <a:r>
               <a:rPr lang="en-US" sz="1250" b="1" dirty="0">
                 <a:solidFill>
-                  <a:srgbClr val="D62828"/>
-                </a:solidFill>
-                <a:latin typeface="Arial" pitchFamily="34" charset="0"/>
-                <a:ea typeface="Arial" pitchFamily="34" charset="-122"/>
-                <a:cs typeface="Arial" pitchFamily="34" charset="-120"/>
+                  <a:srgbClr val="C8161D"/>
+                </a:solidFill>
+                <a:latin typeface="Arial" pitchFamily="34" charset="0"/>
+                <a:ea typeface="BIZ UDPGothic" pitchFamily="34" charset="-122"/>
+                <a:cs typeface="BIZ UDPGothic" pitchFamily="34" charset="-120"/>
               </a:rPr>
               <a:t>手続きが複雑</a:t>
             </a:r>
@@ -15040,11 +15040,11 @@
             <a:r>
               <a:rPr lang="en-US" sz="1200" dirty="0">
                 <a:solidFill>
-                  <a:srgbClr val="CCCCCC"/>
-                </a:solidFill>
-                <a:latin typeface="Arial" pitchFamily="34" charset="0"/>
-                <a:ea typeface="Arial" pitchFamily="34" charset="-122"/>
-                <a:cs typeface="Arial" pitchFamily="34" charset="-120"/>
+                  <a:srgbClr val="2B2F36"/>
+                </a:solidFill>
+                <a:latin typeface="Arial" pitchFamily="34" charset="0"/>
+                <a:ea typeface="BIZ UDPGothic" pitchFamily="34" charset="-122"/>
+                <a:cs typeface="BIZ UDPGothic" pitchFamily="34" charset="-120"/>
               </a:rPr>
               <a:t>税理士などへの依頼が必須。年間20〜50万円ほどのコストがかかる</a:t>
             </a:r>
